--- a/figures/edited/fig1_edited.pptx
+++ b/figures/edited/fig1_edited.pptx
@@ -4,6 +4,9 @@
   <p:sldMasterIdLst>
     <p:sldMasterId id="2147483672" r:id="rId1"/>
   </p:sldMasterIdLst>
+  <p:notesMasterIdLst>
+    <p:notesMasterId r:id="rId3"/>
+  </p:notesMasterIdLst>
   <p:sldIdLst>
     <p:sldId id="256" r:id="rId2"/>
   </p:sldIdLst>
@@ -112,6 +115,439 @@
 </p:presentation>
 </file>
 
+<file path=ppt/notesMasters/notesMaster1.xml><?xml version="1.0" encoding="utf-8"?>
+<p:notesMaster xmlns:a="http://schemas.openxmlformats.org/drawingml/2006/main" xmlns:r="http://schemas.openxmlformats.org/officeDocument/2006/relationships" xmlns:p="http://schemas.openxmlformats.org/presentationml/2006/main">
+  <p:cSld>
+    <p:bg>
+      <p:bgRef idx="1001">
+        <a:schemeClr val="bg1"/>
+      </p:bgRef>
+    </p:bg>
+    <p:spTree>
+      <p:nvGrpSpPr>
+        <p:cNvPr id="1" name=""/>
+        <p:cNvGrpSpPr/>
+        <p:nvPr/>
+      </p:nvGrpSpPr>
+      <p:grpSpPr>
+        <a:xfrm>
+          <a:off x="0" y="0"/>
+          <a:ext cx="0" cy="0"/>
+          <a:chOff x="0" y="0"/>
+          <a:chExt cx="0" cy="0"/>
+        </a:xfrm>
+      </p:grpSpPr>
+      <p:sp>
+        <p:nvSpPr>
+          <p:cNvPr id="2" name="Header Placeholder 1"/>
+          <p:cNvSpPr>
+            <a:spLocks noGrp="1"/>
+          </p:cNvSpPr>
+          <p:nvPr>
+            <p:ph type="hdr" sz="quarter"/>
+          </p:nvPr>
+        </p:nvSpPr>
+        <p:spPr>
+          <a:xfrm>
+            <a:off x="0" y="0"/>
+            <a:ext cx="2971800" cy="458788"/>
+          </a:xfrm>
+          <a:prstGeom prst="rect">
+            <a:avLst/>
+          </a:prstGeom>
+        </p:spPr>
+        <p:txBody>
+          <a:bodyPr vert="horz" lIns="91440" tIns="45720" rIns="91440" bIns="45720" rtlCol="0"/>
+          <a:lstStyle>
+            <a:lvl1pPr algn="l">
+              <a:defRPr sz="1200"/>
+            </a:lvl1pPr>
+          </a:lstStyle>
+          <a:p>
+            <a:endParaRPr lang="en-US"/>
+          </a:p>
+        </p:txBody>
+      </p:sp>
+      <p:sp>
+        <p:nvSpPr>
+          <p:cNvPr id="3" name="Date Placeholder 2"/>
+          <p:cNvSpPr>
+            <a:spLocks noGrp="1"/>
+          </p:cNvSpPr>
+          <p:nvPr>
+            <p:ph type="dt" idx="1"/>
+          </p:nvPr>
+        </p:nvSpPr>
+        <p:spPr>
+          <a:xfrm>
+            <a:off x="3884613" y="0"/>
+            <a:ext cx="2971800" cy="458788"/>
+          </a:xfrm>
+          <a:prstGeom prst="rect">
+            <a:avLst/>
+          </a:prstGeom>
+        </p:spPr>
+        <p:txBody>
+          <a:bodyPr vert="horz" lIns="91440" tIns="45720" rIns="91440" bIns="45720" rtlCol="0"/>
+          <a:lstStyle>
+            <a:lvl1pPr algn="r">
+              <a:defRPr sz="1200"/>
+            </a:lvl1pPr>
+          </a:lstStyle>
+          <a:p>
+            <a:fld id="{61B7A601-E14C-8240-AB7A-32AF3F0D607D}" type="datetimeFigureOut">
+              <a:rPr lang="en-US" smtClean="0"/>
+              <a:t>7/15/26</a:t>
+            </a:fld>
+            <a:endParaRPr lang="en-US"/>
+          </a:p>
+        </p:txBody>
+      </p:sp>
+      <p:sp>
+        <p:nvSpPr>
+          <p:cNvPr id="4" name="Slide Image Placeholder 3"/>
+          <p:cNvSpPr>
+            <a:spLocks noGrp="1" noRot="1" noChangeAspect="1"/>
+          </p:cNvSpPr>
+          <p:nvPr>
+            <p:ph type="sldImg" idx="2"/>
+          </p:nvPr>
+        </p:nvSpPr>
+        <p:spPr>
+          <a:xfrm>
+            <a:off x="1243013" y="1143000"/>
+            <a:ext cx="4371975" cy="3086100"/>
+          </a:xfrm>
+          <a:prstGeom prst="rect">
+            <a:avLst/>
+          </a:prstGeom>
+          <a:noFill/>
+          <a:ln w="12700">
+            <a:solidFill>
+              <a:prstClr val="black"/>
+            </a:solidFill>
+          </a:ln>
+        </p:spPr>
+        <p:txBody>
+          <a:bodyPr vert="horz" lIns="91440" tIns="45720" rIns="91440" bIns="45720" rtlCol="0" anchor="ctr"/>
+          <a:lstStyle/>
+          <a:p>
+            <a:endParaRPr lang="en-US"/>
+          </a:p>
+        </p:txBody>
+      </p:sp>
+      <p:sp>
+        <p:nvSpPr>
+          <p:cNvPr id="5" name="Notes Placeholder 4"/>
+          <p:cNvSpPr>
+            <a:spLocks noGrp="1"/>
+          </p:cNvSpPr>
+          <p:nvPr>
+            <p:ph type="body" sz="quarter" idx="3"/>
+          </p:nvPr>
+        </p:nvSpPr>
+        <p:spPr>
+          <a:xfrm>
+            <a:off x="685800" y="4400550"/>
+            <a:ext cx="5486400" cy="3600450"/>
+          </a:xfrm>
+          <a:prstGeom prst="rect">
+            <a:avLst/>
+          </a:prstGeom>
+        </p:spPr>
+        <p:txBody>
+          <a:bodyPr vert="horz" lIns="91440" tIns="45720" rIns="91440" bIns="45720" rtlCol="0"/>
+          <a:lstStyle/>
+          <a:p>
+            <a:pPr lvl="0"/>
+            <a:r>
+              <a:rPr lang="en-US"/>
+              <a:t>Click to edit Master text styles</a:t>
+            </a:r>
+          </a:p>
+          <a:p>
+            <a:pPr lvl="1"/>
+            <a:r>
+              <a:rPr lang="en-US"/>
+              <a:t>Second level</a:t>
+            </a:r>
+          </a:p>
+          <a:p>
+            <a:pPr lvl="2"/>
+            <a:r>
+              <a:rPr lang="en-US"/>
+              <a:t>Third level</a:t>
+            </a:r>
+          </a:p>
+          <a:p>
+            <a:pPr lvl="3"/>
+            <a:r>
+              <a:rPr lang="en-US"/>
+              <a:t>Fourth level</a:t>
+            </a:r>
+          </a:p>
+          <a:p>
+            <a:pPr lvl="4"/>
+            <a:r>
+              <a:rPr lang="en-US"/>
+              <a:t>Fifth level</a:t>
+            </a:r>
+          </a:p>
+        </p:txBody>
+      </p:sp>
+      <p:sp>
+        <p:nvSpPr>
+          <p:cNvPr id="6" name="Footer Placeholder 5"/>
+          <p:cNvSpPr>
+            <a:spLocks noGrp="1"/>
+          </p:cNvSpPr>
+          <p:nvPr>
+            <p:ph type="ftr" sz="quarter" idx="4"/>
+          </p:nvPr>
+        </p:nvSpPr>
+        <p:spPr>
+          <a:xfrm>
+            <a:off x="0" y="8685213"/>
+            <a:ext cx="2971800" cy="458787"/>
+          </a:xfrm>
+          <a:prstGeom prst="rect">
+            <a:avLst/>
+          </a:prstGeom>
+        </p:spPr>
+        <p:txBody>
+          <a:bodyPr vert="horz" lIns="91440" tIns="45720" rIns="91440" bIns="45720" rtlCol="0" anchor="b"/>
+          <a:lstStyle>
+            <a:lvl1pPr algn="l">
+              <a:defRPr sz="1200"/>
+            </a:lvl1pPr>
+          </a:lstStyle>
+          <a:p>
+            <a:endParaRPr lang="en-US"/>
+          </a:p>
+        </p:txBody>
+      </p:sp>
+      <p:sp>
+        <p:nvSpPr>
+          <p:cNvPr id="7" name="Slide Number Placeholder 6"/>
+          <p:cNvSpPr>
+            <a:spLocks noGrp="1"/>
+          </p:cNvSpPr>
+          <p:nvPr>
+            <p:ph type="sldNum" sz="quarter" idx="5"/>
+          </p:nvPr>
+        </p:nvSpPr>
+        <p:spPr>
+          <a:xfrm>
+            <a:off x="3884613" y="8685213"/>
+            <a:ext cx="2971800" cy="458787"/>
+          </a:xfrm>
+          <a:prstGeom prst="rect">
+            <a:avLst/>
+          </a:prstGeom>
+        </p:spPr>
+        <p:txBody>
+          <a:bodyPr vert="horz" lIns="91440" tIns="45720" rIns="91440" bIns="45720" rtlCol="0" anchor="b"/>
+          <a:lstStyle>
+            <a:lvl1pPr algn="r">
+              <a:defRPr sz="1200"/>
+            </a:lvl1pPr>
+          </a:lstStyle>
+          <a:p>
+            <a:fld id="{64FEE8C8-7CB4-454B-BB68-0B5BDBFE11CC}" type="slidenum">
+              <a:rPr lang="en-US" smtClean="0"/>
+              <a:t>‹#›</a:t>
+            </a:fld>
+            <a:endParaRPr lang="en-US"/>
+          </a:p>
+        </p:txBody>
+      </p:sp>
+    </p:spTree>
+    <p:extLst>
+      <p:ext uri="{BB962C8B-B14F-4D97-AF65-F5344CB8AC3E}">
+        <p14:creationId xmlns:p14="http://schemas.microsoft.com/office/powerpoint/2010/main" val="3230295013"/>
+      </p:ext>
+    </p:extLst>
+  </p:cSld>
+  <p:clrMap bg1="lt1" tx1="dk1" bg2="lt2" tx2="dk2" accent1="accent1" accent2="accent2" accent3="accent3" accent4="accent4" accent5="accent5" accent6="accent6" hlink="hlink" folHlink="folHlink"/>
+  <p:notesStyle>
+    <a:lvl1pPr marL="0" algn="l" defTabSz="914400" rtl="0" eaLnBrk="1" latinLnBrk="0" hangingPunct="1">
+      <a:defRPr sz="1200" kern="1200">
+        <a:solidFill>
+          <a:schemeClr val="tx1"/>
+        </a:solidFill>
+        <a:latin typeface="+mn-lt"/>
+        <a:ea typeface="+mn-ea"/>
+        <a:cs typeface="+mn-cs"/>
+      </a:defRPr>
+    </a:lvl1pPr>
+    <a:lvl2pPr marL="457200" algn="l" defTabSz="914400" rtl="0" eaLnBrk="1" latinLnBrk="0" hangingPunct="1">
+      <a:defRPr sz="1200" kern="1200">
+        <a:solidFill>
+          <a:schemeClr val="tx1"/>
+        </a:solidFill>
+        <a:latin typeface="+mn-lt"/>
+        <a:ea typeface="+mn-ea"/>
+        <a:cs typeface="+mn-cs"/>
+      </a:defRPr>
+    </a:lvl2pPr>
+    <a:lvl3pPr marL="914400" algn="l" defTabSz="914400" rtl="0" eaLnBrk="1" latinLnBrk="0" hangingPunct="1">
+      <a:defRPr sz="1200" kern="1200">
+        <a:solidFill>
+          <a:schemeClr val="tx1"/>
+        </a:solidFill>
+        <a:latin typeface="+mn-lt"/>
+        <a:ea typeface="+mn-ea"/>
+        <a:cs typeface="+mn-cs"/>
+      </a:defRPr>
+    </a:lvl3pPr>
+    <a:lvl4pPr marL="1371600" algn="l" defTabSz="914400" rtl="0" eaLnBrk="1" latinLnBrk="0" hangingPunct="1">
+      <a:defRPr sz="1200" kern="1200">
+        <a:solidFill>
+          <a:schemeClr val="tx1"/>
+        </a:solidFill>
+        <a:latin typeface="+mn-lt"/>
+        <a:ea typeface="+mn-ea"/>
+        <a:cs typeface="+mn-cs"/>
+      </a:defRPr>
+    </a:lvl4pPr>
+    <a:lvl5pPr marL="1828800" algn="l" defTabSz="914400" rtl="0" eaLnBrk="1" latinLnBrk="0" hangingPunct="1">
+      <a:defRPr sz="1200" kern="1200">
+        <a:solidFill>
+          <a:schemeClr val="tx1"/>
+        </a:solidFill>
+        <a:latin typeface="+mn-lt"/>
+        <a:ea typeface="+mn-ea"/>
+        <a:cs typeface="+mn-cs"/>
+      </a:defRPr>
+    </a:lvl5pPr>
+    <a:lvl6pPr marL="2286000" algn="l" defTabSz="914400" rtl="0" eaLnBrk="1" latinLnBrk="0" hangingPunct="1">
+      <a:defRPr sz="1200" kern="1200">
+        <a:solidFill>
+          <a:schemeClr val="tx1"/>
+        </a:solidFill>
+        <a:latin typeface="+mn-lt"/>
+        <a:ea typeface="+mn-ea"/>
+        <a:cs typeface="+mn-cs"/>
+      </a:defRPr>
+    </a:lvl6pPr>
+    <a:lvl7pPr marL="2743200" algn="l" defTabSz="914400" rtl="0" eaLnBrk="1" latinLnBrk="0" hangingPunct="1">
+      <a:defRPr sz="1200" kern="1200">
+        <a:solidFill>
+          <a:schemeClr val="tx1"/>
+        </a:solidFill>
+        <a:latin typeface="+mn-lt"/>
+        <a:ea typeface="+mn-ea"/>
+        <a:cs typeface="+mn-cs"/>
+      </a:defRPr>
+    </a:lvl7pPr>
+    <a:lvl8pPr marL="3200400" algn="l" defTabSz="914400" rtl="0" eaLnBrk="1" latinLnBrk="0" hangingPunct="1">
+      <a:defRPr sz="1200" kern="1200">
+        <a:solidFill>
+          <a:schemeClr val="tx1"/>
+        </a:solidFill>
+        <a:latin typeface="+mn-lt"/>
+        <a:ea typeface="+mn-ea"/>
+        <a:cs typeface="+mn-cs"/>
+      </a:defRPr>
+    </a:lvl8pPr>
+    <a:lvl9pPr marL="3657600" algn="l" defTabSz="914400" rtl="0" eaLnBrk="1" latinLnBrk="0" hangingPunct="1">
+      <a:defRPr sz="1200" kern="1200">
+        <a:solidFill>
+          <a:schemeClr val="tx1"/>
+        </a:solidFill>
+        <a:latin typeface="+mn-lt"/>
+        <a:ea typeface="+mn-ea"/>
+        <a:cs typeface="+mn-cs"/>
+      </a:defRPr>
+    </a:lvl9pPr>
+  </p:notesStyle>
+</p:notesMaster>
+</file>
+
+<file path=ppt/notesSlides/notesSlide1.xml><?xml version="1.0" encoding="utf-8"?>
+<p:notes xmlns:a="http://schemas.openxmlformats.org/drawingml/2006/main" xmlns:r="http://schemas.openxmlformats.org/officeDocument/2006/relationships" xmlns:p="http://schemas.openxmlformats.org/presentationml/2006/main">
+  <p:cSld>
+    <p:spTree>
+      <p:nvGrpSpPr>
+        <p:cNvPr id="1" name=""/>
+        <p:cNvGrpSpPr/>
+        <p:nvPr/>
+      </p:nvGrpSpPr>
+      <p:grpSpPr>
+        <a:xfrm>
+          <a:off x="0" y="0"/>
+          <a:ext cx="0" cy="0"/>
+          <a:chOff x="0" y="0"/>
+          <a:chExt cx="0" cy="0"/>
+        </a:xfrm>
+      </p:grpSpPr>
+      <p:sp>
+        <p:nvSpPr>
+          <p:cNvPr id="2" name="Slide Image Placeholder 1"/>
+          <p:cNvSpPr>
+            <a:spLocks noGrp="1" noRot="1" noChangeAspect="1"/>
+          </p:cNvSpPr>
+          <p:nvPr>
+            <p:ph type="sldImg"/>
+          </p:nvPr>
+        </p:nvSpPr>
+        <p:spPr/>
+      </p:sp>
+      <p:sp>
+        <p:nvSpPr>
+          <p:cNvPr id="3" name="Notes Placeholder 2"/>
+          <p:cNvSpPr>
+            <a:spLocks noGrp="1"/>
+          </p:cNvSpPr>
+          <p:nvPr>
+            <p:ph type="body" idx="1"/>
+          </p:nvPr>
+        </p:nvSpPr>
+        <p:spPr/>
+        <p:txBody>
+          <a:bodyPr/>
+          <a:lstStyle/>
+          <a:p>
+            <a:endParaRPr lang="en-US" dirty="0"/>
+          </a:p>
+        </p:txBody>
+      </p:sp>
+      <p:sp>
+        <p:nvSpPr>
+          <p:cNvPr id="4" name="Slide Number Placeholder 3"/>
+          <p:cNvSpPr>
+            <a:spLocks noGrp="1"/>
+          </p:cNvSpPr>
+          <p:nvPr>
+            <p:ph type="sldNum" sz="quarter" idx="5"/>
+          </p:nvPr>
+        </p:nvSpPr>
+        <p:spPr/>
+        <p:txBody>
+          <a:bodyPr/>
+          <a:lstStyle/>
+          <a:p>
+            <a:fld id="{64FEE8C8-7CB4-454B-BB68-0B5BDBFE11CC}" type="slidenum">
+              <a:rPr lang="en-US" smtClean="0"/>
+              <a:t>1</a:t>
+            </a:fld>
+            <a:endParaRPr lang="en-US"/>
+          </a:p>
+        </p:txBody>
+      </p:sp>
+    </p:spTree>
+    <p:extLst>
+      <p:ext uri="{BB962C8B-B14F-4D97-AF65-F5344CB8AC3E}">
+        <p14:creationId xmlns:p14="http://schemas.microsoft.com/office/powerpoint/2010/main" val="1672158144"/>
+      </p:ext>
+    </p:extLst>
+  </p:cSld>
+  <p:clrMapOvr>
+    <a:masterClrMapping/>
+  </p:clrMapOvr>
+</p:notes>
+</file>
+
 <file path=ppt/slideLayouts/slideLayout1.xml><?xml version="1.0" encoding="utf-8"?>
 <p:sldLayout xmlns:a="http://schemas.openxmlformats.org/drawingml/2006/main" xmlns:r="http://schemas.openxmlformats.org/officeDocument/2006/relationships" xmlns:p="http://schemas.openxmlformats.org/presentationml/2006/main" type="title" preserve="1">
   <p:cSld name="Title Slide">
@@ -243,7 +679,7 @@
           <a:p>
             <a:fld id="{FEC58A40-1414-954C-B2D5-4CA3AFB9AD6F}" type="datetimeFigureOut">
               <a:rPr lang="en-US" smtClean="0"/>
-              <a:t>5/31/26</a:t>
+              <a:t>7/15/26</a:t>
             </a:fld>
             <a:endParaRPr lang="en-US"/>
           </a:p>
@@ -413,7 +849,7 @@
           <a:p>
             <a:fld id="{FEC58A40-1414-954C-B2D5-4CA3AFB9AD6F}" type="datetimeFigureOut">
               <a:rPr lang="en-US" smtClean="0"/>
-              <a:t>5/31/26</a:t>
+              <a:t>7/15/26</a:t>
             </a:fld>
             <a:endParaRPr lang="en-US"/>
           </a:p>
@@ -593,7 +1029,7 @@
           <a:p>
             <a:fld id="{FEC58A40-1414-954C-B2D5-4CA3AFB9AD6F}" type="datetimeFigureOut">
               <a:rPr lang="en-US" smtClean="0"/>
-              <a:t>5/31/26</a:t>
+              <a:t>7/15/26</a:t>
             </a:fld>
             <a:endParaRPr lang="en-US"/>
           </a:p>
@@ -763,7 +1199,7 @@
           <a:p>
             <a:fld id="{FEC58A40-1414-954C-B2D5-4CA3AFB9AD6F}" type="datetimeFigureOut">
               <a:rPr lang="en-US" smtClean="0"/>
-              <a:t>5/31/26</a:t>
+              <a:t>7/15/26</a:t>
             </a:fld>
             <a:endParaRPr lang="en-US"/>
           </a:p>
@@ -1009,7 +1445,7 @@
           <a:p>
             <a:fld id="{FEC58A40-1414-954C-B2D5-4CA3AFB9AD6F}" type="datetimeFigureOut">
               <a:rPr lang="en-US" smtClean="0"/>
-              <a:t>5/31/26</a:t>
+              <a:t>7/15/26</a:t>
             </a:fld>
             <a:endParaRPr lang="en-US"/>
           </a:p>
@@ -1241,7 +1677,7 @@
           <a:p>
             <a:fld id="{FEC58A40-1414-954C-B2D5-4CA3AFB9AD6F}" type="datetimeFigureOut">
               <a:rPr lang="en-US" smtClean="0"/>
-              <a:t>5/31/26</a:t>
+              <a:t>7/15/26</a:t>
             </a:fld>
             <a:endParaRPr lang="en-US"/>
           </a:p>
@@ -1608,7 +2044,7 @@
           <a:p>
             <a:fld id="{FEC58A40-1414-954C-B2D5-4CA3AFB9AD6F}" type="datetimeFigureOut">
               <a:rPr lang="en-US" smtClean="0"/>
-              <a:t>5/31/26</a:t>
+              <a:t>7/15/26</a:t>
             </a:fld>
             <a:endParaRPr lang="en-US"/>
           </a:p>
@@ -1726,7 +2162,7 @@
           <a:p>
             <a:fld id="{FEC58A40-1414-954C-B2D5-4CA3AFB9AD6F}" type="datetimeFigureOut">
               <a:rPr lang="en-US" smtClean="0"/>
-              <a:t>5/31/26</a:t>
+              <a:t>7/15/26</a:t>
             </a:fld>
             <a:endParaRPr lang="en-US"/>
           </a:p>
@@ -1821,7 +2257,7 @@
           <a:p>
             <a:fld id="{FEC58A40-1414-954C-B2D5-4CA3AFB9AD6F}" type="datetimeFigureOut">
               <a:rPr lang="en-US" smtClean="0"/>
-              <a:t>5/31/26</a:t>
+              <a:t>7/15/26</a:t>
             </a:fld>
             <a:endParaRPr lang="en-US"/>
           </a:p>
@@ -2098,7 +2534,7 @@
           <a:p>
             <a:fld id="{FEC58A40-1414-954C-B2D5-4CA3AFB9AD6F}" type="datetimeFigureOut">
               <a:rPr lang="en-US" smtClean="0"/>
-              <a:t>5/31/26</a:t>
+              <a:t>7/15/26</a:t>
             </a:fld>
             <a:endParaRPr lang="en-US"/>
           </a:p>
@@ -2355,7 +2791,7 @@
           <a:p>
             <a:fld id="{FEC58A40-1414-954C-B2D5-4CA3AFB9AD6F}" type="datetimeFigureOut">
               <a:rPr lang="en-US" smtClean="0"/>
-              <a:t>5/31/26</a:t>
+              <a:t>7/15/26</a:t>
             </a:fld>
             <a:endParaRPr lang="en-US"/>
           </a:p>
@@ -2568,7 +3004,7 @@
           <a:p>
             <a:fld id="{FEC58A40-1414-954C-B2D5-4CA3AFB9AD6F}" type="datetimeFigureOut">
               <a:rPr lang="en-US" smtClean="0"/>
-              <a:t>5/31/26</a:t>
+              <a:t>7/15/26</a:t>
             </a:fld>
             <a:endParaRPr lang="en-US"/>
           </a:p>
@@ -2988,7 +3424,7 @@
           <p:nvPr/>
         </p:nvPicPr>
         <p:blipFill>
-          <a:blip r:embed="rId2"/>
+          <a:blip r:embed="rId3"/>
           <a:srcRect/>
           <a:stretch/>
         </p:blipFill>
@@ -3120,8 +3556,8 @@
         </p:nvSpPr>
         <p:spPr>
           <a:xfrm rot="16200000">
-            <a:off x="1582802" y="-486121"/>
-            <a:ext cx="646827" cy="1906654"/>
+            <a:off x="1589287" y="-479636"/>
+            <a:ext cx="646827" cy="1893683"/>
           </a:xfrm>
           <a:prstGeom prst="triangle">
             <a:avLst>
@@ -3180,12 +3616,12 @@
         </p:nvSpPr>
         <p:spPr>
           <a:xfrm rot="16200000">
-            <a:off x="1803376" y="610612"/>
+            <a:off x="1803376" y="589808"/>
             <a:ext cx="685543" cy="1355127"/>
           </a:xfrm>
           <a:prstGeom prst="triangle">
             <a:avLst>
-              <a:gd name="adj" fmla="val 53214"/>
+              <a:gd name="adj" fmla="val 51482"/>
             </a:avLst>
           </a:prstGeom>
           <a:solidFill>
@@ -3240,8 +3676,8 @@
         </p:nvSpPr>
         <p:spPr>
           <a:xfrm rot="16200000">
-            <a:off x="2094749" y="1659456"/>
-            <a:ext cx="685543" cy="772380"/>
+            <a:off x="2104217" y="1668924"/>
+            <a:ext cx="685543" cy="753443"/>
           </a:xfrm>
           <a:prstGeom prst="triangle">
             <a:avLst>
@@ -3445,260 +3881,6 @@
           <a:lstStyle/>
           <a:p>
             <a:pPr algn="ctr"/>
-            <a:endParaRPr lang="en-US"/>
-          </a:p>
-        </p:txBody>
-      </p:sp>
-      <p:grpSp>
-        <p:nvGrpSpPr>
-          <p:cNvPr id="116" name="Group 115">
-            <a:extLst>
-              <a:ext uri="{FF2B5EF4-FFF2-40B4-BE49-F238E27FC236}">
-                <a16:creationId xmlns:a16="http://schemas.microsoft.com/office/drawing/2014/main" id="{F8E98195-2DBD-4A4E-4DB8-10B96F6A769C}"/>
-              </a:ext>
-            </a:extLst>
-          </p:cNvPr>
-          <p:cNvGrpSpPr/>
-          <p:nvPr/>
-        </p:nvGrpSpPr>
-        <p:grpSpPr>
-          <a:xfrm>
-            <a:off x="3030347" y="1875320"/>
-            <a:ext cx="149764" cy="88587"/>
-            <a:chOff x="5022545" y="3695255"/>
-            <a:chExt cx="198639" cy="117498"/>
-          </a:xfrm>
-        </p:grpSpPr>
-        <p:sp>
-          <p:nvSpPr>
-            <p:cNvPr id="129" name="Rounded Rectangle 128">
-              <a:extLst>
-                <a:ext uri="{FF2B5EF4-FFF2-40B4-BE49-F238E27FC236}">
-                  <a16:creationId xmlns:a16="http://schemas.microsoft.com/office/drawing/2014/main" id="{DC443351-C269-B522-2E68-6A358B24F8D5}"/>
-                </a:ext>
-              </a:extLst>
-            </p:cNvPr>
-            <p:cNvSpPr/>
-            <p:nvPr/>
-          </p:nvSpPr>
-          <p:spPr>
-            <a:xfrm rot="1773357">
-              <a:off x="5022545" y="3695255"/>
-              <a:ext cx="198639" cy="117498"/>
-            </a:xfrm>
-            <a:prstGeom prst="roundRect">
-              <a:avLst>
-                <a:gd name="adj" fmla="val 47948"/>
-              </a:avLst>
-            </a:prstGeom>
-            <a:solidFill>
-              <a:schemeClr val="bg1"/>
-            </a:solidFill>
-            <a:ln w="12700">
-              <a:solidFill>
-                <a:schemeClr val="tx1">
-                  <a:lumMod val="65000"/>
-                  <a:lumOff val="35000"/>
-                </a:schemeClr>
-              </a:solidFill>
-            </a:ln>
-          </p:spPr>
-          <p:style>
-            <a:lnRef idx="2">
-              <a:schemeClr val="accent1">
-                <a:shade val="15000"/>
-              </a:schemeClr>
-            </a:lnRef>
-            <a:fillRef idx="1">
-              <a:schemeClr val="accent1"/>
-            </a:fillRef>
-            <a:effectRef idx="0">
-              <a:schemeClr val="accent1"/>
-            </a:effectRef>
-            <a:fontRef idx="minor">
-              <a:schemeClr val="lt1"/>
-            </a:fontRef>
-          </p:style>
-          <p:txBody>
-            <a:bodyPr rtlCol="0" anchor="ctr"/>
-            <a:lstStyle/>
-            <a:p>
-              <a:pPr algn="ctr"/>
-              <a:endParaRPr lang="en-US" dirty="0"/>
-            </a:p>
-          </p:txBody>
-        </p:sp>
-        <p:sp>
-          <p:nvSpPr>
-            <p:cNvPr id="130" name="Oval 129">
-              <a:extLst>
-                <a:ext uri="{FF2B5EF4-FFF2-40B4-BE49-F238E27FC236}">
-                  <a16:creationId xmlns:a16="http://schemas.microsoft.com/office/drawing/2014/main" id="{B28522DC-1FB4-27B0-1FA5-68DFBBBB959D}"/>
-                </a:ext>
-              </a:extLst>
-            </p:cNvPr>
-            <p:cNvSpPr/>
-            <p:nvPr/>
-          </p:nvSpPr>
-          <p:spPr>
-            <a:xfrm rot="1773357">
-              <a:off x="5125505" y="3739164"/>
-              <a:ext cx="67339" cy="67339"/>
-            </a:xfrm>
-            <a:prstGeom prst="ellipse">
-              <a:avLst/>
-            </a:prstGeom>
-            <a:noFill/>
-            <a:ln w="12700">
-              <a:solidFill>
-                <a:srgbClr val="FF8200"/>
-              </a:solidFill>
-            </a:ln>
-          </p:spPr>
-          <p:style>
-            <a:lnRef idx="2">
-              <a:schemeClr val="accent1">
-                <a:shade val="15000"/>
-              </a:schemeClr>
-            </a:lnRef>
-            <a:fillRef idx="1">
-              <a:schemeClr val="accent1"/>
-            </a:fillRef>
-            <a:effectRef idx="0">
-              <a:schemeClr val="accent1"/>
-            </a:effectRef>
-            <a:fontRef idx="minor">
-              <a:schemeClr val="lt1"/>
-            </a:fontRef>
-          </p:style>
-          <p:txBody>
-            <a:bodyPr rtlCol="0" anchor="ctr"/>
-            <a:lstStyle/>
-            <a:p>
-              <a:pPr algn="ctr"/>
-              <a:endParaRPr lang="en-US"/>
-            </a:p>
-          </p:txBody>
-        </p:sp>
-      </p:grpSp>
-      <p:sp>
-        <p:nvSpPr>
-          <p:cNvPr id="117" name="Rounded Rectangle 116">
-            <a:extLst>
-              <a:ext uri="{FF2B5EF4-FFF2-40B4-BE49-F238E27FC236}">
-                <a16:creationId xmlns:a16="http://schemas.microsoft.com/office/drawing/2014/main" id="{379D1528-1ABA-D33A-8402-CF429DCCEC11}"/>
-              </a:ext>
-            </a:extLst>
-          </p:cNvPr>
-          <p:cNvSpPr/>
-          <p:nvPr/>
-        </p:nvSpPr>
-        <p:spPr>
-          <a:xfrm rot="1773357">
-            <a:off x="3348600" y="1750977"/>
-            <a:ext cx="149764" cy="88587"/>
-          </a:xfrm>
-          <a:prstGeom prst="roundRect">
-            <a:avLst>
-              <a:gd name="adj" fmla="val 47948"/>
-            </a:avLst>
-          </a:prstGeom>
-          <a:solidFill>
-            <a:schemeClr val="bg1">
-              <a:lumMod val="85000"/>
-            </a:schemeClr>
-          </a:solidFill>
-          <a:ln w="12700">
-            <a:solidFill>
-              <a:schemeClr val="tx1">
-                <a:lumMod val="65000"/>
-                <a:lumOff val="35000"/>
-              </a:schemeClr>
-            </a:solidFill>
-          </a:ln>
-        </p:spPr>
-        <p:style>
-          <a:lnRef idx="2">
-            <a:schemeClr val="accent1">
-              <a:shade val="15000"/>
-            </a:schemeClr>
-          </a:lnRef>
-          <a:fillRef idx="1">
-            <a:schemeClr val="accent1"/>
-          </a:fillRef>
-          <a:effectRef idx="0">
-            <a:schemeClr val="accent1"/>
-          </a:effectRef>
-          <a:fontRef idx="minor">
-            <a:schemeClr val="lt1"/>
-          </a:fontRef>
-        </p:style>
-        <p:txBody>
-          <a:bodyPr rtlCol="0" anchor="ctr"/>
-          <a:lstStyle/>
-          <a:p>
-            <a:pPr algn="ctr"/>
-            <a:endParaRPr lang="en-US" dirty="0"/>
-          </a:p>
-        </p:txBody>
-      </p:sp>
-      <p:sp>
-        <p:nvSpPr>
-          <p:cNvPr id="118" name="Rounded Rectangle 117">
-            <a:extLst>
-              <a:ext uri="{FF2B5EF4-FFF2-40B4-BE49-F238E27FC236}">
-                <a16:creationId xmlns:a16="http://schemas.microsoft.com/office/drawing/2014/main" id="{E60A2497-9DFE-BDA0-BFED-E54947CA8E14}"/>
-              </a:ext>
-            </a:extLst>
-          </p:cNvPr>
-          <p:cNvSpPr/>
-          <p:nvPr/>
-        </p:nvSpPr>
-        <p:spPr>
-          <a:xfrm rot="1773357">
-            <a:off x="3348600" y="1888876"/>
-            <a:ext cx="149764" cy="88587"/>
-          </a:xfrm>
-          <a:prstGeom prst="roundRect">
-            <a:avLst>
-              <a:gd name="adj" fmla="val 47948"/>
-            </a:avLst>
-          </a:prstGeom>
-          <a:solidFill>
-            <a:schemeClr val="bg1">
-              <a:lumMod val="85000"/>
-            </a:schemeClr>
-          </a:solidFill>
-          <a:ln w="12700">
-            <a:solidFill>
-              <a:schemeClr val="tx1">
-                <a:lumMod val="65000"/>
-                <a:lumOff val="35000"/>
-              </a:schemeClr>
-            </a:solidFill>
-          </a:ln>
-        </p:spPr>
-        <p:style>
-          <a:lnRef idx="2">
-            <a:schemeClr val="accent1">
-              <a:shade val="15000"/>
-            </a:schemeClr>
-          </a:lnRef>
-          <a:fillRef idx="1">
-            <a:schemeClr val="accent1"/>
-          </a:fillRef>
-          <a:effectRef idx="0">
-            <a:schemeClr val="accent1"/>
-          </a:effectRef>
-          <a:fontRef idx="minor">
-            <a:schemeClr val="lt1"/>
-          </a:fontRef>
-        </p:style>
-        <p:txBody>
-          <a:bodyPr rtlCol="0" anchor="ctr"/>
-          <a:lstStyle/>
-          <a:p>
-            <a:pPr algn="ctr"/>
             <a:endParaRPr lang="en-US" dirty="0"/>
           </a:p>
         </p:txBody>
@@ -3717,7 +3899,7 @@
         </p:nvGrpSpPr>
         <p:grpSpPr>
           <a:xfrm>
-            <a:off x="2998740" y="2251734"/>
+            <a:off x="3013927" y="2258200"/>
             <a:ext cx="149764" cy="88587"/>
             <a:chOff x="5022545" y="3695255"/>
             <a:chExt cx="198639" cy="117498"/>
@@ -3835,365 +4017,6 @@
           </p:txBody>
         </p:sp>
       </p:grpSp>
-      <p:cxnSp>
-        <p:nvCxnSpPr>
-          <p:cNvPr id="120" name="Straight Arrow Connector 119">
-            <a:extLst>
-              <a:ext uri="{FF2B5EF4-FFF2-40B4-BE49-F238E27FC236}">
-                <a16:creationId xmlns:a16="http://schemas.microsoft.com/office/drawing/2014/main" id="{4FBDD577-8D14-8A00-DA63-A53D2CE28CA8}"/>
-              </a:ext>
-            </a:extLst>
-          </p:cNvPr>
-          <p:cNvCxnSpPr>
-            <a:cxnSpLocks/>
-            <a:endCxn id="117" idx="1"/>
-          </p:cNvCxnSpPr>
-          <p:nvPr/>
-        </p:nvCxnSpPr>
-        <p:spPr>
-          <a:xfrm flipV="1">
-            <a:off x="3185257" y="1758334"/>
-            <a:ext cx="173088" cy="179645"/>
-          </a:xfrm>
-          <a:prstGeom prst="straightConnector1">
-            <a:avLst/>
-          </a:prstGeom>
-          <a:ln w="12700">
-            <a:solidFill>
-              <a:schemeClr val="tx1">
-                <a:lumMod val="65000"/>
-                <a:lumOff val="35000"/>
-              </a:schemeClr>
-            </a:solidFill>
-            <a:tailEnd type="triangle" w="sm" len="med"/>
-          </a:ln>
-        </p:spPr>
-        <p:style>
-          <a:lnRef idx="2">
-            <a:schemeClr val="accent1"/>
-          </a:lnRef>
-          <a:fillRef idx="0">
-            <a:schemeClr val="accent1"/>
-          </a:fillRef>
-          <a:effectRef idx="1">
-            <a:schemeClr val="accent1"/>
-          </a:effectRef>
-          <a:fontRef idx="minor">
-            <a:schemeClr val="tx1"/>
-          </a:fontRef>
-        </p:style>
-      </p:cxnSp>
-      <p:cxnSp>
-        <p:nvCxnSpPr>
-          <p:cNvPr id="121" name="Straight Arrow Connector 120">
-            <a:extLst>
-              <a:ext uri="{FF2B5EF4-FFF2-40B4-BE49-F238E27FC236}">
-                <a16:creationId xmlns:a16="http://schemas.microsoft.com/office/drawing/2014/main" id="{DACC3CC7-1BB4-78D8-50A4-5B78F3E010E2}"/>
-              </a:ext>
-            </a:extLst>
-          </p:cNvPr>
-          <p:cNvCxnSpPr>
-            <a:cxnSpLocks/>
-            <a:endCxn id="118" idx="1"/>
-          </p:cNvCxnSpPr>
-          <p:nvPr/>
-        </p:nvCxnSpPr>
-        <p:spPr>
-          <a:xfrm flipV="1">
-            <a:off x="3172879" y="1896233"/>
-            <a:ext cx="185466" cy="56543"/>
-          </a:xfrm>
-          <a:prstGeom prst="straightConnector1">
-            <a:avLst/>
-          </a:prstGeom>
-          <a:ln w="12700">
-            <a:solidFill>
-              <a:schemeClr val="tx1">
-                <a:lumMod val="65000"/>
-                <a:lumOff val="35000"/>
-              </a:schemeClr>
-            </a:solidFill>
-            <a:tailEnd type="triangle" w="sm" len="med"/>
-          </a:ln>
-        </p:spPr>
-        <p:style>
-          <a:lnRef idx="2">
-            <a:schemeClr val="accent1"/>
-          </a:lnRef>
-          <a:fillRef idx="0">
-            <a:schemeClr val="accent1"/>
-          </a:fillRef>
-          <a:effectRef idx="1">
-            <a:schemeClr val="accent1"/>
-          </a:effectRef>
-          <a:fontRef idx="minor">
-            <a:schemeClr val="tx1"/>
-          </a:fontRef>
-        </p:style>
-      </p:cxnSp>
-      <p:cxnSp>
-        <p:nvCxnSpPr>
-          <p:cNvPr id="122" name="Straight Arrow Connector 121">
-            <a:extLst>
-              <a:ext uri="{FF2B5EF4-FFF2-40B4-BE49-F238E27FC236}">
-                <a16:creationId xmlns:a16="http://schemas.microsoft.com/office/drawing/2014/main" id="{E5993653-DA98-5D0E-8E76-3A7E415B88C3}"/>
-              </a:ext>
-            </a:extLst>
-          </p:cNvPr>
-          <p:cNvCxnSpPr/>
-          <p:nvPr/>
-        </p:nvCxnSpPr>
-        <p:spPr>
-          <a:xfrm>
-            <a:off x="3098754" y="1995325"/>
-            <a:ext cx="0" cy="217798"/>
-          </a:xfrm>
-          <a:prstGeom prst="straightConnector1">
-            <a:avLst/>
-          </a:prstGeom>
-          <a:ln w="12700">
-            <a:solidFill>
-              <a:schemeClr val="tx1">
-                <a:lumMod val="65000"/>
-                <a:lumOff val="35000"/>
-              </a:schemeClr>
-            </a:solidFill>
-            <a:tailEnd type="triangle" w="sm" len="med"/>
-          </a:ln>
-        </p:spPr>
-        <p:style>
-          <a:lnRef idx="2">
-            <a:schemeClr val="accent1"/>
-          </a:lnRef>
-          <a:fillRef idx="0">
-            <a:schemeClr val="accent1"/>
-          </a:fillRef>
-          <a:effectRef idx="1">
-            <a:schemeClr val="accent1"/>
-          </a:effectRef>
-          <a:fontRef idx="minor">
-            <a:schemeClr val="tx1"/>
-          </a:fontRef>
-        </p:style>
-      </p:cxnSp>
-      <p:sp>
-        <p:nvSpPr>
-          <p:cNvPr id="123" name="Rounded Rectangle 122">
-            <a:extLst>
-              <a:ext uri="{FF2B5EF4-FFF2-40B4-BE49-F238E27FC236}">
-                <a16:creationId xmlns:a16="http://schemas.microsoft.com/office/drawing/2014/main" id="{03571034-CE6B-E2A6-51A4-9DAFFF229CAE}"/>
-              </a:ext>
-            </a:extLst>
-          </p:cNvPr>
-          <p:cNvSpPr/>
-          <p:nvPr/>
-        </p:nvSpPr>
-        <p:spPr>
-          <a:xfrm rot="1773357">
-            <a:off x="3348600" y="2155835"/>
-            <a:ext cx="149764" cy="88587"/>
-          </a:xfrm>
-          <a:prstGeom prst="roundRect">
-            <a:avLst>
-              <a:gd name="adj" fmla="val 47948"/>
-            </a:avLst>
-          </a:prstGeom>
-          <a:solidFill>
-            <a:schemeClr val="bg1">
-              <a:lumMod val="85000"/>
-            </a:schemeClr>
-          </a:solidFill>
-          <a:ln w="12700">
-            <a:solidFill>
-              <a:schemeClr val="tx1">
-                <a:lumMod val="65000"/>
-                <a:lumOff val="35000"/>
-              </a:schemeClr>
-            </a:solidFill>
-          </a:ln>
-        </p:spPr>
-        <p:style>
-          <a:lnRef idx="2">
-            <a:schemeClr val="accent1">
-              <a:shade val="15000"/>
-            </a:schemeClr>
-          </a:lnRef>
-          <a:fillRef idx="1">
-            <a:schemeClr val="accent1"/>
-          </a:fillRef>
-          <a:effectRef idx="0">
-            <a:schemeClr val="accent1"/>
-          </a:effectRef>
-          <a:fontRef idx="minor">
-            <a:schemeClr val="lt1"/>
-          </a:fontRef>
-        </p:style>
-        <p:txBody>
-          <a:bodyPr rtlCol="0" anchor="ctr"/>
-          <a:lstStyle/>
-          <a:p>
-            <a:pPr algn="ctr"/>
-            <a:endParaRPr lang="en-US" dirty="0"/>
-          </a:p>
-        </p:txBody>
-      </p:sp>
-      <p:sp>
-        <p:nvSpPr>
-          <p:cNvPr id="124" name="Rounded Rectangle 123">
-            <a:extLst>
-              <a:ext uri="{FF2B5EF4-FFF2-40B4-BE49-F238E27FC236}">
-                <a16:creationId xmlns:a16="http://schemas.microsoft.com/office/drawing/2014/main" id="{9EB9B76B-615C-6248-BE57-D96DD0AAC3F4}"/>
-              </a:ext>
-            </a:extLst>
-          </p:cNvPr>
-          <p:cNvSpPr/>
-          <p:nvPr/>
-        </p:nvSpPr>
-        <p:spPr>
-          <a:xfrm rot="1773357">
-            <a:off x="3348600" y="2026625"/>
-            <a:ext cx="149764" cy="88587"/>
-          </a:xfrm>
-          <a:prstGeom prst="roundRect">
-            <a:avLst>
-              <a:gd name="adj" fmla="val 47948"/>
-            </a:avLst>
-          </a:prstGeom>
-          <a:solidFill>
-            <a:schemeClr val="bg1">
-              <a:lumMod val="85000"/>
-            </a:schemeClr>
-          </a:solidFill>
-          <a:ln w="12700">
-            <a:solidFill>
-              <a:schemeClr val="tx1">
-                <a:lumMod val="65000"/>
-                <a:lumOff val="35000"/>
-              </a:schemeClr>
-            </a:solidFill>
-          </a:ln>
-        </p:spPr>
-        <p:style>
-          <a:lnRef idx="2">
-            <a:schemeClr val="accent1">
-              <a:shade val="15000"/>
-            </a:schemeClr>
-          </a:lnRef>
-          <a:fillRef idx="1">
-            <a:schemeClr val="accent1"/>
-          </a:fillRef>
-          <a:effectRef idx="0">
-            <a:schemeClr val="accent1"/>
-          </a:effectRef>
-          <a:fontRef idx="minor">
-            <a:schemeClr val="lt1"/>
-          </a:fontRef>
-        </p:style>
-        <p:txBody>
-          <a:bodyPr rtlCol="0" anchor="ctr"/>
-          <a:lstStyle/>
-          <a:p>
-            <a:pPr algn="ctr"/>
-            <a:endParaRPr lang="en-US" dirty="0"/>
-          </a:p>
-        </p:txBody>
-      </p:sp>
-      <p:cxnSp>
-        <p:nvCxnSpPr>
-          <p:cNvPr id="125" name="Straight Arrow Connector 124">
-            <a:extLst>
-              <a:ext uri="{FF2B5EF4-FFF2-40B4-BE49-F238E27FC236}">
-                <a16:creationId xmlns:a16="http://schemas.microsoft.com/office/drawing/2014/main" id="{1A6404AC-6E62-3F17-E38E-AA65333A39E7}"/>
-              </a:ext>
-            </a:extLst>
-          </p:cNvPr>
-          <p:cNvCxnSpPr>
-            <a:cxnSpLocks/>
-            <a:endCxn id="124" idx="1"/>
-          </p:cNvCxnSpPr>
-          <p:nvPr/>
-        </p:nvCxnSpPr>
-        <p:spPr>
-          <a:xfrm>
-            <a:off x="3160148" y="1965601"/>
-            <a:ext cx="198196" cy="68380"/>
-          </a:xfrm>
-          <a:prstGeom prst="straightConnector1">
-            <a:avLst/>
-          </a:prstGeom>
-          <a:ln w="12700">
-            <a:solidFill>
-              <a:schemeClr val="tx1">
-                <a:lumMod val="65000"/>
-                <a:lumOff val="35000"/>
-              </a:schemeClr>
-            </a:solidFill>
-            <a:tailEnd type="triangle" w="sm" len="med"/>
-          </a:ln>
-        </p:spPr>
-        <p:style>
-          <a:lnRef idx="2">
-            <a:schemeClr val="accent1"/>
-          </a:lnRef>
-          <a:fillRef idx="0">
-            <a:schemeClr val="accent1"/>
-          </a:fillRef>
-          <a:effectRef idx="1">
-            <a:schemeClr val="accent1"/>
-          </a:effectRef>
-          <a:fontRef idx="minor">
-            <a:schemeClr val="tx1"/>
-          </a:fontRef>
-        </p:style>
-      </p:cxnSp>
-      <p:cxnSp>
-        <p:nvCxnSpPr>
-          <p:cNvPr id="126" name="Straight Arrow Connector 125">
-            <a:extLst>
-              <a:ext uri="{FF2B5EF4-FFF2-40B4-BE49-F238E27FC236}">
-                <a16:creationId xmlns:a16="http://schemas.microsoft.com/office/drawing/2014/main" id="{B8A4A2D9-135D-B9AB-E9D3-326E64226E33}"/>
-              </a:ext>
-            </a:extLst>
-          </p:cNvPr>
-          <p:cNvCxnSpPr>
-            <a:cxnSpLocks/>
-            <a:endCxn id="123" idx="1"/>
-          </p:cNvCxnSpPr>
-          <p:nvPr/>
-        </p:nvCxnSpPr>
-        <p:spPr>
-          <a:xfrm>
-            <a:off x="3153547" y="1965042"/>
-            <a:ext cx="204798" cy="198149"/>
-          </a:xfrm>
-          <a:prstGeom prst="straightConnector1">
-            <a:avLst/>
-          </a:prstGeom>
-          <a:ln w="12700">
-            <a:solidFill>
-              <a:schemeClr val="tx1">
-                <a:lumMod val="65000"/>
-                <a:lumOff val="35000"/>
-              </a:schemeClr>
-            </a:solidFill>
-            <a:tailEnd type="triangle" w="sm" len="med"/>
-          </a:ln>
-        </p:spPr>
-        <p:style>
-          <a:lnRef idx="2">
-            <a:schemeClr val="accent1"/>
-          </a:lnRef>
-          <a:fillRef idx="0">
-            <a:schemeClr val="accent1"/>
-          </a:fillRef>
-          <a:effectRef idx="1">
-            <a:schemeClr val="accent1"/>
-          </a:effectRef>
-          <a:fontRef idx="minor">
-            <a:schemeClr val="tx1"/>
-          </a:fontRef>
-        </p:style>
-      </p:cxnSp>
       <p:sp>
         <p:nvSpPr>
           <p:cNvPr id="131" name="Rounded Rectangle 130">
@@ -4242,16 +4065,72 @@
           <a:lstStyle/>
           <a:p>
             <a:pPr algn="ctr"/>
-            <a:endParaRPr lang="en-US"/>
+            <a:endParaRPr lang="en-US" dirty="0"/>
+          </a:p>
+        </p:txBody>
+      </p:sp>
+      <p:sp>
+        <p:nvSpPr>
+          <p:cNvPr id="98" name="Rounded Rectangle 97">
+            <a:extLst>
+              <a:ext uri="{FF2B5EF4-FFF2-40B4-BE49-F238E27FC236}">
+                <a16:creationId xmlns:a16="http://schemas.microsoft.com/office/drawing/2014/main" id="{DFBF719B-ED37-15EE-632F-D3C145B420C2}"/>
+              </a:ext>
+            </a:extLst>
+          </p:cNvPr>
+          <p:cNvSpPr/>
+          <p:nvPr/>
+        </p:nvSpPr>
+        <p:spPr>
+          <a:xfrm>
+            <a:off x="2748062" y="903797"/>
+            <a:ext cx="992958" cy="727151"/>
+          </a:xfrm>
+          <a:prstGeom prst="roundRect">
+            <a:avLst/>
+          </a:prstGeom>
+          <a:solidFill>
+            <a:schemeClr val="bg1"/>
+          </a:solidFill>
+          <a:ln w="12700">
+            <a:solidFill>
+              <a:schemeClr val="accent1">
+                <a:shade val="15000"/>
+              </a:schemeClr>
+            </a:solidFill>
+          </a:ln>
+        </p:spPr>
+        <p:style>
+          <a:lnRef idx="2">
+            <a:schemeClr val="accent1">
+              <a:shade val="15000"/>
+            </a:schemeClr>
+          </a:lnRef>
+          <a:fillRef idx="1">
+            <a:schemeClr val="accent1"/>
+          </a:fillRef>
+          <a:effectRef idx="0">
+            <a:schemeClr val="accent1"/>
+          </a:effectRef>
+          <a:fontRef idx="minor">
+            <a:schemeClr val="lt1"/>
+          </a:fontRef>
+        </p:style>
+        <p:txBody>
+          <a:bodyPr rtlCol="0" anchor="ctr"/>
+          <a:lstStyle/>
+          <a:p>
+            <a:pPr algn="ctr"/>
+            <a:endParaRPr lang="en-US" dirty="0"/>
           </a:p>
         </p:txBody>
       </p:sp>
       <p:grpSp>
         <p:nvGrpSpPr>
-          <p:cNvPr id="6" name="Group 5">
+          <p:cNvPr id="26" name="Group 25">
             <a:extLst>
               <a:ext uri="{FF2B5EF4-FFF2-40B4-BE49-F238E27FC236}">
-                <a16:creationId xmlns:a16="http://schemas.microsoft.com/office/drawing/2014/main" id="{E9CC85FB-4291-D240-5D51-0118E83761B0}"/>
+                <a16:creationId xmlns:a16="http://schemas.microsoft.com/office/drawing/2014/main" id="{F7778E16-8FAC-807C-E4FA-ECDC3CAE08E8}"/>
               </a:ext>
             </a:extLst>
           </p:cNvPr>
@@ -4260,152 +4139,18 @@
         </p:nvGrpSpPr>
         <p:grpSpPr>
           <a:xfrm>
-            <a:off x="2908703" y="197682"/>
-            <a:ext cx="703357" cy="535876"/>
-            <a:chOff x="2908703" y="197682"/>
-            <a:chExt cx="703357" cy="535876"/>
+            <a:off x="3523884" y="1750977"/>
+            <a:ext cx="149764" cy="88587"/>
+            <a:chOff x="3513700" y="1750977"/>
+            <a:chExt cx="149764" cy="88587"/>
           </a:xfrm>
         </p:grpSpPr>
-        <p:grpSp>
-          <p:nvGrpSpPr>
-            <p:cNvPr id="133" name="Group 132">
+        <p:sp>
+          <p:nvSpPr>
+            <p:cNvPr id="117" name="Rounded Rectangle 116">
               <a:extLst>
                 <a:ext uri="{FF2B5EF4-FFF2-40B4-BE49-F238E27FC236}">
-                  <a16:creationId xmlns:a16="http://schemas.microsoft.com/office/drawing/2014/main" id="{BDEEA8E2-30A8-949F-8987-D15DF1E5BAC7}"/>
-                </a:ext>
-              </a:extLst>
-            </p:cNvPr>
-            <p:cNvGrpSpPr/>
-            <p:nvPr/>
-          </p:nvGrpSpPr>
-          <p:grpSpPr>
-            <a:xfrm>
-              <a:off x="3181247" y="258953"/>
-              <a:ext cx="149763" cy="88587"/>
-              <a:chOff x="5022545" y="3695255"/>
-              <a:chExt cx="198639" cy="117498"/>
-            </a:xfrm>
-          </p:grpSpPr>
-          <p:sp>
-            <p:nvSpPr>
-              <p:cNvPr id="150" name="Rounded Rectangle 149">
-                <a:extLst>
-                  <a:ext uri="{FF2B5EF4-FFF2-40B4-BE49-F238E27FC236}">
-                    <a16:creationId xmlns:a16="http://schemas.microsoft.com/office/drawing/2014/main" id="{162B2A07-5CFA-26BB-1A7A-D0E011A49B0F}"/>
-                  </a:ext>
-                </a:extLst>
-              </p:cNvPr>
-              <p:cNvSpPr/>
-              <p:nvPr/>
-            </p:nvSpPr>
-            <p:spPr>
-              <a:xfrm rot="1773357">
-                <a:off x="5022545" y="3695255"/>
-                <a:ext cx="198639" cy="117498"/>
-              </a:xfrm>
-              <a:prstGeom prst="roundRect">
-                <a:avLst>
-                  <a:gd name="adj" fmla="val 47948"/>
-                </a:avLst>
-              </a:prstGeom>
-              <a:solidFill>
-                <a:schemeClr val="bg1"/>
-              </a:solidFill>
-              <a:ln w="12700">
-                <a:solidFill>
-                  <a:schemeClr val="tx1">
-                    <a:lumMod val="65000"/>
-                    <a:lumOff val="35000"/>
-                  </a:schemeClr>
-                </a:solidFill>
-              </a:ln>
-            </p:spPr>
-            <p:style>
-              <a:lnRef idx="2">
-                <a:schemeClr val="accent1">
-                  <a:shade val="15000"/>
-                </a:schemeClr>
-              </a:lnRef>
-              <a:fillRef idx="1">
-                <a:schemeClr val="accent1"/>
-              </a:fillRef>
-              <a:effectRef idx="0">
-                <a:schemeClr val="accent1"/>
-              </a:effectRef>
-              <a:fontRef idx="minor">
-                <a:schemeClr val="lt1"/>
-              </a:fontRef>
-            </p:style>
-            <p:txBody>
-              <a:bodyPr rtlCol="0" anchor="ctr"/>
-              <a:lstStyle/>
-              <a:p>
-                <a:pPr algn="ctr"/>
-                <a:endParaRPr lang="en-US" dirty="0"/>
-              </a:p>
-            </p:txBody>
-          </p:sp>
-          <p:sp>
-            <p:nvSpPr>
-              <p:cNvPr id="151" name="Oval 150">
-                <a:extLst>
-                  <a:ext uri="{FF2B5EF4-FFF2-40B4-BE49-F238E27FC236}">
-                    <a16:creationId xmlns:a16="http://schemas.microsoft.com/office/drawing/2014/main" id="{25D97795-097D-47FF-18F0-615F1748AC97}"/>
-                  </a:ext>
-                </a:extLst>
-              </p:cNvPr>
-              <p:cNvSpPr/>
-              <p:nvPr/>
-            </p:nvSpPr>
-            <p:spPr>
-              <a:xfrm rot="1773357">
-                <a:off x="5125505" y="3739164"/>
-                <a:ext cx="67339" cy="67339"/>
-              </a:xfrm>
-              <a:prstGeom prst="ellipse">
-                <a:avLst/>
-              </a:prstGeom>
-              <a:noFill/>
-              <a:ln w="12700">
-                <a:solidFill>
-                  <a:schemeClr val="accent1">
-                    <a:lumMod val="75000"/>
-                  </a:schemeClr>
-                </a:solidFill>
-              </a:ln>
-            </p:spPr>
-            <p:style>
-              <a:lnRef idx="2">
-                <a:schemeClr val="accent1">
-                  <a:shade val="15000"/>
-                </a:schemeClr>
-              </a:lnRef>
-              <a:fillRef idx="1">
-                <a:schemeClr val="accent1"/>
-              </a:fillRef>
-              <a:effectRef idx="0">
-                <a:schemeClr val="accent1"/>
-              </a:effectRef>
-              <a:fontRef idx="minor">
-                <a:schemeClr val="lt1"/>
-              </a:fontRef>
-            </p:style>
-            <p:txBody>
-              <a:bodyPr rtlCol="0" anchor="ctr"/>
-              <a:lstStyle/>
-              <a:p>
-                <a:pPr algn="ctr"/>
-                <a:endParaRPr lang="en-US"/>
-              </a:p>
-            </p:txBody>
-          </p:sp>
-        </p:grpSp>
-        <p:sp>
-          <p:nvSpPr>
-            <p:cNvPr id="134" name="Rounded Rectangle 133">
-              <a:extLst>
-                <a:ext uri="{FF2B5EF4-FFF2-40B4-BE49-F238E27FC236}">
-                  <a16:creationId xmlns:a16="http://schemas.microsoft.com/office/drawing/2014/main" id="{5280465B-AFF7-45AE-8B4D-F50ED4969B32}"/>
+                  <a16:creationId xmlns:a16="http://schemas.microsoft.com/office/drawing/2014/main" id="{379D1528-1ABA-D33A-8402-CF429DCCEC11}"/>
                 </a:ext>
               </a:extLst>
             </p:cNvPr>
@@ -4414,8 +4159,8 @@
           </p:nvSpPr>
           <p:spPr>
             <a:xfrm rot="1773357">
-              <a:off x="3462297" y="197682"/>
-              <a:ext cx="149763" cy="88587"/>
+              <a:off x="3513700" y="1750977"/>
+              <a:ext cx="149764" cy="88587"/>
             </a:xfrm>
             <a:prstGeom prst="roundRect">
               <a:avLst>
@@ -4461,6 +4206,701 @@
             </a:p>
           </p:txBody>
         </p:sp>
+        <p:sp>
+          <p:nvSpPr>
+            <p:cNvPr id="8" name="Oval 7">
+              <a:extLst>
+                <a:ext uri="{FF2B5EF4-FFF2-40B4-BE49-F238E27FC236}">
+                  <a16:creationId xmlns:a16="http://schemas.microsoft.com/office/drawing/2014/main" id="{9CF4C634-EF74-7B0C-55A9-070768AF8103}"/>
+                </a:ext>
+              </a:extLst>
+            </p:cNvPr>
+            <p:cNvSpPr/>
+            <p:nvPr/>
+          </p:nvSpPr>
+          <p:spPr>
+            <a:xfrm rot="1773357">
+              <a:off x="3588267" y="1780908"/>
+              <a:ext cx="50770" cy="50770"/>
+            </a:xfrm>
+            <a:prstGeom prst="ellipse">
+              <a:avLst/>
+            </a:prstGeom>
+            <a:noFill/>
+            <a:ln w="12700">
+              <a:solidFill>
+                <a:srgbClr val="FF8200"/>
+              </a:solidFill>
+            </a:ln>
+          </p:spPr>
+          <p:style>
+            <a:lnRef idx="2">
+              <a:schemeClr val="accent1">
+                <a:shade val="15000"/>
+              </a:schemeClr>
+            </a:lnRef>
+            <a:fillRef idx="1">
+              <a:schemeClr val="accent1"/>
+            </a:fillRef>
+            <a:effectRef idx="0">
+              <a:schemeClr val="accent1"/>
+            </a:effectRef>
+            <a:fontRef idx="minor">
+              <a:schemeClr val="lt1"/>
+            </a:fontRef>
+          </p:style>
+          <p:txBody>
+            <a:bodyPr rtlCol="0" anchor="ctr"/>
+            <a:lstStyle/>
+            <a:p>
+              <a:pPr algn="ctr"/>
+              <a:endParaRPr lang="en-US"/>
+            </a:p>
+          </p:txBody>
+        </p:sp>
+      </p:grpSp>
+      <p:grpSp>
+        <p:nvGrpSpPr>
+          <p:cNvPr id="27" name="Group 26">
+            <a:extLst>
+              <a:ext uri="{FF2B5EF4-FFF2-40B4-BE49-F238E27FC236}">
+                <a16:creationId xmlns:a16="http://schemas.microsoft.com/office/drawing/2014/main" id="{C5434559-74C8-28ED-3E4E-6FC7C4D83EC8}"/>
+              </a:ext>
+            </a:extLst>
+          </p:cNvPr>
+          <p:cNvGrpSpPr/>
+          <p:nvPr/>
+        </p:nvGrpSpPr>
+        <p:grpSpPr>
+          <a:xfrm>
+            <a:off x="3523884" y="1888876"/>
+            <a:ext cx="149764" cy="88587"/>
+            <a:chOff x="3513700" y="1888876"/>
+            <a:chExt cx="149764" cy="88587"/>
+          </a:xfrm>
+        </p:grpSpPr>
+        <p:sp>
+          <p:nvSpPr>
+            <p:cNvPr id="118" name="Rounded Rectangle 117">
+              <a:extLst>
+                <a:ext uri="{FF2B5EF4-FFF2-40B4-BE49-F238E27FC236}">
+                  <a16:creationId xmlns:a16="http://schemas.microsoft.com/office/drawing/2014/main" id="{E60A2497-9DFE-BDA0-BFED-E54947CA8E14}"/>
+                </a:ext>
+              </a:extLst>
+            </p:cNvPr>
+            <p:cNvSpPr/>
+            <p:nvPr/>
+          </p:nvSpPr>
+          <p:spPr>
+            <a:xfrm rot="1773357">
+              <a:off x="3513700" y="1888876"/>
+              <a:ext cx="149764" cy="88587"/>
+            </a:xfrm>
+            <a:prstGeom prst="roundRect">
+              <a:avLst>
+                <a:gd name="adj" fmla="val 47948"/>
+              </a:avLst>
+            </a:prstGeom>
+            <a:solidFill>
+              <a:schemeClr val="bg1">
+                <a:lumMod val="85000"/>
+              </a:schemeClr>
+            </a:solidFill>
+            <a:ln w="12700">
+              <a:solidFill>
+                <a:schemeClr val="tx1">
+                  <a:lumMod val="65000"/>
+                  <a:lumOff val="35000"/>
+                </a:schemeClr>
+              </a:solidFill>
+            </a:ln>
+          </p:spPr>
+          <p:style>
+            <a:lnRef idx="2">
+              <a:schemeClr val="accent1">
+                <a:shade val="15000"/>
+              </a:schemeClr>
+            </a:lnRef>
+            <a:fillRef idx="1">
+              <a:schemeClr val="accent1"/>
+            </a:fillRef>
+            <a:effectRef idx="0">
+              <a:schemeClr val="accent1"/>
+            </a:effectRef>
+            <a:fontRef idx="minor">
+              <a:schemeClr val="lt1"/>
+            </a:fontRef>
+          </p:style>
+          <p:txBody>
+            <a:bodyPr rtlCol="0" anchor="ctr"/>
+            <a:lstStyle/>
+            <a:p>
+              <a:pPr algn="ctr"/>
+              <a:endParaRPr lang="en-US" dirty="0"/>
+            </a:p>
+          </p:txBody>
+        </p:sp>
+        <p:sp>
+          <p:nvSpPr>
+            <p:cNvPr id="9" name="Oval 8">
+              <a:extLst>
+                <a:ext uri="{FF2B5EF4-FFF2-40B4-BE49-F238E27FC236}">
+                  <a16:creationId xmlns:a16="http://schemas.microsoft.com/office/drawing/2014/main" id="{E92867E9-87F0-1A0C-5744-3018ECAD65CC}"/>
+                </a:ext>
+              </a:extLst>
+            </p:cNvPr>
+            <p:cNvSpPr/>
+            <p:nvPr/>
+          </p:nvSpPr>
+          <p:spPr>
+            <a:xfrm rot="1773357">
+              <a:off x="3588265" y="1920750"/>
+              <a:ext cx="50770" cy="50770"/>
+            </a:xfrm>
+            <a:prstGeom prst="ellipse">
+              <a:avLst/>
+            </a:prstGeom>
+            <a:noFill/>
+            <a:ln w="12700">
+              <a:solidFill>
+                <a:srgbClr val="FF8200"/>
+              </a:solidFill>
+            </a:ln>
+          </p:spPr>
+          <p:style>
+            <a:lnRef idx="2">
+              <a:schemeClr val="accent1">
+                <a:shade val="15000"/>
+              </a:schemeClr>
+            </a:lnRef>
+            <a:fillRef idx="1">
+              <a:schemeClr val="accent1"/>
+            </a:fillRef>
+            <a:effectRef idx="0">
+              <a:schemeClr val="accent1"/>
+            </a:effectRef>
+            <a:fontRef idx="minor">
+              <a:schemeClr val="lt1"/>
+            </a:fontRef>
+          </p:style>
+          <p:txBody>
+            <a:bodyPr rtlCol="0" anchor="ctr"/>
+            <a:lstStyle/>
+            <a:p>
+              <a:pPr algn="ctr"/>
+              <a:endParaRPr lang="en-US"/>
+            </a:p>
+          </p:txBody>
+        </p:sp>
+      </p:grpSp>
+      <p:grpSp>
+        <p:nvGrpSpPr>
+          <p:cNvPr id="29" name="Group 28">
+            <a:extLst>
+              <a:ext uri="{FF2B5EF4-FFF2-40B4-BE49-F238E27FC236}">
+                <a16:creationId xmlns:a16="http://schemas.microsoft.com/office/drawing/2014/main" id="{C591DD14-9527-B36F-952A-D02D729472FC}"/>
+              </a:ext>
+            </a:extLst>
+          </p:cNvPr>
+          <p:cNvGrpSpPr/>
+          <p:nvPr/>
+        </p:nvGrpSpPr>
+        <p:grpSpPr>
+          <a:xfrm>
+            <a:off x="3523884" y="2026625"/>
+            <a:ext cx="149764" cy="88587"/>
+            <a:chOff x="3513700" y="2026625"/>
+            <a:chExt cx="149764" cy="88587"/>
+          </a:xfrm>
+        </p:grpSpPr>
+        <p:sp>
+          <p:nvSpPr>
+            <p:cNvPr id="124" name="Rounded Rectangle 123">
+              <a:extLst>
+                <a:ext uri="{FF2B5EF4-FFF2-40B4-BE49-F238E27FC236}">
+                  <a16:creationId xmlns:a16="http://schemas.microsoft.com/office/drawing/2014/main" id="{9EB9B76B-615C-6248-BE57-D96DD0AAC3F4}"/>
+                </a:ext>
+              </a:extLst>
+            </p:cNvPr>
+            <p:cNvSpPr/>
+            <p:nvPr/>
+          </p:nvSpPr>
+          <p:spPr>
+            <a:xfrm rot="1773357">
+              <a:off x="3513700" y="2026625"/>
+              <a:ext cx="149764" cy="88587"/>
+            </a:xfrm>
+            <a:prstGeom prst="roundRect">
+              <a:avLst>
+                <a:gd name="adj" fmla="val 47948"/>
+              </a:avLst>
+            </a:prstGeom>
+            <a:solidFill>
+              <a:schemeClr val="bg1">
+                <a:lumMod val="85000"/>
+              </a:schemeClr>
+            </a:solidFill>
+            <a:ln w="12700">
+              <a:solidFill>
+                <a:schemeClr val="tx1">
+                  <a:lumMod val="65000"/>
+                  <a:lumOff val="35000"/>
+                </a:schemeClr>
+              </a:solidFill>
+            </a:ln>
+          </p:spPr>
+          <p:style>
+            <a:lnRef idx="2">
+              <a:schemeClr val="accent1">
+                <a:shade val="15000"/>
+              </a:schemeClr>
+            </a:lnRef>
+            <a:fillRef idx="1">
+              <a:schemeClr val="accent1"/>
+            </a:fillRef>
+            <a:effectRef idx="0">
+              <a:schemeClr val="accent1"/>
+            </a:effectRef>
+            <a:fontRef idx="minor">
+              <a:schemeClr val="lt1"/>
+            </a:fontRef>
+          </p:style>
+          <p:txBody>
+            <a:bodyPr rtlCol="0" anchor="ctr"/>
+            <a:lstStyle/>
+            <a:p>
+              <a:pPr algn="ctr"/>
+              <a:endParaRPr lang="en-US" dirty="0"/>
+            </a:p>
+          </p:txBody>
+        </p:sp>
+        <p:sp>
+          <p:nvSpPr>
+            <p:cNvPr id="10" name="Oval 9">
+              <a:extLst>
+                <a:ext uri="{FF2B5EF4-FFF2-40B4-BE49-F238E27FC236}">
+                  <a16:creationId xmlns:a16="http://schemas.microsoft.com/office/drawing/2014/main" id="{6D902674-4ED7-BD82-7003-2DA0074574D8}"/>
+                </a:ext>
+              </a:extLst>
+            </p:cNvPr>
+            <p:cNvSpPr/>
+            <p:nvPr/>
+          </p:nvSpPr>
+          <p:spPr>
+            <a:xfrm rot="1773357">
+              <a:off x="3588265" y="2060197"/>
+              <a:ext cx="50770" cy="50770"/>
+            </a:xfrm>
+            <a:prstGeom prst="ellipse">
+              <a:avLst/>
+            </a:prstGeom>
+            <a:noFill/>
+            <a:ln w="12700">
+              <a:solidFill>
+                <a:srgbClr val="FF8200"/>
+              </a:solidFill>
+            </a:ln>
+          </p:spPr>
+          <p:style>
+            <a:lnRef idx="2">
+              <a:schemeClr val="accent1">
+                <a:shade val="15000"/>
+              </a:schemeClr>
+            </a:lnRef>
+            <a:fillRef idx="1">
+              <a:schemeClr val="accent1"/>
+            </a:fillRef>
+            <a:effectRef idx="0">
+              <a:schemeClr val="accent1"/>
+            </a:effectRef>
+            <a:fontRef idx="minor">
+              <a:schemeClr val="lt1"/>
+            </a:fontRef>
+          </p:style>
+          <p:txBody>
+            <a:bodyPr rtlCol="0" anchor="ctr"/>
+            <a:lstStyle/>
+            <a:p>
+              <a:pPr algn="ctr"/>
+              <a:endParaRPr lang="en-US"/>
+            </a:p>
+          </p:txBody>
+        </p:sp>
+      </p:grpSp>
+      <p:sp>
+        <p:nvSpPr>
+          <p:cNvPr id="12" name="TextBox 11">
+            <a:extLst>
+              <a:ext uri="{FF2B5EF4-FFF2-40B4-BE49-F238E27FC236}">
+                <a16:creationId xmlns:a16="http://schemas.microsoft.com/office/drawing/2014/main" id="{6CD3BD28-048A-BFF5-95A6-2C2D0200C5C9}"/>
+              </a:ext>
+            </a:extLst>
+          </p:cNvPr>
+          <p:cNvSpPr txBox="1"/>
+          <p:nvPr/>
+        </p:nvSpPr>
+        <p:spPr>
+          <a:xfrm>
+            <a:off x="2308684" y="153191"/>
+            <a:ext cx="322524" cy="215444"/>
+          </a:xfrm>
+          <a:prstGeom prst="rect">
+            <a:avLst/>
+          </a:prstGeom>
+          <a:noFill/>
+        </p:spPr>
+        <p:txBody>
+          <a:bodyPr wrap="none" rtlCol="0">
+            <a:spAutoFit/>
+          </a:bodyPr>
+          <a:lstStyle/>
+          <a:p>
+            <a:pPr algn="ctr"/>
+            <a:r>
+              <a:rPr lang="en-US" sz="800" dirty="0">
+                <a:solidFill>
+                  <a:schemeClr val="bg2"/>
+                </a:solidFill>
+                <a:latin typeface="Helvetica" pitchFamily="2" charset="0"/>
+              </a:rPr>
+              <a:t>Q1</a:t>
+            </a:r>
+          </a:p>
+        </p:txBody>
+      </p:sp>
+      <p:sp>
+        <p:nvSpPr>
+          <p:cNvPr id="13" name="TextBox 12">
+            <a:extLst>
+              <a:ext uri="{FF2B5EF4-FFF2-40B4-BE49-F238E27FC236}">
+                <a16:creationId xmlns:a16="http://schemas.microsoft.com/office/drawing/2014/main" id="{8043869E-9DF3-BB09-A404-432CCD080306}"/>
+              </a:ext>
+            </a:extLst>
+          </p:cNvPr>
+          <p:cNvSpPr txBox="1"/>
+          <p:nvPr/>
+        </p:nvSpPr>
+        <p:spPr>
+          <a:xfrm>
+            <a:off x="329075" y="153191"/>
+            <a:ext cx="322524" cy="215444"/>
+          </a:xfrm>
+          <a:prstGeom prst="rect">
+            <a:avLst/>
+          </a:prstGeom>
+          <a:noFill/>
+        </p:spPr>
+        <p:txBody>
+          <a:bodyPr wrap="none" rtlCol="0">
+            <a:spAutoFit/>
+          </a:bodyPr>
+          <a:lstStyle/>
+          <a:p>
+            <a:pPr algn="ctr"/>
+            <a:r>
+              <a:rPr lang="en-US" sz="800" dirty="0">
+                <a:solidFill>
+                  <a:schemeClr val="bg2">
+                    <a:lumMod val="75000"/>
+                  </a:schemeClr>
+                </a:solidFill>
+                <a:latin typeface="Helvetica" pitchFamily="2" charset="0"/>
+              </a:rPr>
+              <a:t>Q2</a:t>
+            </a:r>
+          </a:p>
+        </p:txBody>
+      </p:sp>
+      <p:sp>
+        <p:nvSpPr>
+          <p:cNvPr id="14" name="TextBox 13">
+            <a:extLst>
+              <a:ext uri="{FF2B5EF4-FFF2-40B4-BE49-F238E27FC236}">
+                <a16:creationId xmlns:a16="http://schemas.microsoft.com/office/drawing/2014/main" id="{EBA98D3E-2314-D83B-A30C-955D9C4E3987}"/>
+              </a:ext>
+            </a:extLst>
+          </p:cNvPr>
+          <p:cNvSpPr txBox="1"/>
+          <p:nvPr/>
+        </p:nvSpPr>
+        <p:spPr>
+          <a:xfrm>
+            <a:off x="2308684" y="2162908"/>
+            <a:ext cx="322524" cy="215444"/>
+          </a:xfrm>
+          <a:prstGeom prst="rect">
+            <a:avLst/>
+          </a:prstGeom>
+          <a:noFill/>
+        </p:spPr>
+        <p:txBody>
+          <a:bodyPr wrap="none" rtlCol="0">
+            <a:spAutoFit/>
+          </a:bodyPr>
+          <a:lstStyle/>
+          <a:p>
+            <a:r>
+              <a:rPr lang="en-US" sz="800" dirty="0">
+                <a:solidFill>
+                  <a:schemeClr val="bg2"/>
+                </a:solidFill>
+                <a:latin typeface="Helvetica" pitchFamily="2" charset="0"/>
+              </a:rPr>
+              <a:t>Q4</a:t>
+            </a:r>
+          </a:p>
+        </p:txBody>
+      </p:sp>
+      <p:sp>
+        <p:nvSpPr>
+          <p:cNvPr id="15" name="TextBox 14">
+            <a:extLst>
+              <a:ext uri="{FF2B5EF4-FFF2-40B4-BE49-F238E27FC236}">
+                <a16:creationId xmlns:a16="http://schemas.microsoft.com/office/drawing/2014/main" id="{9C62D33F-DC1F-67E4-9D8E-D9C8EFF112BC}"/>
+              </a:ext>
+            </a:extLst>
+          </p:cNvPr>
+          <p:cNvSpPr txBox="1"/>
+          <p:nvPr/>
+        </p:nvSpPr>
+        <p:spPr>
+          <a:xfrm>
+            <a:off x="329075" y="2162908"/>
+            <a:ext cx="322524" cy="215444"/>
+          </a:xfrm>
+          <a:prstGeom prst="rect">
+            <a:avLst/>
+          </a:prstGeom>
+          <a:noFill/>
+        </p:spPr>
+        <p:txBody>
+          <a:bodyPr wrap="none" rtlCol="0">
+            <a:spAutoFit/>
+          </a:bodyPr>
+          <a:lstStyle/>
+          <a:p>
+            <a:r>
+              <a:rPr lang="en-US" sz="800" dirty="0">
+                <a:solidFill>
+                  <a:schemeClr val="bg2">
+                    <a:lumMod val="75000"/>
+                  </a:schemeClr>
+                </a:solidFill>
+                <a:latin typeface="Helvetica" pitchFamily="2" charset="0"/>
+              </a:rPr>
+              <a:t>Q3</a:t>
+            </a:r>
+          </a:p>
+        </p:txBody>
+      </p:sp>
+      <p:sp>
+        <p:nvSpPr>
+          <p:cNvPr id="82" name="Freeform 81">
+            <a:extLst>
+              <a:ext uri="{FF2B5EF4-FFF2-40B4-BE49-F238E27FC236}">
+                <a16:creationId xmlns:a16="http://schemas.microsoft.com/office/drawing/2014/main" id="{198CA42B-DD8C-968A-0D35-7D9F9749EAAD}"/>
+              </a:ext>
+            </a:extLst>
+          </p:cNvPr>
+          <p:cNvSpPr/>
+          <p:nvPr/>
+        </p:nvSpPr>
+        <p:spPr>
+          <a:xfrm>
+            <a:off x="3302411" y="1782161"/>
+            <a:ext cx="196769" cy="84556"/>
+          </a:xfrm>
+          <a:custGeom>
+            <a:avLst/>
+            <a:gdLst>
+              <a:gd name="csX0" fmla="*/ 0 w 198922"/>
+              <a:gd name="csY0" fmla="*/ 75003 h 75003"/>
+              <a:gd name="csX1" fmla="*/ 83419 w 198922"/>
+              <a:gd name="csY1" fmla="*/ 7626 h 75003"/>
+              <a:gd name="csX2" fmla="*/ 198922 w 198922"/>
+              <a:gd name="csY2" fmla="*/ 4418 h 75003"/>
+            </a:gdLst>
+            <a:ahLst/>
+            <a:cxnLst>
+              <a:cxn ang="0">
+                <a:pos x="csX0" y="csY0"/>
+              </a:cxn>
+              <a:cxn ang="0">
+                <a:pos x="csX1" y="csY1"/>
+              </a:cxn>
+              <a:cxn ang="0">
+                <a:pos x="csX2" y="csY2"/>
+              </a:cxn>
+            </a:cxnLst>
+            <a:rect l="l" t="t" r="r" b="b"/>
+            <a:pathLst>
+              <a:path w="198922" h="75003">
+                <a:moveTo>
+                  <a:pt x="0" y="75003"/>
+                </a:moveTo>
+                <a:cubicBezTo>
+                  <a:pt x="25132" y="47196"/>
+                  <a:pt x="50265" y="19390"/>
+                  <a:pt x="83419" y="7626"/>
+                </a:cubicBezTo>
+                <a:cubicBezTo>
+                  <a:pt x="116573" y="-4138"/>
+                  <a:pt x="157747" y="140"/>
+                  <a:pt x="198922" y="4418"/>
+                </a:cubicBezTo>
+              </a:path>
+            </a:pathLst>
+          </a:custGeom>
+          <a:noFill/>
+          <a:ln w="12700">
+            <a:solidFill>
+              <a:schemeClr val="tx1">
+                <a:lumMod val="65000"/>
+                <a:lumOff val="35000"/>
+              </a:schemeClr>
+            </a:solidFill>
+            <a:tailEnd type="stealth" w="sm" len="med"/>
+          </a:ln>
+        </p:spPr>
+        <p:style>
+          <a:lnRef idx="2">
+            <a:schemeClr val="accent1">
+              <a:shade val="15000"/>
+            </a:schemeClr>
+          </a:lnRef>
+          <a:fillRef idx="1">
+            <a:schemeClr val="accent1"/>
+          </a:fillRef>
+          <a:effectRef idx="0">
+            <a:schemeClr val="accent1"/>
+          </a:effectRef>
+          <a:fontRef idx="minor">
+            <a:schemeClr val="lt1"/>
+          </a:fontRef>
+        </p:style>
+        <p:txBody>
+          <a:bodyPr rtlCol="0" anchor="ctr"/>
+          <a:lstStyle/>
+          <a:p>
+            <a:pPr algn="ctr"/>
+            <a:endParaRPr lang="en-US"/>
+          </a:p>
+        </p:txBody>
+      </p:sp>
+      <p:sp>
+        <p:nvSpPr>
+          <p:cNvPr id="84" name="Freeform 83">
+            <a:extLst>
+              <a:ext uri="{FF2B5EF4-FFF2-40B4-BE49-F238E27FC236}">
+                <a16:creationId xmlns:a16="http://schemas.microsoft.com/office/drawing/2014/main" id="{75E36F05-9DB2-4030-A3B1-9A903363C950}"/>
+              </a:ext>
+            </a:extLst>
+          </p:cNvPr>
+          <p:cNvSpPr/>
+          <p:nvPr/>
+        </p:nvSpPr>
+        <p:spPr>
+          <a:xfrm flipV="1">
+            <a:off x="3311229" y="1986965"/>
+            <a:ext cx="187951" cy="70099"/>
+          </a:xfrm>
+          <a:custGeom>
+            <a:avLst/>
+            <a:gdLst>
+              <a:gd name="csX0" fmla="*/ 0 w 198922"/>
+              <a:gd name="csY0" fmla="*/ 75003 h 75003"/>
+              <a:gd name="csX1" fmla="*/ 83419 w 198922"/>
+              <a:gd name="csY1" fmla="*/ 7626 h 75003"/>
+              <a:gd name="csX2" fmla="*/ 198922 w 198922"/>
+              <a:gd name="csY2" fmla="*/ 4418 h 75003"/>
+            </a:gdLst>
+            <a:ahLst/>
+            <a:cxnLst>
+              <a:cxn ang="0">
+                <a:pos x="csX0" y="csY0"/>
+              </a:cxn>
+              <a:cxn ang="0">
+                <a:pos x="csX1" y="csY1"/>
+              </a:cxn>
+              <a:cxn ang="0">
+                <a:pos x="csX2" y="csY2"/>
+              </a:cxn>
+            </a:cxnLst>
+            <a:rect l="l" t="t" r="r" b="b"/>
+            <a:pathLst>
+              <a:path w="198922" h="75003">
+                <a:moveTo>
+                  <a:pt x="0" y="75003"/>
+                </a:moveTo>
+                <a:cubicBezTo>
+                  <a:pt x="25132" y="47196"/>
+                  <a:pt x="50265" y="19390"/>
+                  <a:pt x="83419" y="7626"/>
+                </a:cubicBezTo>
+                <a:cubicBezTo>
+                  <a:pt x="116573" y="-4138"/>
+                  <a:pt x="157747" y="140"/>
+                  <a:pt x="198922" y="4418"/>
+                </a:cubicBezTo>
+              </a:path>
+            </a:pathLst>
+          </a:custGeom>
+          <a:noFill/>
+          <a:ln w="12700">
+            <a:solidFill>
+              <a:schemeClr val="tx1">
+                <a:lumMod val="65000"/>
+                <a:lumOff val="35000"/>
+              </a:schemeClr>
+            </a:solidFill>
+            <a:tailEnd type="stealth" w="sm" len="med"/>
+          </a:ln>
+        </p:spPr>
+        <p:style>
+          <a:lnRef idx="2">
+            <a:schemeClr val="accent1">
+              <a:shade val="15000"/>
+            </a:schemeClr>
+          </a:lnRef>
+          <a:fillRef idx="1">
+            <a:schemeClr val="accent1"/>
+          </a:fillRef>
+          <a:effectRef idx="0">
+            <a:schemeClr val="accent1"/>
+          </a:effectRef>
+          <a:fontRef idx="minor">
+            <a:schemeClr val="lt1"/>
+          </a:fontRef>
+        </p:style>
+        <p:txBody>
+          <a:bodyPr rtlCol="0" anchor="ctr"/>
+          <a:lstStyle/>
+          <a:p>
+            <a:pPr algn="ctr"/>
+            <a:endParaRPr lang="en-US"/>
+          </a:p>
+        </p:txBody>
+      </p:sp>
+      <p:grpSp>
+        <p:nvGrpSpPr>
+          <p:cNvPr id="42" name="Group 41">
+            <a:extLst>
+              <a:ext uri="{FF2B5EF4-FFF2-40B4-BE49-F238E27FC236}">
+                <a16:creationId xmlns:a16="http://schemas.microsoft.com/office/drawing/2014/main" id="{A3DABAC5-319F-1FE4-12C3-D071D76512E8}"/>
+              </a:ext>
+            </a:extLst>
+          </p:cNvPr>
+          <p:cNvGrpSpPr/>
+          <p:nvPr/>
+        </p:nvGrpSpPr>
+        <p:grpSpPr>
+          <a:xfrm>
+            <a:off x="2892436" y="644969"/>
+            <a:ext cx="713688" cy="88589"/>
+            <a:chOff x="2908703" y="644969"/>
+            <a:chExt cx="713688" cy="88589"/>
+          </a:xfrm>
+        </p:grpSpPr>
         <p:grpSp>
           <p:nvGrpSpPr>
             <p:cNvPr id="135" name="Group 134">
@@ -4609,9 +5049,9 @@
           </p:nvGrpSpPr>
           <p:grpSpPr>
             <a:xfrm>
-              <a:off x="3288976" y="644971"/>
+              <a:off x="3299308" y="644971"/>
               <a:ext cx="149763" cy="88587"/>
-              <a:chOff x="5022545" y="3695255"/>
+              <a:chOff x="5036249" y="3695255"/>
               <a:chExt cx="198639" cy="117498"/>
             </a:xfrm>
           </p:grpSpPr>
@@ -4629,7 +5069,7 @@
             </p:nvSpPr>
             <p:spPr>
               <a:xfrm rot="1773357">
-                <a:off x="5022545" y="3695255"/>
+                <a:off x="5036249" y="3695255"/>
                 <a:ext cx="198639" cy="117498"/>
               </a:xfrm>
               <a:prstGeom prst="roundRect">
@@ -4688,7 +5128,7 @@
             </p:nvSpPr>
             <p:spPr>
               <a:xfrm rot="1773357">
-                <a:off x="5125505" y="3739164"/>
+                <a:off x="5139209" y="3739164"/>
                 <a:ext cx="67339" cy="67339"/>
               </a:xfrm>
               <a:prstGeom prst="ellipse">
@@ -4729,164 +5169,6 @@
             </p:txBody>
           </p:sp>
         </p:grpSp>
-        <p:cxnSp>
-          <p:nvCxnSpPr>
-            <p:cNvPr id="137" name="Straight Arrow Connector 136">
-              <a:extLst>
-                <a:ext uri="{FF2B5EF4-FFF2-40B4-BE49-F238E27FC236}">
-                  <a16:creationId xmlns:a16="http://schemas.microsoft.com/office/drawing/2014/main" id="{D4DB82F2-633A-12D3-F7EE-31B59E9C90E9}"/>
-                </a:ext>
-              </a:extLst>
-            </p:cNvPr>
-            <p:cNvCxnSpPr>
-              <a:cxnSpLocks/>
-            </p:cNvCxnSpPr>
-            <p:nvPr/>
-          </p:nvCxnSpPr>
-          <p:spPr>
-            <a:xfrm flipV="1">
-              <a:off x="3314987" y="245509"/>
-              <a:ext cx="194064" cy="59679"/>
-            </a:xfrm>
-            <a:prstGeom prst="straightConnector1">
-              <a:avLst/>
-            </a:prstGeom>
-            <a:ln w="12700">
-              <a:solidFill>
-                <a:schemeClr val="tx1">
-                  <a:lumMod val="65000"/>
-                  <a:lumOff val="35000"/>
-                </a:schemeClr>
-              </a:solidFill>
-              <a:tailEnd type="triangle" w="sm" len="med"/>
-            </a:ln>
-          </p:spPr>
-          <p:style>
-            <a:lnRef idx="2">
-              <a:schemeClr val="accent1"/>
-            </a:lnRef>
-            <a:fillRef idx="0">
-              <a:schemeClr val="accent1"/>
-            </a:fillRef>
-            <a:effectRef idx="1">
-              <a:schemeClr val="accent1"/>
-            </a:effectRef>
-            <a:fontRef idx="minor">
-              <a:schemeClr val="tx1"/>
-            </a:fontRef>
-          </p:style>
-        </p:cxnSp>
-        <p:sp>
-          <p:nvSpPr>
-            <p:cNvPr id="138" name="Left Brace 137">
-              <a:extLst>
-                <a:ext uri="{FF2B5EF4-FFF2-40B4-BE49-F238E27FC236}">
-                  <a16:creationId xmlns:a16="http://schemas.microsoft.com/office/drawing/2014/main" id="{8D8E1F1B-8E77-B8DD-C266-364D82510485}"/>
-                </a:ext>
-              </a:extLst>
-            </p:cNvPr>
-            <p:cNvSpPr/>
-            <p:nvPr/>
-          </p:nvSpPr>
-          <p:spPr>
-            <a:xfrm rot="5400000">
-              <a:off x="3158376" y="411358"/>
-              <a:ext cx="200776" cy="204098"/>
-            </a:xfrm>
-            <a:prstGeom prst="leftBrace">
-              <a:avLst/>
-            </a:prstGeom>
-            <a:ln w="12700">
-              <a:solidFill>
-                <a:schemeClr val="tx1">
-                  <a:lumMod val="65000"/>
-                  <a:lumOff val="35000"/>
-                </a:schemeClr>
-              </a:solidFill>
-              <a:headEnd type="triangle" w="sm" len="med"/>
-              <a:tailEnd type="triangle" w="sm" len="med"/>
-            </a:ln>
-          </p:spPr>
-          <p:style>
-            <a:lnRef idx="2">
-              <a:schemeClr val="accent1"/>
-            </a:lnRef>
-            <a:fillRef idx="0">
-              <a:schemeClr val="accent1"/>
-            </a:fillRef>
-            <a:effectRef idx="1">
-              <a:schemeClr val="accent1"/>
-            </a:effectRef>
-            <a:fontRef idx="minor">
-              <a:schemeClr val="tx1"/>
-            </a:fontRef>
-          </p:style>
-          <p:txBody>
-            <a:bodyPr rtlCol="0" anchor="ctr"/>
-            <a:lstStyle/>
-            <a:p>
-              <a:pPr algn="ctr"/>
-              <a:endParaRPr lang="en-US"/>
-            </a:p>
-          </p:txBody>
-        </p:sp>
-        <p:sp>
-          <p:nvSpPr>
-            <p:cNvPr id="139" name="Left Brace 138">
-              <a:extLst>
-                <a:ext uri="{FF2B5EF4-FFF2-40B4-BE49-F238E27FC236}">
-                  <a16:creationId xmlns:a16="http://schemas.microsoft.com/office/drawing/2014/main" id="{372935FD-EA04-BBC2-5DC0-5A145AD78105}"/>
-                </a:ext>
-              </a:extLst>
-            </p:cNvPr>
-            <p:cNvSpPr/>
-            <p:nvPr/>
-          </p:nvSpPr>
-          <p:spPr>
-            <a:xfrm rot="5400000">
-              <a:off x="3155693" y="247057"/>
-              <a:ext cx="200870" cy="532606"/>
-            </a:xfrm>
-            <a:prstGeom prst="leftBrace">
-              <a:avLst>
-                <a:gd name="adj1" fmla="val 14144"/>
-                <a:gd name="adj2" fmla="val 50000"/>
-              </a:avLst>
-            </a:prstGeom>
-            <a:ln w="12700">
-              <a:solidFill>
-                <a:schemeClr val="tx1">
-                  <a:lumMod val="65000"/>
-                  <a:lumOff val="35000"/>
-                </a:schemeClr>
-              </a:solidFill>
-              <a:headEnd type="triangle" w="sm" len="med"/>
-              <a:tailEnd type="triangle" w="sm" len="med"/>
-            </a:ln>
-          </p:spPr>
-          <p:style>
-            <a:lnRef idx="2">
-              <a:schemeClr val="accent1"/>
-            </a:lnRef>
-            <a:fillRef idx="0">
-              <a:schemeClr val="accent1"/>
-            </a:fillRef>
-            <a:effectRef idx="1">
-              <a:schemeClr val="accent1"/>
-            </a:effectRef>
-            <a:fontRef idx="minor">
-              <a:schemeClr val="tx1"/>
-            </a:fontRef>
-          </p:style>
-          <p:txBody>
-            <a:bodyPr rtlCol="0" anchor="ctr"/>
-            <a:lstStyle/>
-            <a:p>
-              <a:pPr algn="ctr"/>
-              <a:endParaRPr lang="en-US"/>
-            </a:p>
-          </p:txBody>
-        </p:sp>
         <p:grpSp>
           <p:nvGrpSpPr>
             <p:cNvPr id="140" name="Group 139">
@@ -4901,9 +5183,9 @@
           </p:nvGrpSpPr>
           <p:grpSpPr>
             <a:xfrm>
-              <a:off x="3462296" y="644971"/>
+              <a:off x="3472628" y="644971"/>
               <a:ext cx="149763" cy="88587"/>
-              <a:chOff x="5022545" y="3695255"/>
+              <a:chOff x="5036249" y="3695255"/>
               <a:chExt cx="198639" cy="117498"/>
             </a:xfrm>
           </p:grpSpPr>
@@ -4921,7 +5203,7 @@
             </p:nvSpPr>
             <p:spPr>
               <a:xfrm rot="1773357">
-                <a:off x="5022545" y="3695255"/>
+                <a:off x="5036249" y="3695255"/>
                 <a:ext cx="198639" cy="117498"/>
               </a:xfrm>
               <a:prstGeom prst="roundRect">
@@ -4980,7 +5262,7 @@
             </p:nvSpPr>
             <p:spPr>
               <a:xfrm rot="1773357">
-                <a:off x="5125505" y="3739164"/>
+                <a:off x="5139209" y="3739164"/>
                 <a:ext cx="67339" cy="67339"/>
               </a:xfrm>
               <a:prstGeom prst="ellipse">
@@ -5155,12 +5437,33 @@
             </p:txBody>
           </p:sp>
         </p:grpSp>
+      </p:grpSp>
+      <p:grpSp>
+        <p:nvGrpSpPr>
+          <p:cNvPr id="23" name="Group 22">
+            <a:extLst>
+              <a:ext uri="{FF2B5EF4-FFF2-40B4-BE49-F238E27FC236}">
+                <a16:creationId xmlns:a16="http://schemas.microsoft.com/office/drawing/2014/main" id="{5B5555FF-C3E3-8E15-4CCF-6C4FB6C08DC0}"/>
+              </a:ext>
+            </a:extLst>
+          </p:cNvPr>
+          <p:cNvGrpSpPr/>
+          <p:nvPr/>
+        </p:nvGrpSpPr>
+        <p:grpSpPr>
+          <a:xfrm>
+            <a:off x="3523885" y="191150"/>
+            <a:ext cx="149763" cy="88587"/>
+            <a:chOff x="3528972" y="197682"/>
+            <a:chExt cx="149763" cy="88587"/>
+          </a:xfrm>
+        </p:grpSpPr>
         <p:sp>
           <p:nvSpPr>
-            <p:cNvPr id="2" name="Oval 1">
+            <p:cNvPr id="134" name="Rounded Rectangle 133">
               <a:extLst>
                 <a:ext uri="{FF2B5EF4-FFF2-40B4-BE49-F238E27FC236}">
-                  <a16:creationId xmlns:a16="http://schemas.microsoft.com/office/drawing/2014/main" id="{E7D8E67B-EFA7-DCFE-B365-861BF8C0049F}"/>
+                  <a16:creationId xmlns:a16="http://schemas.microsoft.com/office/drawing/2014/main" id="{5280465B-AFF7-45AE-8B4D-F50ED4969B32}"/>
                 </a:ext>
               </a:extLst>
             </p:cNvPr>
@@ -5169,273 +5472,7 @@
           </p:nvSpPr>
           <p:spPr>
             <a:xfrm rot="1773357">
-              <a:off x="3534824" y="230213"/>
-              <a:ext cx="50770" cy="50770"/>
-            </a:xfrm>
-            <a:prstGeom prst="ellipse">
-              <a:avLst/>
-            </a:prstGeom>
-            <a:noFill/>
-            <a:ln w="12700">
-              <a:solidFill>
-                <a:schemeClr val="accent1">
-                  <a:lumMod val="75000"/>
-                </a:schemeClr>
-              </a:solidFill>
-            </a:ln>
-          </p:spPr>
-          <p:style>
-            <a:lnRef idx="2">
-              <a:schemeClr val="accent1">
-                <a:shade val="15000"/>
-              </a:schemeClr>
-            </a:lnRef>
-            <a:fillRef idx="1">
-              <a:schemeClr val="accent1"/>
-            </a:fillRef>
-            <a:effectRef idx="0">
-              <a:schemeClr val="accent1"/>
-            </a:effectRef>
-            <a:fontRef idx="minor">
-              <a:schemeClr val="lt1"/>
-            </a:fontRef>
-          </p:style>
-          <p:txBody>
-            <a:bodyPr rtlCol="0" anchor="ctr"/>
-            <a:lstStyle/>
-            <a:p>
-              <a:pPr algn="ctr"/>
-              <a:endParaRPr lang="en-US"/>
-            </a:p>
-          </p:txBody>
-        </p:sp>
-      </p:grpSp>
-      <p:grpSp>
-        <p:nvGrpSpPr>
-          <p:cNvPr id="7" name="Group 6">
-            <a:extLst>
-              <a:ext uri="{FF2B5EF4-FFF2-40B4-BE49-F238E27FC236}">
-                <a16:creationId xmlns:a16="http://schemas.microsoft.com/office/drawing/2014/main" id="{4802A292-E1B5-7FB0-250C-8E2169D5C74B}"/>
-              </a:ext>
-            </a:extLst>
-          </p:cNvPr>
-          <p:cNvGrpSpPr/>
-          <p:nvPr/>
-        </p:nvGrpSpPr>
-        <p:grpSpPr>
-          <a:xfrm>
-            <a:off x="2748062" y="903797"/>
-            <a:ext cx="992958" cy="727151"/>
-            <a:chOff x="2748062" y="903797"/>
-            <a:chExt cx="992958" cy="727151"/>
-          </a:xfrm>
-        </p:grpSpPr>
-        <p:sp>
-          <p:nvSpPr>
-            <p:cNvPr id="98" name="Rounded Rectangle 97">
-              <a:extLst>
-                <a:ext uri="{FF2B5EF4-FFF2-40B4-BE49-F238E27FC236}">
-                  <a16:creationId xmlns:a16="http://schemas.microsoft.com/office/drawing/2014/main" id="{DFBF719B-ED37-15EE-632F-D3C145B420C2}"/>
-                </a:ext>
-              </a:extLst>
-            </p:cNvPr>
-            <p:cNvSpPr/>
-            <p:nvPr/>
-          </p:nvSpPr>
-          <p:spPr>
-            <a:xfrm>
-              <a:off x="2748062" y="903797"/>
-              <a:ext cx="992958" cy="727151"/>
-            </a:xfrm>
-            <a:prstGeom prst="roundRect">
-              <a:avLst/>
-            </a:prstGeom>
-            <a:solidFill>
-              <a:schemeClr val="bg1"/>
-            </a:solidFill>
-            <a:ln w="12700">
-              <a:solidFill>
-                <a:schemeClr val="accent1">
-                  <a:shade val="15000"/>
-                </a:schemeClr>
-              </a:solidFill>
-            </a:ln>
-          </p:spPr>
-          <p:style>
-            <a:lnRef idx="2">
-              <a:schemeClr val="accent1">
-                <a:shade val="15000"/>
-              </a:schemeClr>
-            </a:lnRef>
-            <a:fillRef idx="1">
-              <a:schemeClr val="accent1"/>
-            </a:fillRef>
-            <a:effectRef idx="0">
-              <a:schemeClr val="accent1"/>
-            </a:effectRef>
-            <a:fontRef idx="minor">
-              <a:schemeClr val="lt1"/>
-            </a:fontRef>
-          </p:style>
-          <p:txBody>
-            <a:bodyPr rtlCol="0" anchor="ctr"/>
-            <a:lstStyle/>
-            <a:p>
-              <a:pPr algn="ctr"/>
-              <a:endParaRPr lang="en-US"/>
-            </a:p>
-          </p:txBody>
-        </p:sp>
-        <p:grpSp>
-          <p:nvGrpSpPr>
-            <p:cNvPr id="101" name="Group 100">
-              <a:extLst>
-                <a:ext uri="{FF2B5EF4-FFF2-40B4-BE49-F238E27FC236}">
-                  <a16:creationId xmlns:a16="http://schemas.microsoft.com/office/drawing/2014/main" id="{B415D5A0-74BF-69B2-B6A9-A71D3FE2EFC6}"/>
-                </a:ext>
-              </a:extLst>
-            </p:cNvPr>
-            <p:cNvGrpSpPr/>
-            <p:nvPr/>
-          </p:nvGrpSpPr>
-          <p:grpSpPr>
-            <a:xfrm>
-              <a:off x="3110375" y="1062606"/>
-              <a:ext cx="149763" cy="88587"/>
-              <a:chOff x="5022545" y="3695255"/>
-              <a:chExt cx="198639" cy="117498"/>
-            </a:xfrm>
-          </p:grpSpPr>
-          <p:sp>
-            <p:nvSpPr>
-              <p:cNvPr id="113" name="Rounded Rectangle 112">
-                <a:extLst>
-                  <a:ext uri="{FF2B5EF4-FFF2-40B4-BE49-F238E27FC236}">
-                    <a16:creationId xmlns:a16="http://schemas.microsoft.com/office/drawing/2014/main" id="{2DBA09F3-5186-0CA9-E876-0E579D44F1E4}"/>
-                  </a:ext>
-                </a:extLst>
-              </p:cNvPr>
-              <p:cNvSpPr/>
-              <p:nvPr/>
-            </p:nvSpPr>
-            <p:spPr>
-              <a:xfrm rot="1773357">
-                <a:off x="5022545" y="3695255"/>
-                <a:ext cx="198639" cy="117498"/>
-              </a:xfrm>
-              <a:prstGeom prst="roundRect">
-                <a:avLst>
-                  <a:gd name="adj" fmla="val 47948"/>
-                </a:avLst>
-              </a:prstGeom>
-              <a:solidFill>
-                <a:schemeClr val="bg1"/>
-              </a:solidFill>
-              <a:ln w="12700">
-                <a:solidFill>
-                  <a:schemeClr val="tx1">
-                    <a:lumMod val="65000"/>
-                    <a:lumOff val="35000"/>
-                  </a:schemeClr>
-                </a:solidFill>
-              </a:ln>
-            </p:spPr>
-            <p:style>
-              <a:lnRef idx="2">
-                <a:schemeClr val="accent1">
-                  <a:shade val="15000"/>
-                </a:schemeClr>
-              </a:lnRef>
-              <a:fillRef idx="1">
-                <a:schemeClr val="accent1"/>
-              </a:fillRef>
-              <a:effectRef idx="0">
-                <a:schemeClr val="accent1"/>
-              </a:effectRef>
-              <a:fontRef idx="minor">
-                <a:schemeClr val="lt1"/>
-              </a:fontRef>
-            </p:style>
-            <p:txBody>
-              <a:bodyPr rtlCol="0" anchor="ctr"/>
-              <a:lstStyle/>
-              <a:p>
-                <a:pPr algn="ctr"/>
-                <a:endParaRPr lang="en-US" dirty="0"/>
-              </a:p>
-            </p:txBody>
-          </p:sp>
-          <p:sp>
-            <p:nvSpPr>
-              <p:cNvPr id="114" name="Oval 113">
-                <a:extLst>
-                  <a:ext uri="{FF2B5EF4-FFF2-40B4-BE49-F238E27FC236}">
-                    <a16:creationId xmlns:a16="http://schemas.microsoft.com/office/drawing/2014/main" id="{A35B91A9-E371-15BE-72ED-E2A47F213ACE}"/>
-                  </a:ext>
-                </a:extLst>
-              </p:cNvPr>
-              <p:cNvSpPr/>
-              <p:nvPr/>
-            </p:nvSpPr>
-            <p:spPr>
-              <a:xfrm rot="1773357">
-                <a:off x="5125505" y="3739164"/>
-                <a:ext cx="67339" cy="67339"/>
-              </a:xfrm>
-              <a:prstGeom prst="ellipse">
-                <a:avLst/>
-              </a:prstGeom>
-              <a:noFill/>
-              <a:ln w="12700">
-                <a:solidFill>
-                  <a:schemeClr val="tx1">
-                    <a:lumMod val="75000"/>
-                    <a:lumOff val="25000"/>
-                  </a:schemeClr>
-                </a:solidFill>
-              </a:ln>
-            </p:spPr>
-            <p:style>
-              <a:lnRef idx="2">
-                <a:schemeClr val="accent1">
-                  <a:shade val="15000"/>
-                </a:schemeClr>
-              </a:lnRef>
-              <a:fillRef idx="1">
-                <a:schemeClr val="accent1"/>
-              </a:fillRef>
-              <a:effectRef idx="0">
-                <a:schemeClr val="accent1"/>
-              </a:effectRef>
-              <a:fontRef idx="minor">
-                <a:schemeClr val="lt1"/>
-              </a:fontRef>
-            </p:style>
-            <p:txBody>
-              <a:bodyPr rtlCol="0" anchor="ctr"/>
-              <a:lstStyle/>
-              <a:p>
-                <a:pPr algn="ctr"/>
-                <a:endParaRPr lang="en-US"/>
-              </a:p>
-            </p:txBody>
-          </p:sp>
-        </p:grpSp>
-        <p:sp>
-          <p:nvSpPr>
-            <p:cNvPr id="102" name="Rounded Rectangle 101">
-              <a:extLst>
-                <a:ext uri="{FF2B5EF4-FFF2-40B4-BE49-F238E27FC236}">
-                  <a16:creationId xmlns:a16="http://schemas.microsoft.com/office/drawing/2014/main" id="{D0CACAE0-A9B0-F793-7EE0-E808A246AAFC}"/>
-                </a:ext>
-              </a:extLst>
-            </p:cNvPr>
-            <p:cNvSpPr/>
-            <p:nvPr/>
-          </p:nvSpPr>
-          <p:spPr>
-            <a:xfrm rot="1773357">
-              <a:off x="3391425" y="1001335"/>
+              <a:off x="3528972" y="197682"/>
               <a:ext cx="149763" cy="88587"/>
             </a:xfrm>
             <a:prstGeom prst="roundRect">
@@ -5484,10 +5521,10 @@
         </p:sp>
         <p:sp>
           <p:nvSpPr>
-            <p:cNvPr id="103" name="Rounded Rectangle 102">
+            <p:cNvPr id="2" name="Oval 1">
               <a:extLst>
                 <a:ext uri="{FF2B5EF4-FFF2-40B4-BE49-F238E27FC236}">
-                  <a16:creationId xmlns:a16="http://schemas.microsoft.com/office/drawing/2014/main" id="{EC4D6BB9-EE4B-1798-4A1A-2B791BF661D3}"/>
+                  <a16:creationId xmlns:a16="http://schemas.microsoft.com/office/drawing/2014/main" id="{E7D8E67B-EFA7-DCFE-B365-861BF8C0049F}"/>
                 </a:ext>
               </a:extLst>
             </p:cNvPr>
@@ -5496,7 +5533,769 @@
           </p:nvSpPr>
           <p:spPr>
             <a:xfrm rot="1773357">
-              <a:off x="3385205" y="1196871"/>
+              <a:off x="3601499" y="230213"/>
+              <a:ext cx="50770" cy="50770"/>
+            </a:xfrm>
+            <a:prstGeom prst="ellipse">
+              <a:avLst/>
+            </a:prstGeom>
+            <a:noFill/>
+            <a:ln w="12700">
+              <a:solidFill>
+                <a:schemeClr val="accent1">
+                  <a:lumMod val="75000"/>
+                </a:schemeClr>
+              </a:solidFill>
+            </a:ln>
+          </p:spPr>
+          <p:style>
+            <a:lnRef idx="2">
+              <a:schemeClr val="accent1">
+                <a:shade val="15000"/>
+              </a:schemeClr>
+            </a:lnRef>
+            <a:fillRef idx="1">
+              <a:schemeClr val="accent1"/>
+            </a:fillRef>
+            <a:effectRef idx="0">
+              <a:schemeClr val="accent1"/>
+            </a:effectRef>
+            <a:fontRef idx="minor">
+              <a:schemeClr val="lt1"/>
+            </a:fontRef>
+          </p:style>
+          <p:txBody>
+            <a:bodyPr rtlCol="0" anchor="ctr"/>
+            <a:lstStyle/>
+            <a:p>
+              <a:pPr algn="ctr"/>
+              <a:endParaRPr lang="en-US"/>
+            </a:p>
+          </p:txBody>
+        </p:sp>
+      </p:grpSp>
+      <p:grpSp>
+        <p:nvGrpSpPr>
+          <p:cNvPr id="34" name="Group 33">
+            <a:extLst>
+              <a:ext uri="{FF2B5EF4-FFF2-40B4-BE49-F238E27FC236}">
+                <a16:creationId xmlns:a16="http://schemas.microsoft.com/office/drawing/2014/main" id="{E669FC67-3004-0C87-03CC-13819D6A5A37}"/>
+              </a:ext>
+            </a:extLst>
+          </p:cNvPr>
+          <p:cNvGrpSpPr/>
+          <p:nvPr/>
+        </p:nvGrpSpPr>
+        <p:grpSpPr>
+          <a:xfrm>
+            <a:off x="2943226" y="372154"/>
+            <a:ext cx="602535" cy="234601"/>
+            <a:chOff x="2943226" y="378686"/>
+            <a:chExt cx="602535" cy="234601"/>
+          </a:xfrm>
+        </p:grpSpPr>
+        <p:grpSp>
+          <p:nvGrpSpPr>
+            <p:cNvPr id="33" name="Group 32">
+              <a:extLst>
+                <a:ext uri="{FF2B5EF4-FFF2-40B4-BE49-F238E27FC236}">
+                  <a16:creationId xmlns:a16="http://schemas.microsoft.com/office/drawing/2014/main" id="{6BC4F606-DD06-6131-6C71-4B71CD2DFA44}"/>
+                </a:ext>
+              </a:extLst>
+            </p:cNvPr>
+            <p:cNvGrpSpPr/>
+            <p:nvPr/>
+          </p:nvGrpSpPr>
+          <p:grpSpPr>
+            <a:xfrm>
+              <a:off x="2943226" y="378686"/>
+              <a:ext cx="296590" cy="234601"/>
+              <a:chOff x="2943226" y="378714"/>
+              <a:chExt cx="296590" cy="234601"/>
+            </a:xfrm>
+          </p:grpSpPr>
+          <p:sp>
+            <p:nvSpPr>
+              <p:cNvPr id="22" name="Freeform 21">
+                <a:extLst>
+                  <a:ext uri="{FF2B5EF4-FFF2-40B4-BE49-F238E27FC236}">
+                    <a16:creationId xmlns:a16="http://schemas.microsoft.com/office/drawing/2014/main" id="{2897818A-2CEE-A014-1890-0AEC86A0E12C}"/>
+                  </a:ext>
+                </a:extLst>
+              </p:cNvPr>
+              <p:cNvSpPr/>
+              <p:nvPr/>
+            </p:nvSpPr>
+            <p:spPr>
+              <a:xfrm>
+                <a:off x="2943226" y="378714"/>
+                <a:ext cx="296590" cy="227711"/>
+              </a:xfrm>
+              <a:custGeom>
+                <a:avLst/>
+                <a:gdLst>
+                  <a:gd name="csX0" fmla="*/ 298450 w 298567"/>
+                  <a:gd name="csY0" fmla="*/ 0 h 231775"/>
+                  <a:gd name="csX1" fmla="*/ 257175 w 298567"/>
+                  <a:gd name="csY1" fmla="*/ 111125 h 231775"/>
+                  <a:gd name="csX2" fmla="*/ 44450 w 298567"/>
+                  <a:gd name="csY2" fmla="*/ 155575 h 231775"/>
+                  <a:gd name="csX3" fmla="*/ 0 w 298567"/>
+                  <a:gd name="csY3" fmla="*/ 231775 h 231775"/>
+                </a:gdLst>
+                <a:ahLst/>
+                <a:cxnLst>
+                  <a:cxn ang="0">
+                    <a:pos x="csX0" y="csY0"/>
+                  </a:cxn>
+                  <a:cxn ang="0">
+                    <a:pos x="csX1" y="csY1"/>
+                  </a:cxn>
+                  <a:cxn ang="0">
+                    <a:pos x="csX2" y="csY2"/>
+                  </a:cxn>
+                  <a:cxn ang="0">
+                    <a:pos x="csX3" y="csY3"/>
+                  </a:cxn>
+                </a:cxnLst>
+                <a:rect l="l" t="t" r="r" b="b"/>
+                <a:pathLst>
+                  <a:path w="298567" h="231775">
+                    <a:moveTo>
+                      <a:pt x="298450" y="0"/>
+                    </a:moveTo>
+                    <a:cubicBezTo>
+                      <a:pt x="298979" y="42598"/>
+                      <a:pt x="299508" y="85196"/>
+                      <a:pt x="257175" y="111125"/>
+                    </a:cubicBezTo>
+                    <a:cubicBezTo>
+                      <a:pt x="214842" y="137054"/>
+                      <a:pt x="87312" y="135467"/>
+                      <a:pt x="44450" y="155575"/>
+                    </a:cubicBezTo>
+                    <a:cubicBezTo>
+                      <a:pt x="1588" y="175683"/>
+                      <a:pt x="794" y="203729"/>
+                      <a:pt x="0" y="231775"/>
+                    </a:cubicBezTo>
+                  </a:path>
+                </a:pathLst>
+              </a:custGeom>
+              <a:noFill/>
+              <a:ln w="12700">
+                <a:solidFill>
+                  <a:schemeClr val="tx1">
+                    <a:lumMod val="65000"/>
+                    <a:lumOff val="35000"/>
+                  </a:schemeClr>
+                </a:solidFill>
+                <a:tailEnd type="triangle" w="sm" len="sm"/>
+              </a:ln>
+            </p:spPr>
+            <p:style>
+              <a:lnRef idx="2">
+                <a:schemeClr val="accent1">
+                  <a:shade val="15000"/>
+                </a:schemeClr>
+              </a:lnRef>
+              <a:fillRef idx="1">
+                <a:schemeClr val="accent1"/>
+              </a:fillRef>
+              <a:effectRef idx="0">
+                <a:schemeClr val="accent1"/>
+              </a:effectRef>
+              <a:fontRef idx="minor">
+                <a:schemeClr val="lt1"/>
+              </a:fontRef>
+            </p:style>
+            <p:txBody>
+              <a:bodyPr rtlCol="0" anchor="ctr"/>
+              <a:lstStyle/>
+              <a:p>
+                <a:pPr algn="ctr"/>
+                <a:endParaRPr lang="en-US"/>
+              </a:p>
+            </p:txBody>
+          </p:sp>
+          <p:sp>
+            <p:nvSpPr>
+              <p:cNvPr id="28" name="Freeform 27">
+                <a:extLst>
+                  <a:ext uri="{FF2B5EF4-FFF2-40B4-BE49-F238E27FC236}">
+                    <a16:creationId xmlns:a16="http://schemas.microsoft.com/office/drawing/2014/main" id="{1AAC5638-72E1-FCD1-F929-E70BCF100E84}"/>
+                  </a:ext>
+                </a:extLst>
+              </p:cNvPr>
+              <p:cNvSpPr/>
+              <p:nvPr/>
+            </p:nvSpPr>
+            <p:spPr>
+              <a:xfrm>
+                <a:off x="3124158" y="497305"/>
+                <a:ext cx="48970" cy="116010"/>
+              </a:xfrm>
+              <a:custGeom>
+                <a:avLst/>
+                <a:gdLst>
+                  <a:gd name="csX0" fmla="*/ 57752 w 57752"/>
+                  <a:gd name="csY0" fmla="*/ 0 h 96253"/>
+                  <a:gd name="csX1" fmla="*/ 9625 w 57752"/>
+                  <a:gd name="csY1" fmla="*/ 22459 h 96253"/>
+                  <a:gd name="csX2" fmla="*/ 0 w 57752"/>
+                  <a:gd name="csY2" fmla="*/ 96253 h 96253"/>
+                </a:gdLst>
+                <a:ahLst/>
+                <a:cxnLst>
+                  <a:cxn ang="0">
+                    <a:pos x="csX0" y="csY0"/>
+                  </a:cxn>
+                  <a:cxn ang="0">
+                    <a:pos x="csX1" y="csY1"/>
+                  </a:cxn>
+                  <a:cxn ang="0">
+                    <a:pos x="csX2" y="csY2"/>
+                  </a:cxn>
+                </a:cxnLst>
+                <a:rect l="l" t="t" r="r" b="b"/>
+                <a:pathLst>
+                  <a:path w="57752" h="96253">
+                    <a:moveTo>
+                      <a:pt x="57752" y="0"/>
+                    </a:moveTo>
+                    <a:cubicBezTo>
+                      <a:pt x="38501" y="3208"/>
+                      <a:pt x="19250" y="6417"/>
+                      <a:pt x="9625" y="22459"/>
+                    </a:cubicBezTo>
+                    <a:cubicBezTo>
+                      <a:pt x="0" y="38501"/>
+                      <a:pt x="0" y="67377"/>
+                      <a:pt x="0" y="96253"/>
+                    </a:cubicBezTo>
+                  </a:path>
+                </a:pathLst>
+              </a:custGeom>
+              <a:noFill/>
+              <a:ln w="12700">
+                <a:solidFill>
+                  <a:schemeClr val="tx1">
+                    <a:lumMod val="65000"/>
+                    <a:lumOff val="35000"/>
+                  </a:schemeClr>
+                </a:solidFill>
+                <a:tailEnd type="triangle" w="sm" len="sm"/>
+              </a:ln>
+            </p:spPr>
+            <p:style>
+              <a:lnRef idx="2">
+                <a:schemeClr val="accent1">
+                  <a:shade val="15000"/>
+                </a:schemeClr>
+              </a:lnRef>
+              <a:fillRef idx="1">
+                <a:schemeClr val="accent1"/>
+              </a:fillRef>
+              <a:effectRef idx="0">
+                <a:schemeClr val="accent1"/>
+              </a:effectRef>
+              <a:fontRef idx="minor">
+                <a:schemeClr val="lt1"/>
+              </a:fontRef>
+            </p:style>
+            <p:txBody>
+              <a:bodyPr rtlCol="0" anchor="ctr"/>
+              <a:lstStyle/>
+              <a:p>
+                <a:pPr algn="ctr"/>
+                <a:endParaRPr lang="en-US"/>
+              </a:p>
+            </p:txBody>
+          </p:sp>
+        </p:grpSp>
+        <p:grpSp>
+          <p:nvGrpSpPr>
+            <p:cNvPr id="32" name="Group 31">
+              <a:extLst>
+                <a:ext uri="{FF2B5EF4-FFF2-40B4-BE49-F238E27FC236}">
+                  <a16:creationId xmlns:a16="http://schemas.microsoft.com/office/drawing/2014/main" id="{AA5924FE-3AD1-AD36-275C-2D69FC2C5513}"/>
+                </a:ext>
+              </a:extLst>
+            </p:cNvPr>
+            <p:cNvGrpSpPr/>
+            <p:nvPr/>
+          </p:nvGrpSpPr>
+          <p:grpSpPr>
+            <a:xfrm flipH="1">
+              <a:off x="3249171" y="378686"/>
+              <a:ext cx="296590" cy="234601"/>
+              <a:chOff x="3095626" y="531114"/>
+              <a:chExt cx="296590" cy="234601"/>
+            </a:xfrm>
+          </p:grpSpPr>
+          <p:sp>
+            <p:nvSpPr>
+              <p:cNvPr id="30" name="Freeform 29">
+                <a:extLst>
+                  <a:ext uri="{FF2B5EF4-FFF2-40B4-BE49-F238E27FC236}">
+                    <a16:creationId xmlns:a16="http://schemas.microsoft.com/office/drawing/2014/main" id="{4D99AFFF-72B1-0134-CB31-FA997047876F}"/>
+                  </a:ext>
+                </a:extLst>
+              </p:cNvPr>
+              <p:cNvSpPr/>
+              <p:nvPr/>
+            </p:nvSpPr>
+            <p:spPr>
+              <a:xfrm>
+                <a:off x="3095626" y="531114"/>
+                <a:ext cx="296590" cy="227711"/>
+              </a:xfrm>
+              <a:custGeom>
+                <a:avLst/>
+                <a:gdLst>
+                  <a:gd name="csX0" fmla="*/ 298450 w 298567"/>
+                  <a:gd name="csY0" fmla="*/ 0 h 231775"/>
+                  <a:gd name="csX1" fmla="*/ 257175 w 298567"/>
+                  <a:gd name="csY1" fmla="*/ 111125 h 231775"/>
+                  <a:gd name="csX2" fmla="*/ 44450 w 298567"/>
+                  <a:gd name="csY2" fmla="*/ 155575 h 231775"/>
+                  <a:gd name="csX3" fmla="*/ 0 w 298567"/>
+                  <a:gd name="csY3" fmla="*/ 231775 h 231775"/>
+                </a:gdLst>
+                <a:ahLst/>
+                <a:cxnLst>
+                  <a:cxn ang="0">
+                    <a:pos x="csX0" y="csY0"/>
+                  </a:cxn>
+                  <a:cxn ang="0">
+                    <a:pos x="csX1" y="csY1"/>
+                  </a:cxn>
+                  <a:cxn ang="0">
+                    <a:pos x="csX2" y="csY2"/>
+                  </a:cxn>
+                  <a:cxn ang="0">
+                    <a:pos x="csX3" y="csY3"/>
+                  </a:cxn>
+                </a:cxnLst>
+                <a:rect l="l" t="t" r="r" b="b"/>
+                <a:pathLst>
+                  <a:path w="298567" h="231775">
+                    <a:moveTo>
+                      <a:pt x="298450" y="0"/>
+                    </a:moveTo>
+                    <a:cubicBezTo>
+                      <a:pt x="298979" y="42598"/>
+                      <a:pt x="299508" y="85196"/>
+                      <a:pt x="257175" y="111125"/>
+                    </a:cubicBezTo>
+                    <a:cubicBezTo>
+                      <a:pt x="214842" y="137054"/>
+                      <a:pt x="87312" y="135467"/>
+                      <a:pt x="44450" y="155575"/>
+                    </a:cubicBezTo>
+                    <a:cubicBezTo>
+                      <a:pt x="1588" y="175683"/>
+                      <a:pt x="794" y="203729"/>
+                      <a:pt x="0" y="231775"/>
+                    </a:cubicBezTo>
+                  </a:path>
+                </a:pathLst>
+              </a:custGeom>
+              <a:noFill/>
+              <a:ln w="12700">
+                <a:solidFill>
+                  <a:schemeClr val="tx1">
+                    <a:lumMod val="65000"/>
+                    <a:lumOff val="35000"/>
+                  </a:schemeClr>
+                </a:solidFill>
+                <a:tailEnd type="triangle" w="sm" len="sm"/>
+              </a:ln>
+            </p:spPr>
+            <p:style>
+              <a:lnRef idx="2">
+                <a:schemeClr val="accent1">
+                  <a:shade val="15000"/>
+                </a:schemeClr>
+              </a:lnRef>
+              <a:fillRef idx="1">
+                <a:schemeClr val="accent1"/>
+              </a:fillRef>
+              <a:effectRef idx="0">
+                <a:schemeClr val="accent1"/>
+              </a:effectRef>
+              <a:fontRef idx="minor">
+                <a:schemeClr val="lt1"/>
+              </a:fontRef>
+            </p:style>
+            <p:txBody>
+              <a:bodyPr rtlCol="0" anchor="ctr"/>
+              <a:lstStyle/>
+              <a:p>
+                <a:pPr algn="ctr"/>
+                <a:endParaRPr lang="en-US" dirty="0"/>
+              </a:p>
+            </p:txBody>
+          </p:sp>
+          <p:sp>
+            <p:nvSpPr>
+              <p:cNvPr id="31" name="Freeform 30">
+                <a:extLst>
+                  <a:ext uri="{FF2B5EF4-FFF2-40B4-BE49-F238E27FC236}">
+                    <a16:creationId xmlns:a16="http://schemas.microsoft.com/office/drawing/2014/main" id="{C27AAF2B-0873-49D2-64FD-D5C6A9B797F3}"/>
+                  </a:ext>
+                </a:extLst>
+              </p:cNvPr>
+              <p:cNvSpPr/>
+              <p:nvPr/>
+            </p:nvSpPr>
+            <p:spPr>
+              <a:xfrm>
+                <a:off x="3276558" y="649705"/>
+                <a:ext cx="48970" cy="116010"/>
+              </a:xfrm>
+              <a:custGeom>
+                <a:avLst/>
+                <a:gdLst>
+                  <a:gd name="csX0" fmla="*/ 57752 w 57752"/>
+                  <a:gd name="csY0" fmla="*/ 0 h 96253"/>
+                  <a:gd name="csX1" fmla="*/ 9625 w 57752"/>
+                  <a:gd name="csY1" fmla="*/ 22459 h 96253"/>
+                  <a:gd name="csX2" fmla="*/ 0 w 57752"/>
+                  <a:gd name="csY2" fmla="*/ 96253 h 96253"/>
+                </a:gdLst>
+                <a:ahLst/>
+                <a:cxnLst>
+                  <a:cxn ang="0">
+                    <a:pos x="csX0" y="csY0"/>
+                  </a:cxn>
+                  <a:cxn ang="0">
+                    <a:pos x="csX1" y="csY1"/>
+                  </a:cxn>
+                  <a:cxn ang="0">
+                    <a:pos x="csX2" y="csY2"/>
+                  </a:cxn>
+                </a:cxnLst>
+                <a:rect l="l" t="t" r="r" b="b"/>
+                <a:pathLst>
+                  <a:path w="57752" h="96253">
+                    <a:moveTo>
+                      <a:pt x="57752" y="0"/>
+                    </a:moveTo>
+                    <a:cubicBezTo>
+                      <a:pt x="38501" y="3208"/>
+                      <a:pt x="19250" y="6417"/>
+                      <a:pt x="9625" y="22459"/>
+                    </a:cubicBezTo>
+                    <a:cubicBezTo>
+                      <a:pt x="0" y="38501"/>
+                      <a:pt x="0" y="67377"/>
+                      <a:pt x="0" y="96253"/>
+                    </a:cubicBezTo>
+                  </a:path>
+                </a:pathLst>
+              </a:custGeom>
+              <a:noFill/>
+              <a:ln w="12700">
+                <a:solidFill>
+                  <a:schemeClr val="tx1">
+                    <a:lumMod val="65000"/>
+                    <a:lumOff val="35000"/>
+                  </a:schemeClr>
+                </a:solidFill>
+                <a:tailEnd type="triangle" w="sm" len="sm"/>
+              </a:ln>
+            </p:spPr>
+            <p:style>
+              <a:lnRef idx="2">
+                <a:schemeClr val="accent1">
+                  <a:shade val="15000"/>
+                </a:schemeClr>
+              </a:lnRef>
+              <a:fillRef idx="1">
+                <a:schemeClr val="accent1"/>
+              </a:fillRef>
+              <a:effectRef idx="0">
+                <a:schemeClr val="accent1"/>
+              </a:effectRef>
+              <a:fontRef idx="minor">
+                <a:schemeClr val="lt1"/>
+              </a:fontRef>
+            </p:style>
+            <p:txBody>
+              <a:bodyPr rtlCol="0" anchor="ctr"/>
+              <a:lstStyle/>
+              <a:p>
+                <a:pPr algn="ctr"/>
+                <a:endParaRPr lang="en-US"/>
+              </a:p>
+            </p:txBody>
+          </p:sp>
+        </p:grpSp>
+      </p:grpSp>
+      <p:sp>
+        <p:nvSpPr>
+          <p:cNvPr id="79" name="Freeform 78">
+            <a:extLst>
+              <a:ext uri="{FF2B5EF4-FFF2-40B4-BE49-F238E27FC236}">
+                <a16:creationId xmlns:a16="http://schemas.microsoft.com/office/drawing/2014/main" id="{2EC567BF-5469-6094-F6C3-07453E5C730A}"/>
+              </a:ext>
+            </a:extLst>
+          </p:cNvPr>
+          <p:cNvSpPr/>
+          <p:nvPr/>
+        </p:nvSpPr>
+        <p:spPr>
+          <a:xfrm>
+            <a:off x="3325675" y="216848"/>
+            <a:ext cx="169124" cy="59459"/>
+          </a:xfrm>
+          <a:custGeom>
+            <a:avLst/>
+            <a:gdLst>
+              <a:gd name="csX0" fmla="*/ 0 w 198922"/>
+              <a:gd name="csY0" fmla="*/ 75003 h 75003"/>
+              <a:gd name="csX1" fmla="*/ 83419 w 198922"/>
+              <a:gd name="csY1" fmla="*/ 7626 h 75003"/>
+              <a:gd name="csX2" fmla="*/ 198922 w 198922"/>
+              <a:gd name="csY2" fmla="*/ 4418 h 75003"/>
+            </a:gdLst>
+            <a:ahLst/>
+            <a:cxnLst>
+              <a:cxn ang="0">
+                <a:pos x="csX0" y="csY0"/>
+              </a:cxn>
+              <a:cxn ang="0">
+                <a:pos x="csX1" y="csY1"/>
+              </a:cxn>
+              <a:cxn ang="0">
+                <a:pos x="csX2" y="csY2"/>
+              </a:cxn>
+            </a:cxnLst>
+            <a:rect l="l" t="t" r="r" b="b"/>
+            <a:pathLst>
+              <a:path w="198922" h="75003">
+                <a:moveTo>
+                  <a:pt x="0" y="75003"/>
+                </a:moveTo>
+                <a:cubicBezTo>
+                  <a:pt x="25132" y="47196"/>
+                  <a:pt x="50265" y="19390"/>
+                  <a:pt x="83419" y="7626"/>
+                </a:cubicBezTo>
+                <a:cubicBezTo>
+                  <a:pt x="116573" y="-4138"/>
+                  <a:pt x="157747" y="140"/>
+                  <a:pt x="198922" y="4418"/>
+                </a:cubicBezTo>
+              </a:path>
+            </a:pathLst>
+          </a:custGeom>
+          <a:noFill/>
+          <a:ln w="12700">
+            <a:solidFill>
+              <a:schemeClr val="tx1">
+                <a:lumMod val="65000"/>
+                <a:lumOff val="35000"/>
+              </a:schemeClr>
+            </a:solidFill>
+            <a:tailEnd type="stealth" w="sm" len="med"/>
+          </a:ln>
+        </p:spPr>
+        <p:style>
+          <a:lnRef idx="2">
+            <a:schemeClr val="accent1">
+              <a:shade val="15000"/>
+            </a:schemeClr>
+          </a:lnRef>
+          <a:fillRef idx="1">
+            <a:schemeClr val="accent1"/>
+          </a:fillRef>
+          <a:effectRef idx="0">
+            <a:schemeClr val="accent1"/>
+          </a:effectRef>
+          <a:fontRef idx="minor">
+            <a:schemeClr val="lt1"/>
+          </a:fontRef>
+        </p:style>
+        <p:txBody>
+          <a:bodyPr rtlCol="0" anchor="ctr"/>
+          <a:lstStyle/>
+          <a:p>
+            <a:pPr algn="ctr"/>
+            <a:endParaRPr lang="en-US"/>
+          </a:p>
+        </p:txBody>
+      </p:sp>
+      <p:grpSp>
+        <p:nvGrpSpPr>
+          <p:cNvPr id="133" name="Group 132">
+            <a:extLst>
+              <a:ext uri="{FF2B5EF4-FFF2-40B4-BE49-F238E27FC236}">
+                <a16:creationId xmlns:a16="http://schemas.microsoft.com/office/drawing/2014/main" id="{BDEEA8E2-30A8-949F-8987-D15DF1E5BAC7}"/>
+              </a:ext>
+            </a:extLst>
+          </p:cNvPr>
+          <p:cNvGrpSpPr/>
+          <p:nvPr/>
+        </p:nvGrpSpPr>
+        <p:grpSpPr>
+          <a:xfrm>
+            <a:off x="3169233" y="252421"/>
+            <a:ext cx="149763" cy="88587"/>
+            <a:chOff x="5022545" y="3695255"/>
+            <a:chExt cx="198639" cy="117498"/>
+          </a:xfrm>
+        </p:grpSpPr>
+        <p:sp>
+          <p:nvSpPr>
+            <p:cNvPr id="150" name="Rounded Rectangle 149">
+              <a:extLst>
+                <a:ext uri="{FF2B5EF4-FFF2-40B4-BE49-F238E27FC236}">
+                  <a16:creationId xmlns:a16="http://schemas.microsoft.com/office/drawing/2014/main" id="{162B2A07-5CFA-26BB-1A7A-D0E011A49B0F}"/>
+                </a:ext>
+              </a:extLst>
+            </p:cNvPr>
+            <p:cNvSpPr/>
+            <p:nvPr/>
+          </p:nvSpPr>
+          <p:spPr>
+            <a:xfrm rot="1773357">
+              <a:off x="5022545" y="3695255"/>
+              <a:ext cx="198639" cy="117498"/>
+            </a:xfrm>
+            <a:prstGeom prst="roundRect">
+              <a:avLst>
+                <a:gd name="adj" fmla="val 47948"/>
+              </a:avLst>
+            </a:prstGeom>
+            <a:solidFill>
+              <a:schemeClr val="bg1"/>
+            </a:solidFill>
+            <a:ln w="12700">
+              <a:solidFill>
+                <a:schemeClr val="tx1">
+                  <a:lumMod val="65000"/>
+                  <a:lumOff val="35000"/>
+                </a:schemeClr>
+              </a:solidFill>
+            </a:ln>
+          </p:spPr>
+          <p:style>
+            <a:lnRef idx="2">
+              <a:schemeClr val="accent1">
+                <a:shade val="15000"/>
+              </a:schemeClr>
+            </a:lnRef>
+            <a:fillRef idx="1">
+              <a:schemeClr val="accent1"/>
+            </a:fillRef>
+            <a:effectRef idx="0">
+              <a:schemeClr val="accent1"/>
+            </a:effectRef>
+            <a:fontRef idx="minor">
+              <a:schemeClr val="lt1"/>
+            </a:fontRef>
+          </p:style>
+          <p:txBody>
+            <a:bodyPr rtlCol="0" anchor="ctr"/>
+            <a:lstStyle/>
+            <a:p>
+              <a:pPr algn="ctr"/>
+              <a:endParaRPr lang="en-US" dirty="0"/>
+            </a:p>
+          </p:txBody>
+        </p:sp>
+        <p:sp>
+          <p:nvSpPr>
+            <p:cNvPr id="151" name="Oval 150">
+              <a:extLst>
+                <a:ext uri="{FF2B5EF4-FFF2-40B4-BE49-F238E27FC236}">
+                  <a16:creationId xmlns:a16="http://schemas.microsoft.com/office/drawing/2014/main" id="{25D97795-097D-47FF-18F0-615F1748AC97}"/>
+                </a:ext>
+              </a:extLst>
+            </p:cNvPr>
+            <p:cNvSpPr/>
+            <p:nvPr/>
+          </p:nvSpPr>
+          <p:spPr>
+            <a:xfrm rot="1773357">
+              <a:off x="5125505" y="3739164"/>
+              <a:ext cx="67339" cy="67339"/>
+            </a:xfrm>
+            <a:prstGeom prst="ellipse">
+              <a:avLst/>
+            </a:prstGeom>
+            <a:noFill/>
+            <a:ln w="12700">
+              <a:solidFill>
+                <a:schemeClr val="accent1">
+                  <a:lumMod val="75000"/>
+                </a:schemeClr>
+              </a:solidFill>
+            </a:ln>
+          </p:spPr>
+          <p:style>
+            <a:lnRef idx="2">
+              <a:schemeClr val="accent1">
+                <a:shade val="15000"/>
+              </a:schemeClr>
+            </a:lnRef>
+            <a:fillRef idx="1">
+              <a:schemeClr val="accent1"/>
+            </a:fillRef>
+            <a:effectRef idx="0">
+              <a:schemeClr val="accent1"/>
+            </a:effectRef>
+            <a:fontRef idx="minor">
+              <a:schemeClr val="lt1"/>
+            </a:fontRef>
+          </p:style>
+          <p:txBody>
+            <a:bodyPr rtlCol="0" anchor="ctr"/>
+            <a:lstStyle/>
+            <a:p>
+              <a:pPr algn="ctr"/>
+              <a:endParaRPr lang="en-US"/>
+            </a:p>
+          </p:txBody>
+        </p:sp>
+      </p:grpSp>
+      <p:grpSp>
+        <p:nvGrpSpPr>
+          <p:cNvPr id="24" name="Group 23">
+            <a:extLst>
+              <a:ext uri="{FF2B5EF4-FFF2-40B4-BE49-F238E27FC236}">
+                <a16:creationId xmlns:a16="http://schemas.microsoft.com/office/drawing/2014/main" id="{7703D974-D285-169C-695B-B0AB77AE0407}"/>
+              </a:ext>
+            </a:extLst>
+          </p:cNvPr>
+          <p:cNvGrpSpPr/>
+          <p:nvPr/>
+        </p:nvGrpSpPr>
+        <p:grpSpPr>
+          <a:xfrm>
+            <a:off x="3523885" y="1001335"/>
+            <a:ext cx="149763" cy="88587"/>
+            <a:chOff x="3489850" y="1001335"/>
+            <a:chExt cx="149763" cy="88587"/>
+          </a:xfrm>
+        </p:grpSpPr>
+        <p:sp>
+          <p:nvSpPr>
+            <p:cNvPr id="102" name="Rounded Rectangle 101">
+              <a:extLst>
+                <a:ext uri="{FF2B5EF4-FFF2-40B4-BE49-F238E27FC236}">
+                  <a16:creationId xmlns:a16="http://schemas.microsoft.com/office/drawing/2014/main" id="{D0CACAE0-A9B0-F793-7EE0-E808A246AAFC}"/>
+                </a:ext>
+              </a:extLst>
+            </p:cNvPr>
+            <p:cNvSpPr/>
+            <p:nvPr/>
+          </p:nvSpPr>
+          <p:spPr>
+            <a:xfrm rot="1773357">
+              <a:off x="3489850" y="1001335"/>
               <a:ext cx="149763" cy="88587"/>
             </a:xfrm>
             <a:prstGeom prst="roundRect">
@@ -5543,6 +6342,1368 @@
             </a:p>
           </p:txBody>
         </p:sp>
+        <p:sp>
+          <p:nvSpPr>
+            <p:cNvPr id="3" name="Oval 2">
+              <a:extLst>
+                <a:ext uri="{FF2B5EF4-FFF2-40B4-BE49-F238E27FC236}">
+                  <a16:creationId xmlns:a16="http://schemas.microsoft.com/office/drawing/2014/main" id="{10CDDE6A-7714-F3A8-82C8-46048D04155B}"/>
+                </a:ext>
+              </a:extLst>
+            </p:cNvPr>
+            <p:cNvSpPr/>
+            <p:nvPr/>
+          </p:nvSpPr>
+          <p:spPr>
+            <a:xfrm rot="1773357">
+              <a:off x="3564043" y="1033723"/>
+              <a:ext cx="50770" cy="50770"/>
+            </a:xfrm>
+            <a:prstGeom prst="ellipse">
+              <a:avLst/>
+            </a:prstGeom>
+            <a:noFill/>
+            <a:ln w="12700">
+              <a:solidFill>
+                <a:schemeClr val="tx1">
+                  <a:lumMod val="75000"/>
+                  <a:lumOff val="25000"/>
+                </a:schemeClr>
+              </a:solidFill>
+            </a:ln>
+          </p:spPr>
+          <p:style>
+            <a:lnRef idx="2">
+              <a:schemeClr val="accent1">
+                <a:shade val="15000"/>
+              </a:schemeClr>
+            </a:lnRef>
+            <a:fillRef idx="1">
+              <a:schemeClr val="accent1"/>
+            </a:fillRef>
+            <a:effectRef idx="0">
+              <a:schemeClr val="accent1"/>
+            </a:effectRef>
+            <a:fontRef idx="minor">
+              <a:schemeClr val="lt1"/>
+            </a:fontRef>
+          </p:style>
+          <p:txBody>
+            <a:bodyPr rtlCol="0" anchor="ctr"/>
+            <a:lstStyle/>
+            <a:p>
+              <a:pPr algn="ctr"/>
+              <a:endParaRPr lang="en-US"/>
+            </a:p>
+          </p:txBody>
+        </p:sp>
+      </p:grpSp>
+      <p:grpSp>
+        <p:nvGrpSpPr>
+          <p:cNvPr id="25" name="Group 24">
+            <a:extLst>
+              <a:ext uri="{FF2B5EF4-FFF2-40B4-BE49-F238E27FC236}">
+                <a16:creationId xmlns:a16="http://schemas.microsoft.com/office/drawing/2014/main" id="{25182E59-F6C6-9AAA-E9CE-5EF22EFA3591}"/>
+              </a:ext>
+            </a:extLst>
+          </p:cNvPr>
+          <p:cNvGrpSpPr/>
+          <p:nvPr/>
+        </p:nvGrpSpPr>
+        <p:grpSpPr>
+          <a:xfrm>
+            <a:off x="3523885" y="1196871"/>
+            <a:ext cx="149763" cy="88587"/>
+            <a:chOff x="3483630" y="1196871"/>
+            <a:chExt cx="149763" cy="88587"/>
+          </a:xfrm>
+        </p:grpSpPr>
+        <p:sp>
+          <p:nvSpPr>
+            <p:cNvPr id="103" name="Rounded Rectangle 102">
+              <a:extLst>
+                <a:ext uri="{FF2B5EF4-FFF2-40B4-BE49-F238E27FC236}">
+                  <a16:creationId xmlns:a16="http://schemas.microsoft.com/office/drawing/2014/main" id="{EC4D6BB9-EE4B-1798-4A1A-2B791BF661D3}"/>
+                </a:ext>
+              </a:extLst>
+            </p:cNvPr>
+            <p:cNvSpPr/>
+            <p:nvPr/>
+          </p:nvSpPr>
+          <p:spPr>
+            <a:xfrm rot="1773357">
+              <a:off x="3483630" y="1196871"/>
+              <a:ext cx="149763" cy="88587"/>
+            </a:xfrm>
+            <a:prstGeom prst="roundRect">
+              <a:avLst>
+                <a:gd name="adj" fmla="val 47948"/>
+              </a:avLst>
+            </a:prstGeom>
+            <a:solidFill>
+              <a:schemeClr val="bg1">
+                <a:lumMod val="85000"/>
+              </a:schemeClr>
+            </a:solidFill>
+            <a:ln w="12700">
+              <a:solidFill>
+                <a:schemeClr val="tx1">
+                  <a:lumMod val="65000"/>
+                  <a:lumOff val="35000"/>
+                </a:schemeClr>
+              </a:solidFill>
+            </a:ln>
+          </p:spPr>
+          <p:style>
+            <a:lnRef idx="2">
+              <a:schemeClr val="accent1">
+                <a:shade val="15000"/>
+              </a:schemeClr>
+            </a:lnRef>
+            <a:fillRef idx="1">
+              <a:schemeClr val="accent1"/>
+            </a:fillRef>
+            <a:effectRef idx="0">
+              <a:schemeClr val="accent1"/>
+            </a:effectRef>
+            <a:fontRef idx="minor">
+              <a:schemeClr val="lt1"/>
+            </a:fontRef>
+          </p:style>
+          <p:txBody>
+            <a:bodyPr rtlCol="0" anchor="ctr"/>
+            <a:lstStyle/>
+            <a:p>
+              <a:pPr algn="ctr"/>
+              <a:endParaRPr lang="en-US" dirty="0"/>
+            </a:p>
+          </p:txBody>
+        </p:sp>
+        <p:sp>
+          <p:nvSpPr>
+            <p:cNvPr id="4" name="Oval 3">
+              <a:extLst>
+                <a:ext uri="{FF2B5EF4-FFF2-40B4-BE49-F238E27FC236}">
+                  <a16:creationId xmlns:a16="http://schemas.microsoft.com/office/drawing/2014/main" id="{21366A09-64A1-7DCF-C141-E4BBFD27BDEF}"/>
+                </a:ext>
+              </a:extLst>
+            </p:cNvPr>
+            <p:cNvSpPr/>
+            <p:nvPr/>
+          </p:nvSpPr>
+          <p:spPr>
+            <a:xfrm rot="1773357">
+              <a:off x="3560554" y="1230442"/>
+              <a:ext cx="50770" cy="50770"/>
+            </a:xfrm>
+            <a:prstGeom prst="ellipse">
+              <a:avLst/>
+            </a:prstGeom>
+            <a:noFill/>
+            <a:ln w="12700">
+              <a:solidFill>
+                <a:schemeClr val="tx1">
+                  <a:lumMod val="75000"/>
+                  <a:lumOff val="25000"/>
+                </a:schemeClr>
+              </a:solidFill>
+            </a:ln>
+          </p:spPr>
+          <p:style>
+            <a:lnRef idx="2">
+              <a:schemeClr val="accent1">
+                <a:shade val="15000"/>
+              </a:schemeClr>
+            </a:lnRef>
+            <a:fillRef idx="1">
+              <a:schemeClr val="accent1"/>
+            </a:fillRef>
+            <a:effectRef idx="0">
+              <a:schemeClr val="accent1"/>
+            </a:effectRef>
+            <a:fontRef idx="minor">
+              <a:schemeClr val="lt1"/>
+            </a:fontRef>
+          </p:style>
+          <p:txBody>
+            <a:bodyPr rtlCol="0" anchor="ctr"/>
+            <a:lstStyle/>
+            <a:p>
+              <a:pPr algn="ctr"/>
+              <a:endParaRPr lang="en-US"/>
+            </a:p>
+          </p:txBody>
+        </p:sp>
+      </p:grpSp>
+      <p:sp>
+        <p:nvSpPr>
+          <p:cNvPr id="80" name="Freeform 79">
+            <a:extLst>
+              <a:ext uri="{FF2B5EF4-FFF2-40B4-BE49-F238E27FC236}">
+                <a16:creationId xmlns:a16="http://schemas.microsoft.com/office/drawing/2014/main" id="{FF152215-DC76-B383-ADEA-836300AC1075}"/>
+              </a:ext>
+            </a:extLst>
+          </p:cNvPr>
+          <p:cNvSpPr/>
+          <p:nvPr/>
+        </p:nvSpPr>
+        <p:spPr>
+          <a:xfrm>
+            <a:off x="3315859" y="1021264"/>
+            <a:ext cx="183322" cy="68165"/>
+          </a:xfrm>
+          <a:custGeom>
+            <a:avLst/>
+            <a:gdLst>
+              <a:gd name="csX0" fmla="*/ 0 w 198922"/>
+              <a:gd name="csY0" fmla="*/ 75003 h 75003"/>
+              <a:gd name="csX1" fmla="*/ 83419 w 198922"/>
+              <a:gd name="csY1" fmla="*/ 7626 h 75003"/>
+              <a:gd name="csX2" fmla="*/ 198922 w 198922"/>
+              <a:gd name="csY2" fmla="*/ 4418 h 75003"/>
+            </a:gdLst>
+            <a:ahLst/>
+            <a:cxnLst>
+              <a:cxn ang="0">
+                <a:pos x="csX0" y="csY0"/>
+              </a:cxn>
+              <a:cxn ang="0">
+                <a:pos x="csX1" y="csY1"/>
+              </a:cxn>
+              <a:cxn ang="0">
+                <a:pos x="csX2" y="csY2"/>
+              </a:cxn>
+            </a:cxnLst>
+            <a:rect l="l" t="t" r="r" b="b"/>
+            <a:pathLst>
+              <a:path w="198922" h="75003">
+                <a:moveTo>
+                  <a:pt x="0" y="75003"/>
+                </a:moveTo>
+                <a:cubicBezTo>
+                  <a:pt x="25132" y="47196"/>
+                  <a:pt x="50265" y="19390"/>
+                  <a:pt x="83419" y="7626"/>
+                </a:cubicBezTo>
+                <a:cubicBezTo>
+                  <a:pt x="116573" y="-4138"/>
+                  <a:pt x="157747" y="140"/>
+                  <a:pt x="198922" y="4418"/>
+                </a:cubicBezTo>
+              </a:path>
+            </a:pathLst>
+          </a:custGeom>
+          <a:noFill/>
+          <a:ln w="12700">
+            <a:solidFill>
+              <a:schemeClr val="tx1">
+                <a:lumMod val="65000"/>
+                <a:lumOff val="35000"/>
+              </a:schemeClr>
+            </a:solidFill>
+            <a:tailEnd type="stealth" w="sm" len="med"/>
+          </a:ln>
+        </p:spPr>
+        <p:style>
+          <a:lnRef idx="2">
+            <a:schemeClr val="accent1">
+              <a:shade val="15000"/>
+            </a:schemeClr>
+          </a:lnRef>
+          <a:fillRef idx="1">
+            <a:schemeClr val="accent1"/>
+          </a:fillRef>
+          <a:effectRef idx="0">
+            <a:schemeClr val="accent1"/>
+          </a:effectRef>
+          <a:fontRef idx="minor">
+            <a:schemeClr val="lt1"/>
+          </a:fontRef>
+        </p:style>
+        <p:txBody>
+          <a:bodyPr rtlCol="0" anchor="ctr"/>
+          <a:lstStyle/>
+          <a:p>
+            <a:pPr algn="ctr"/>
+            <a:endParaRPr lang="en-US"/>
+          </a:p>
+        </p:txBody>
+      </p:sp>
+      <p:sp>
+        <p:nvSpPr>
+          <p:cNvPr id="81" name="Freeform 80">
+            <a:extLst>
+              <a:ext uri="{FF2B5EF4-FFF2-40B4-BE49-F238E27FC236}">
+                <a16:creationId xmlns:a16="http://schemas.microsoft.com/office/drawing/2014/main" id="{4856E788-E004-340C-5CF9-9A0FA6713A61}"/>
+              </a:ext>
+            </a:extLst>
+          </p:cNvPr>
+          <p:cNvSpPr/>
+          <p:nvPr/>
+        </p:nvSpPr>
+        <p:spPr>
+          <a:xfrm flipV="1">
+            <a:off x="3314011" y="1179087"/>
+            <a:ext cx="185170" cy="56974"/>
+          </a:xfrm>
+          <a:custGeom>
+            <a:avLst/>
+            <a:gdLst>
+              <a:gd name="csX0" fmla="*/ 0 w 198922"/>
+              <a:gd name="csY0" fmla="*/ 75003 h 75003"/>
+              <a:gd name="csX1" fmla="*/ 83419 w 198922"/>
+              <a:gd name="csY1" fmla="*/ 7626 h 75003"/>
+              <a:gd name="csX2" fmla="*/ 198922 w 198922"/>
+              <a:gd name="csY2" fmla="*/ 4418 h 75003"/>
+            </a:gdLst>
+            <a:ahLst/>
+            <a:cxnLst>
+              <a:cxn ang="0">
+                <a:pos x="csX0" y="csY0"/>
+              </a:cxn>
+              <a:cxn ang="0">
+                <a:pos x="csX1" y="csY1"/>
+              </a:cxn>
+              <a:cxn ang="0">
+                <a:pos x="csX2" y="csY2"/>
+              </a:cxn>
+            </a:cxnLst>
+            <a:rect l="l" t="t" r="r" b="b"/>
+            <a:pathLst>
+              <a:path w="198922" h="75003">
+                <a:moveTo>
+                  <a:pt x="0" y="75003"/>
+                </a:moveTo>
+                <a:cubicBezTo>
+                  <a:pt x="25132" y="47196"/>
+                  <a:pt x="50265" y="19390"/>
+                  <a:pt x="83419" y="7626"/>
+                </a:cubicBezTo>
+                <a:cubicBezTo>
+                  <a:pt x="116573" y="-4138"/>
+                  <a:pt x="157747" y="140"/>
+                  <a:pt x="198922" y="4418"/>
+                </a:cubicBezTo>
+              </a:path>
+            </a:pathLst>
+          </a:custGeom>
+          <a:noFill/>
+          <a:ln w="12700">
+            <a:solidFill>
+              <a:schemeClr val="tx1">
+                <a:lumMod val="65000"/>
+                <a:lumOff val="35000"/>
+              </a:schemeClr>
+            </a:solidFill>
+            <a:tailEnd type="stealth" w="sm" len="med"/>
+          </a:ln>
+        </p:spPr>
+        <p:style>
+          <a:lnRef idx="2">
+            <a:schemeClr val="accent1">
+              <a:shade val="15000"/>
+            </a:schemeClr>
+          </a:lnRef>
+          <a:fillRef idx="1">
+            <a:schemeClr val="accent1"/>
+          </a:fillRef>
+          <a:effectRef idx="0">
+            <a:schemeClr val="accent1"/>
+          </a:effectRef>
+          <a:fontRef idx="minor">
+            <a:schemeClr val="lt1"/>
+          </a:fontRef>
+        </p:style>
+        <p:txBody>
+          <a:bodyPr rtlCol="0" anchor="ctr"/>
+          <a:lstStyle/>
+          <a:p>
+            <a:pPr algn="ctr"/>
+            <a:endParaRPr lang="en-US"/>
+          </a:p>
+        </p:txBody>
+      </p:sp>
+      <p:grpSp>
+        <p:nvGrpSpPr>
+          <p:cNvPr id="101" name="Group 100">
+            <a:extLst>
+              <a:ext uri="{FF2B5EF4-FFF2-40B4-BE49-F238E27FC236}">
+                <a16:creationId xmlns:a16="http://schemas.microsoft.com/office/drawing/2014/main" id="{B415D5A0-74BF-69B2-B6A9-A71D3FE2EFC6}"/>
+              </a:ext>
+            </a:extLst>
+          </p:cNvPr>
+          <p:cNvGrpSpPr/>
+          <p:nvPr/>
+        </p:nvGrpSpPr>
+        <p:grpSpPr>
+          <a:xfrm>
+            <a:off x="3169660" y="1072476"/>
+            <a:ext cx="149763" cy="88587"/>
+            <a:chOff x="5022545" y="3695255"/>
+            <a:chExt cx="198639" cy="117498"/>
+          </a:xfrm>
+        </p:grpSpPr>
+        <p:sp>
+          <p:nvSpPr>
+            <p:cNvPr id="113" name="Rounded Rectangle 112">
+              <a:extLst>
+                <a:ext uri="{FF2B5EF4-FFF2-40B4-BE49-F238E27FC236}">
+                  <a16:creationId xmlns:a16="http://schemas.microsoft.com/office/drawing/2014/main" id="{2DBA09F3-5186-0CA9-E876-0E579D44F1E4}"/>
+                </a:ext>
+              </a:extLst>
+            </p:cNvPr>
+            <p:cNvSpPr/>
+            <p:nvPr/>
+          </p:nvSpPr>
+          <p:spPr>
+            <a:xfrm rot="1773357">
+              <a:off x="5022545" y="3695255"/>
+              <a:ext cx="198639" cy="117498"/>
+            </a:xfrm>
+            <a:prstGeom prst="roundRect">
+              <a:avLst>
+                <a:gd name="adj" fmla="val 47948"/>
+              </a:avLst>
+            </a:prstGeom>
+            <a:solidFill>
+              <a:schemeClr val="bg1"/>
+            </a:solidFill>
+            <a:ln w="12700">
+              <a:solidFill>
+                <a:schemeClr val="tx1">
+                  <a:lumMod val="65000"/>
+                  <a:lumOff val="35000"/>
+                </a:schemeClr>
+              </a:solidFill>
+            </a:ln>
+          </p:spPr>
+          <p:style>
+            <a:lnRef idx="2">
+              <a:schemeClr val="accent1">
+                <a:shade val="15000"/>
+              </a:schemeClr>
+            </a:lnRef>
+            <a:fillRef idx="1">
+              <a:schemeClr val="accent1"/>
+            </a:fillRef>
+            <a:effectRef idx="0">
+              <a:schemeClr val="accent1"/>
+            </a:effectRef>
+            <a:fontRef idx="minor">
+              <a:schemeClr val="lt1"/>
+            </a:fontRef>
+          </p:style>
+          <p:txBody>
+            <a:bodyPr rtlCol="0" anchor="ctr"/>
+            <a:lstStyle/>
+            <a:p>
+              <a:pPr algn="ctr"/>
+              <a:endParaRPr lang="en-US" dirty="0"/>
+            </a:p>
+          </p:txBody>
+        </p:sp>
+        <p:sp>
+          <p:nvSpPr>
+            <p:cNvPr id="114" name="Oval 113">
+              <a:extLst>
+                <a:ext uri="{FF2B5EF4-FFF2-40B4-BE49-F238E27FC236}">
+                  <a16:creationId xmlns:a16="http://schemas.microsoft.com/office/drawing/2014/main" id="{A35B91A9-E371-15BE-72ED-E2A47F213ACE}"/>
+                </a:ext>
+              </a:extLst>
+            </p:cNvPr>
+            <p:cNvSpPr/>
+            <p:nvPr/>
+          </p:nvSpPr>
+          <p:spPr>
+            <a:xfrm rot="1773357">
+              <a:off x="5125505" y="3739164"/>
+              <a:ext cx="67339" cy="67339"/>
+            </a:xfrm>
+            <a:prstGeom prst="ellipse">
+              <a:avLst/>
+            </a:prstGeom>
+            <a:noFill/>
+            <a:ln w="12700">
+              <a:solidFill>
+                <a:schemeClr val="tx1">
+                  <a:lumMod val="75000"/>
+                  <a:lumOff val="25000"/>
+                </a:schemeClr>
+              </a:solidFill>
+            </a:ln>
+          </p:spPr>
+          <p:style>
+            <a:lnRef idx="2">
+              <a:schemeClr val="accent1">
+                <a:shade val="15000"/>
+              </a:schemeClr>
+            </a:lnRef>
+            <a:fillRef idx="1">
+              <a:schemeClr val="accent1"/>
+            </a:fillRef>
+            <a:effectRef idx="0">
+              <a:schemeClr val="accent1"/>
+            </a:effectRef>
+            <a:fontRef idx="minor">
+              <a:schemeClr val="lt1"/>
+            </a:fontRef>
+          </p:style>
+          <p:txBody>
+            <a:bodyPr rtlCol="0" anchor="ctr"/>
+            <a:lstStyle/>
+            <a:p>
+              <a:pPr algn="ctr"/>
+              <a:endParaRPr lang="en-US"/>
+            </a:p>
+          </p:txBody>
+        </p:sp>
+      </p:grpSp>
+      <p:grpSp>
+        <p:nvGrpSpPr>
+          <p:cNvPr id="116" name="Group 115">
+            <a:extLst>
+              <a:ext uri="{FF2B5EF4-FFF2-40B4-BE49-F238E27FC236}">
+                <a16:creationId xmlns:a16="http://schemas.microsoft.com/office/drawing/2014/main" id="{F8E98195-2DBD-4A4E-4DB8-10B96F6A769C}"/>
+              </a:ext>
+            </a:extLst>
+          </p:cNvPr>
+          <p:cNvGrpSpPr/>
+          <p:nvPr/>
+        </p:nvGrpSpPr>
+        <p:grpSpPr>
+          <a:xfrm>
+            <a:off x="3164796" y="1875320"/>
+            <a:ext cx="149764" cy="88587"/>
+            <a:chOff x="5022545" y="3695255"/>
+            <a:chExt cx="198639" cy="117498"/>
+          </a:xfrm>
+        </p:grpSpPr>
+        <p:sp>
+          <p:nvSpPr>
+            <p:cNvPr id="129" name="Rounded Rectangle 128">
+              <a:extLst>
+                <a:ext uri="{FF2B5EF4-FFF2-40B4-BE49-F238E27FC236}">
+                  <a16:creationId xmlns:a16="http://schemas.microsoft.com/office/drawing/2014/main" id="{DC443351-C269-B522-2E68-6A358B24F8D5}"/>
+                </a:ext>
+              </a:extLst>
+            </p:cNvPr>
+            <p:cNvSpPr/>
+            <p:nvPr/>
+          </p:nvSpPr>
+          <p:spPr>
+            <a:xfrm rot="1773357">
+              <a:off x="5022545" y="3695255"/>
+              <a:ext cx="198639" cy="117498"/>
+            </a:xfrm>
+            <a:prstGeom prst="roundRect">
+              <a:avLst>
+                <a:gd name="adj" fmla="val 47948"/>
+              </a:avLst>
+            </a:prstGeom>
+            <a:solidFill>
+              <a:schemeClr val="bg1"/>
+            </a:solidFill>
+            <a:ln w="12700">
+              <a:solidFill>
+                <a:schemeClr val="tx1">
+                  <a:lumMod val="65000"/>
+                  <a:lumOff val="35000"/>
+                </a:schemeClr>
+              </a:solidFill>
+            </a:ln>
+          </p:spPr>
+          <p:style>
+            <a:lnRef idx="2">
+              <a:schemeClr val="accent1">
+                <a:shade val="15000"/>
+              </a:schemeClr>
+            </a:lnRef>
+            <a:fillRef idx="1">
+              <a:schemeClr val="accent1"/>
+            </a:fillRef>
+            <a:effectRef idx="0">
+              <a:schemeClr val="accent1"/>
+            </a:effectRef>
+            <a:fontRef idx="minor">
+              <a:schemeClr val="lt1"/>
+            </a:fontRef>
+          </p:style>
+          <p:txBody>
+            <a:bodyPr rtlCol="0" anchor="ctr"/>
+            <a:lstStyle/>
+            <a:p>
+              <a:pPr algn="ctr"/>
+              <a:endParaRPr lang="en-US" dirty="0"/>
+            </a:p>
+          </p:txBody>
+        </p:sp>
+        <p:sp>
+          <p:nvSpPr>
+            <p:cNvPr id="130" name="Oval 129">
+              <a:extLst>
+                <a:ext uri="{FF2B5EF4-FFF2-40B4-BE49-F238E27FC236}">
+                  <a16:creationId xmlns:a16="http://schemas.microsoft.com/office/drawing/2014/main" id="{B28522DC-1FB4-27B0-1FA5-68DFBBBB959D}"/>
+                </a:ext>
+              </a:extLst>
+            </p:cNvPr>
+            <p:cNvSpPr/>
+            <p:nvPr/>
+          </p:nvSpPr>
+          <p:spPr>
+            <a:xfrm rot="1773357">
+              <a:off x="5125505" y="3739164"/>
+              <a:ext cx="67339" cy="67339"/>
+            </a:xfrm>
+            <a:prstGeom prst="ellipse">
+              <a:avLst/>
+            </a:prstGeom>
+            <a:noFill/>
+            <a:ln w="12700">
+              <a:solidFill>
+                <a:srgbClr val="FF8200"/>
+              </a:solidFill>
+            </a:ln>
+          </p:spPr>
+          <p:style>
+            <a:lnRef idx="2">
+              <a:schemeClr val="accent1">
+                <a:shade val="15000"/>
+              </a:schemeClr>
+            </a:lnRef>
+            <a:fillRef idx="1">
+              <a:schemeClr val="accent1"/>
+            </a:fillRef>
+            <a:effectRef idx="0">
+              <a:schemeClr val="accent1"/>
+            </a:effectRef>
+            <a:fontRef idx="minor">
+              <a:schemeClr val="lt1"/>
+            </a:fontRef>
+          </p:style>
+          <p:txBody>
+            <a:bodyPr rtlCol="0" anchor="ctr"/>
+            <a:lstStyle/>
+            <a:p>
+              <a:pPr algn="ctr"/>
+              <a:endParaRPr lang="en-US"/>
+            </a:p>
+          </p:txBody>
+        </p:sp>
+      </p:grpSp>
+      <p:grpSp>
+        <p:nvGrpSpPr>
+          <p:cNvPr id="43" name="Group 42">
+            <a:extLst>
+              <a:ext uri="{FF2B5EF4-FFF2-40B4-BE49-F238E27FC236}">
+                <a16:creationId xmlns:a16="http://schemas.microsoft.com/office/drawing/2014/main" id="{71A7804B-90DA-B24F-FCFB-5A05FE9E8C2C}"/>
+              </a:ext>
+            </a:extLst>
+          </p:cNvPr>
+          <p:cNvGrpSpPr/>
+          <p:nvPr/>
+        </p:nvGrpSpPr>
+        <p:grpSpPr>
+          <a:xfrm>
+            <a:off x="3070108" y="1996306"/>
+            <a:ext cx="339141" cy="221380"/>
+            <a:chOff x="2925158" y="1996306"/>
+            <a:chExt cx="339141" cy="221380"/>
+          </a:xfrm>
+        </p:grpSpPr>
+        <p:sp>
+          <p:nvSpPr>
+            <p:cNvPr id="6" name="Freeform 5">
+              <a:extLst>
+                <a:ext uri="{FF2B5EF4-FFF2-40B4-BE49-F238E27FC236}">
+                  <a16:creationId xmlns:a16="http://schemas.microsoft.com/office/drawing/2014/main" id="{E718976D-4E48-7E47-EBD4-779069A86778}"/>
+                </a:ext>
+              </a:extLst>
+            </p:cNvPr>
+            <p:cNvSpPr/>
+            <p:nvPr/>
+          </p:nvSpPr>
+          <p:spPr>
+            <a:xfrm>
+              <a:off x="2925158" y="1996306"/>
+              <a:ext cx="166938" cy="221380"/>
+            </a:xfrm>
+            <a:custGeom>
+              <a:avLst/>
+              <a:gdLst>
+                <a:gd name="csX0" fmla="*/ 298450 w 298567"/>
+                <a:gd name="csY0" fmla="*/ 0 h 231775"/>
+                <a:gd name="csX1" fmla="*/ 257175 w 298567"/>
+                <a:gd name="csY1" fmla="*/ 111125 h 231775"/>
+                <a:gd name="csX2" fmla="*/ 44450 w 298567"/>
+                <a:gd name="csY2" fmla="*/ 155575 h 231775"/>
+                <a:gd name="csX3" fmla="*/ 0 w 298567"/>
+                <a:gd name="csY3" fmla="*/ 231775 h 231775"/>
+              </a:gdLst>
+              <a:ahLst/>
+              <a:cxnLst>
+                <a:cxn ang="0">
+                  <a:pos x="csX0" y="csY0"/>
+                </a:cxn>
+                <a:cxn ang="0">
+                  <a:pos x="csX1" y="csY1"/>
+                </a:cxn>
+                <a:cxn ang="0">
+                  <a:pos x="csX2" y="csY2"/>
+                </a:cxn>
+                <a:cxn ang="0">
+                  <a:pos x="csX3" y="csY3"/>
+                </a:cxn>
+              </a:cxnLst>
+              <a:rect l="l" t="t" r="r" b="b"/>
+              <a:pathLst>
+                <a:path w="298567" h="231775">
+                  <a:moveTo>
+                    <a:pt x="298450" y="0"/>
+                  </a:moveTo>
+                  <a:cubicBezTo>
+                    <a:pt x="298979" y="42598"/>
+                    <a:pt x="299508" y="85196"/>
+                    <a:pt x="257175" y="111125"/>
+                  </a:cubicBezTo>
+                  <a:cubicBezTo>
+                    <a:pt x="214842" y="137054"/>
+                    <a:pt x="87312" y="135467"/>
+                    <a:pt x="44450" y="155575"/>
+                  </a:cubicBezTo>
+                  <a:cubicBezTo>
+                    <a:pt x="1588" y="175683"/>
+                    <a:pt x="794" y="203729"/>
+                    <a:pt x="0" y="231775"/>
+                  </a:cubicBezTo>
+                </a:path>
+              </a:pathLst>
+            </a:custGeom>
+            <a:noFill/>
+            <a:ln w="12700">
+              <a:solidFill>
+                <a:schemeClr val="tx1">
+                  <a:lumMod val="65000"/>
+                  <a:lumOff val="35000"/>
+                </a:schemeClr>
+              </a:solidFill>
+              <a:tailEnd type="triangle" w="sm" len="sm"/>
+            </a:ln>
+          </p:spPr>
+          <p:style>
+            <a:lnRef idx="2">
+              <a:schemeClr val="accent1">
+                <a:shade val="15000"/>
+              </a:schemeClr>
+            </a:lnRef>
+            <a:fillRef idx="1">
+              <a:schemeClr val="accent1"/>
+            </a:fillRef>
+            <a:effectRef idx="0">
+              <a:schemeClr val="accent1"/>
+            </a:effectRef>
+            <a:fontRef idx="minor">
+              <a:schemeClr val="lt1"/>
+            </a:fontRef>
+          </p:style>
+          <p:txBody>
+            <a:bodyPr rtlCol="0" anchor="ctr"/>
+            <a:lstStyle/>
+            <a:p>
+              <a:pPr algn="ctr"/>
+              <a:endParaRPr lang="en-US"/>
+            </a:p>
+          </p:txBody>
+        </p:sp>
+        <p:sp>
+          <p:nvSpPr>
+            <p:cNvPr id="7" name="Freeform 6">
+              <a:extLst>
+                <a:ext uri="{FF2B5EF4-FFF2-40B4-BE49-F238E27FC236}">
+                  <a16:creationId xmlns:a16="http://schemas.microsoft.com/office/drawing/2014/main" id="{AE44C577-48CE-CCD9-7413-C1F210B87220}"/>
+                </a:ext>
+              </a:extLst>
+            </p:cNvPr>
+            <p:cNvSpPr/>
+            <p:nvPr/>
+          </p:nvSpPr>
+          <p:spPr>
+            <a:xfrm flipH="1">
+              <a:off x="3097361" y="1996306"/>
+              <a:ext cx="166938" cy="221380"/>
+            </a:xfrm>
+            <a:custGeom>
+              <a:avLst/>
+              <a:gdLst>
+                <a:gd name="csX0" fmla="*/ 298450 w 298567"/>
+                <a:gd name="csY0" fmla="*/ 0 h 231775"/>
+                <a:gd name="csX1" fmla="*/ 257175 w 298567"/>
+                <a:gd name="csY1" fmla="*/ 111125 h 231775"/>
+                <a:gd name="csX2" fmla="*/ 44450 w 298567"/>
+                <a:gd name="csY2" fmla="*/ 155575 h 231775"/>
+                <a:gd name="csX3" fmla="*/ 0 w 298567"/>
+                <a:gd name="csY3" fmla="*/ 231775 h 231775"/>
+              </a:gdLst>
+              <a:ahLst/>
+              <a:cxnLst>
+                <a:cxn ang="0">
+                  <a:pos x="csX0" y="csY0"/>
+                </a:cxn>
+                <a:cxn ang="0">
+                  <a:pos x="csX1" y="csY1"/>
+                </a:cxn>
+                <a:cxn ang="0">
+                  <a:pos x="csX2" y="csY2"/>
+                </a:cxn>
+                <a:cxn ang="0">
+                  <a:pos x="csX3" y="csY3"/>
+                </a:cxn>
+              </a:cxnLst>
+              <a:rect l="l" t="t" r="r" b="b"/>
+              <a:pathLst>
+                <a:path w="298567" h="231775">
+                  <a:moveTo>
+                    <a:pt x="298450" y="0"/>
+                  </a:moveTo>
+                  <a:cubicBezTo>
+                    <a:pt x="298979" y="42598"/>
+                    <a:pt x="299508" y="85196"/>
+                    <a:pt x="257175" y="111125"/>
+                  </a:cubicBezTo>
+                  <a:cubicBezTo>
+                    <a:pt x="214842" y="137054"/>
+                    <a:pt x="87312" y="135467"/>
+                    <a:pt x="44450" y="155575"/>
+                  </a:cubicBezTo>
+                  <a:cubicBezTo>
+                    <a:pt x="1588" y="175683"/>
+                    <a:pt x="794" y="203729"/>
+                    <a:pt x="0" y="231775"/>
+                  </a:cubicBezTo>
+                </a:path>
+              </a:pathLst>
+            </a:custGeom>
+            <a:noFill/>
+            <a:ln w="12700">
+              <a:solidFill>
+                <a:schemeClr val="tx1">
+                  <a:lumMod val="65000"/>
+                  <a:lumOff val="35000"/>
+                </a:schemeClr>
+              </a:solidFill>
+              <a:tailEnd type="triangle" w="sm" len="sm"/>
+            </a:ln>
+          </p:spPr>
+          <p:style>
+            <a:lnRef idx="2">
+              <a:schemeClr val="accent1">
+                <a:shade val="15000"/>
+              </a:schemeClr>
+            </a:lnRef>
+            <a:fillRef idx="1">
+              <a:schemeClr val="accent1"/>
+            </a:fillRef>
+            <a:effectRef idx="0">
+              <a:schemeClr val="accent1"/>
+            </a:effectRef>
+            <a:fontRef idx="minor">
+              <a:schemeClr val="lt1"/>
+            </a:fontRef>
+          </p:style>
+          <p:txBody>
+            <a:bodyPr rtlCol="0" anchor="ctr"/>
+            <a:lstStyle/>
+            <a:p>
+              <a:pPr algn="ctr"/>
+              <a:endParaRPr lang="en-US"/>
+            </a:p>
+          </p:txBody>
+        </p:sp>
+      </p:grpSp>
+      <p:grpSp>
+        <p:nvGrpSpPr>
+          <p:cNvPr id="16" name="Group 15">
+            <a:extLst>
+              <a:ext uri="{FF2B5EF4-FFF2-40B4-BE49-F238E27FC236}">
+                <a16:creationId xmlns:a16="http://schemas.microsoft.com/office/drawing/2014/main" id="{78D2BBA2-A18B-2D23-7FA4-549CC3AC8FFE}"/>
+              </a:ext>
+            </a:extLst>
+          </p:cNvPr>
+          <p:cNvGrpSpPr/>
+          <p:nvPr/>
+        </p:nvGrpSpPr>
+        <p:grpSpPr>
+          <a:xfrm>
+            <a:off x="3337780" y="2258200"/>
+            <a:ext cx="149764" cy="88587"/>
+            <a:chOff x="5022545" y="3695255"/>
+            <a:chExt cx="198639" cy="117498"/>
+          </a:xfrm>
+        </p:grpSpPr>
+        <p:sp>
+          <p:nvSpPr>
+            <p:cNvPr id="17" name="Rounded Rectangle 16">
+              <a:extLst>
+                <a:ext uri="{FF2B5EF4-FFF2-40B4-BE49-F238E27FC236}">
+                  <a16:creationId xmlns:a16="http://schemas.microsoft.com/office/drawing/2014/main" id="{09E10C85-17CC-5324-85BD-1147FB266276}"/>
+                </a:ext>
+              </a:extLst>
+            </p:cNvPr>
+            <p:cNvSpPr/>
+            <p:nvPr/>
+          </p:nvSpPr>
+          <p:spPr>
+            <a:xfrm rot="1773357">
+              <a:off x="5022545" y="3695255"/>
+              <a:ext cx="198639" cy="117498"/>
+            </a:xfrm>
+            <a:prstGeom prst="roundRect">
+              <a:avLst>
+                <a:gd name="adj" fmla="val 47948"/>
+              </a:avLst>
+            </a:prstGeom>
+            <a:solidFill>
+              <a:schemeClr val="bg1"/>
+            </a:solidFill>
+            <a:ln w="12700">
+              <a:solidFill>
+                <a:schemeClr val="tx1">
+                  <a:lumMod val="65000"/>
+                  <a:lumOff val="35000"/>
+                </a:schemeClr>
+              </a:solidFill>
+            </a:ln>
+          </p:spPr>
+          <p:style>
+            <a:lnRef idx="2">
+              <a:schemeClr val="accent1">
+                <a:shade val="15000"/>
+              </a:schemeClr>
+            </a:lnRef>
+            <a:fillRef idx="1">
+              <a:schemeClr val="accent1"/>
+            </a:fillRef>
+            <a:effectRef idx="0">
+              <a:schemeClr val="accent1"/>
+            </a:effectRef>
+            <a:fontRef idx="minor">
+              <a:schemeClr val="lt1"/>
+            </a:fontRef>
+          </p:style>
+          <p:txBody>
+            <a:bodyPr rtlCol="0" anchor="ctr"/>
+            <a:lstStyle/>
+            <a:p>
+              <a:pPr algn="ctr"/>
+              <a:endParaRPr lang="en-US" dirty="0"/>
+            </a:p>
+          </p:txBody>
+        </p:sp>
+        <p:sp>
+          <p:nvSpPr>
+            <p:cNvPr id="18" name="Oval 17">
+              <a:extLst>
+                <a:ext uri="{FF2B5EF4-FFF2-40B4-BE49-F238E27FC236}">
+                  <a16:creationId xmlns:a16="http://schemas.microsoft.com/office/drawing/2014/main" id="{8C0B4F57-7274-312A-AB47-AA9502612AB4}"/>
+                </a:ext>
+              </a:extLst>
+            </p:cNvPr>
+            <p:cNvSpPr/>
+            <p:nvPr/>
+          </p:nvSpPr>
+          <p:spPr>
+            <a:xfrm rot="1773357">
+              <a:off x="5125505" y="3739164"/>
+              <a:ext cx="67339" cy="67339"/>
+            </a:xfrm>
+            <a:prstGeom prst="ellipse">
+              <a:avLst/>
+            </a:prstGeom>
+            <a:noFill/>
+            <a:ln w="12700">
+              <a:solidFill>
+                <a:srgbClr val="FF8200"/>
+              </a:solidFill>
+            </a:ln>
+          </p:spPr>
+          <p:style>
+            <a:lnRef idx="2">
+              <a:schemeClr val="accent1">
+                <a:shade val="15000"/>
+              </a:schemeClr>
+            </a:lnRef>
+            <a:fillRef idx="1">
+              <a:schemeClr val="accent1"/>
+            </a:fillRef>
+            <a:effectRef idx="0">
+              <a:schemeClr val="accent1"/>
+            </a:effectRef>
+            <a:fontRef idx="minor">
+              <a:schemeClr val="lt1"/>
+            </a:fontRef>
+          </p:style>
+          <p:txBody>
+            <a:bodyPr rtlCol="0" anchor="ctr"/>
+            <a:lstStyle/>
+            <a:p>
+              <a:pPr algn="ctr"/>
+              <a:endParaRPr lang="en-US"/>
+            </a:p>
+          </p:txBody>
+        </p:sp>
+      </p:grpSp>
+      <p:grpSp>
+        <p:nvGrpSpPr>
+          <p:cNvPr id="37" name="Group 36">
+            <a:extLst>
+              <a:ext uri="{FF2B5EF4-FFF2-40B4-BE49-F238E27FC236}">
+                <a16:creationId xmlns:a16="http://schemas.microsoft.com/office/drawing/2014/main" id="{9C6D2299-C75B-0F29-7667-850E15097443}"/>
+              </a:ext>
+            </a:extLst>
+          </p:cNvPr>
+          <p:cNvGrpSpPr/>
+          <p:nvPr/>
+        </p:nvGrpSpPr>
+        <p:grpSpPr>
+          <a:xfrm>
+            <a:off x="3044045" y="1188709"/>
+            <a:ext cx="400993" cy="221380"/>
+            <a:chOff x="2932345" y="1189822"/>
+            <a:chExt cx="400993" cy="221380"/>
+          </a:xfrm>
+        </p:grpSpPr>
+        <p:sp>
+          <p:nvSpPr>
+            <p:cNvPr id="40" name="Freeform 39">
+              <a:extLst>
+                <a:ext uri="{FF2B5EF4-FFF2-40B4-BE49-F238E27FC236}">
+                  <a16:creationId xmlns:a16="http://schemas.microsoft.com/office/drawing/2014/main" id="{6752EA1F-1661-E36B-6605-40CB7C932803}"/>
+                </a:ext>
+              </a:extLst>
+            </p:cNvPr>
+            <p:cNvSpPr/>
+            <p:nvPr/>
+          </p:nvSpPr>
+          <p:spPr>
+            <a:xfrm>
+              <a:off x="2932345" y="1189822"/>
+              <a:ext cx="214009" cy="221380"/>
+            </a:xfrm>
+            <a:custGeom>
+              <a:avLst/>
+              <a:gdLst>
+                <a:gd name="csX0" fmla="*/ 298450 w 298567"/>
+                <a:gd name="csY0" fmla="*/ 0 h 231775"/>
+                <a:gd name="csX1" fmla="*/ 257175 w 298567"/>
+                <a:gd name="csY1" fmla="*/ 111125 h 231775"/>
+                <a:gd name="csX2" fmla="*/ 44450 w 298567"/>
+                <a:gd name="csY2" fmla="*/ 155575 h 231775"/>
+                <a:gd name="csX3" fmla="*/ 0 w 298567"/>
+                <a:gd name="csY3" fmla="*/ 231775 h 231775"/>
+              </a:gdLst>
+              <a:ahLst/>
+              <a:cxnLst>
+                <a:cxn ang="0">
+                  <a:pos x="csX0" y="csY0"/>
+                </a:cxn>
+                <a:cxn ang="0">
+                  <a:pos x="csX1" y="csY1"/>
+                </a:cxn>
+                <a:cxn ang="0">
+                  <a:pos x="csX2" y="csY2"/>
+                </a:cxn>
+                <a:cxn ang="0">
+                  <a:pos x="csX3" y="csY3"/>
+                </a:cxn>
+              </a:cxnLst>
+              <a:rect l="l" t="t" r="r" b="b"/>
+              <a:pathLst>
+                <a:path w="298567" h="231775">
+                  <a:moveTo>
+                    <a:pt x="298450" y="0"/>
+                  </a:moveTo>
+                  <a:cubicBezTo>
+                    <a:pt x="298979" y="42598"/>
+                    <a:pt x="299508" y="85196"/>
+                    <a:pt x="257175" y="111125"/>
+                  </a:cubicBezTo>
+                  <a:cubicBezTo>
+                    <a:pt x="214842" y="137054"/>
+                    <a:pt x="87312" y="135467"/>
+                    <a:pt x="44450" y="155575"/>
+                  </a:cubicBezTo>
+                  <a:cubicBezTo>
+                    <a:pt x="1588" y="175683"/>
+                    <a:pt x="794" y="203729"/>
+                    <a:pt x="0" y="231775"/>
+                  </a:cubicBezTo>
+                </a:path>
+              </a:pathLst>
+            </a:custGeom>
+            <a:noFill/>
+            <a:ln w="12700">
+              <a:solidFill>
+                <a:schemeClr val="tx1">
+                  <a:lumMod val="65000"/>
+                  <a:lumOff val="35000"/>
+                </a:schemeClr>
+              </a:solidFill>
+              <a:tailEnd type="triangle" w="sm" len="sm"/>
+            </a:ln>
+          </p:spPr>
+          <p:style>
+            <a:lnRef idx="2">
+              <a:schemeClr val="accent1">
+                <a:shade val="15000"/>
+              </a:schemeClr>
+            </a:lnRef>
+            <a:fillRef idx="1">
+              <a:schemeClr val="accent1"/>
+            </a:fillRef>
+            <a:effectRef idx="0">
+              <a:schemeClr val="accent1"/>
+            </a:effectRef>
+            <a:fontRef idx="minor">
+              <a:schemeClr val="lt1"/>
+            </a:fontRef>
+          </p:style>
+          <p:txBody>
+            <a:bodyPr rtlCol="0" anchor="ctr"/>
+            <a:lstStyle/>
+            <a:p>
+              <a:pPr algn="ctr"/>
+              <a:endParaRPr lang="en-US" dirty="0"/>
+            </a:p>
+          </p:txBody>
+        </p:sp>
+        <p:sp>
+          <p:nvSpPr>
+            <p:cNvPr id="38" name="Freeform 37">
+              <a:extLst>
+                <a:ext uri="{FF2B5EF4-FFF2-40B4-BE49-F238E27FC236}">
+                  <a16:creationId xmlns:a16="http://schemas.microsoft.com/office/drawing/2014/main" id="{54E5BC90-2512-7F87-113D-3AEC67210036}"/>
+                </a:ext>
+              </a:extLst>
+            </p:cNvPr>
+            <p:cNvSpPr/>
+            <p:nvPr/>
+          </p:nvSpPr>
+          <p:spPr>
+            <a:xfrm flipH="1">
+              <a:off x="3153606" y="1189822"/>
+              <a:ext cx="179732" cy="221380"/>
+            </a:xfrm>
+            <a:custGeom>
+              <a:avLst/>
+              <a:gdLst>
+                <a:gd name="csX0" fmla="*/ 298450 w 298567"/>
+                <a:gd name="csY0" fmla="*/ 0 h 231775"/>
+                <a:gd name="csX1" fmla="*/ 257175 w 298567"/>
+                <a:gd name="csY1" fmla="*/ 111125 h 231775"/>
+                <a:gd name="csX2" fmla="*/ 44450 w 298567"/>
+                <a:gd name="csY2" fmla="*/ 155575 h 231775"/>
+                <a:gd name="csX3" fmla="*/ 0 w 298567"/>
+                <a:gd name="csY3" fmla="*/ 231775 h 231775"/>
+              </a:gdLst>
+              <a:ahLst/>
+              <a:cxnLst>
+                <a:cxn ang="0">
+                  <a:pos x="csX0" y="csY0"/>
+                </a:cxn>
+                <a:cxn ang="0">
+                  <a:pos x="csX1" y="csY1"/>
+                </a:cxn>
+                <a:cxn ang="0">
+                  <a:pos x="csX2" y="csY2"/>
+                </a:cxn>
+                <a:cxn ang="0">
+                  <a:pos x="csX3" y="csY3"/>
+                </a:cxn>
+              </a:cxnLst>
+              <a:rect l="l" t="t" r="r" b="b"/>
+              <a:pathLst>
+                <a:path w="298567" h="231775">
+                  <a:moveTo>
+                    <a:pt x="298450" y="0"/>
+                  </a:moveTo>
+                  <a:cubicBezTo>
+                    <a:pt x="298979" y="42598"/>
+                    <a:pt x="299508" y="85196"/>
+                    <a:pt x="257175" y="111125"/>
+                  </a:cubicBezTo>
+                  <a:cubicBezTo>
+                    <a:pt x="214842" y="137054"/>
+                    <a:pt x="87312" y="135467"/>
+                    <a:pt x="44450" y="155575"/>
+                  </a:cubicBezTo>
+                  <a:cubicBezTo>
+                    <a:pt x="1588" y="175683"/>
+                    <a:pt x="794" y="203729"/>
+                    <a:pt x="0" y="231775"/>
+                  </a:cubicBezTo>
+                </a:path>
+              </a:pathLst>
+            </a:custGeom>
+            <a:noFill/>
+            <a:ln w="12700">
+              <a:solidFill>
+                <a:schemeClr val="tx1">
+                  <a:lumMod val="65000"/>
+                  <a:lumOff val="35000"/>
+                </a:schemeClr>
+              </a:solidFill>
+              <a:tailEnd type="triangle" w="sm" len="sm"/>
+            </a:ln>
+          </p:spPr>
+          <p:style>
+            <a:lnRef idx="2">
+              <a:schemeClr val="accent1">
+                <a:shade val="15000"/>
+              </a:schemeClr>
+            </a:lnRef>
+            <a:fillRef idx="1">
+              <a:schemeClr val="accent1"/>
+            </a:fillRef>
+            <a:effectRef idx="0">
+              <a:schemeClr val="accent1"/>
+            </a:effectRef>
+            <a:fontRef idx="minor">
+              <a:schemeClr val="lt1"/>
+            </a:fontRef>
+          </p:style>
+          <p:txBody>
+            <a:bodyPr rtlCol="0" anchor="ctr"/>
+            <a:lstStyle/>
+            <a:p>
+              <a:pPr algn="ctr"/>
+              <a:endParaRPr lang="en-US"/>
+            </a:p>
+          </p:txBody>
+        </p:sp>
+        <p:sp>
+          <p:nvSpPr>
+            <p:cNvPr id="19" name="Freeform 18">
+              <a:extLst>
+                <a:ext uri="{FF2B5EF4-FFF2-40B4-BE49-F238E27FC236}">
+                  <a16:creationId xmlns:a16="http://schemas.microsoft.com/office/drawing/2014/main" id="{1D02AA16-02C0-C7F1-7C34-26D61CD7BA18}"/>
+                </a:ext>
+              </a:extLst>
+            </p:cNvPr>
+            <p:cNvSpPr/>
+            <p:nvPr/>
+          </p:nvSpPr>
+          <p:spPr>
+            <a:xfrm>
+              <a:off x="3101812" y="1189822"/>
+              <a:ext cx="45719" cy="221380"/>
+            </a:xfrm>
+            <a:custGeom>
+              <a:avLst/>
+              <a:gdLst>
+                <a:gd name="csX0" fmla="*/ 298450 w 298567"/>
+                <a:gd name="csY0" fmla="*/ 0 h 231775"/>
+                <a:gd name="csX1" fmla="*/ 257175 w 298567"/>
+                <a:gd name="csY1" fmla="*/ 111125 h 231775"/>
+                <a:gd name="csX2" fmla="*/ 44450 w 298567"/>
+                <a:gd name="csY2" fmla="*/ 155575 h 231775"/>
+                <a:gd name="csX3" fmla="*/ 0 w 298567"/>
+                <a:gd name="csY3" fmla="*/ 231775 h 231775"/>
+              </a:gdLst>
+              <a:ahLst/>
+              <a:cxnLst>
+                <a:cxn ang="0">
+                  <a:pos x="csX0" y="csY0"/>
+                </a:cxn>
+                <a:cxn ang="0">
+                  <a:pos x="csX1" y="csY1"/>
+                </a:cxn>
+                <a:cxn ang="0">
+                  <a:pos x="csX2" y="csY2"/>
+                </a:cxn>
+                <a:cxn ang="0">
+                  <a:pos x="csX3" y="csY3"/>
+                </a:cxn>
+              </a:cxnLst>
+              <a:rect l="l" t="t" r="r" b="b"/>
+              <a:pathLst>
+                <a:path w="298567" h="231775">
+                  <a:moveTo>
+                    <a:pt x="298450" y="0"/>
+                  </a:moveTo>
+                  <a:cubicBezTo>
+                    <a:pt x="298979" y="42598"/>
+                    <a:pt x="299508" y="85196"/>
+                    <a:pt x="257175" y="111125"/>
+                  </a:cubicBezTo>
+                  <a:cubicBezTo>
+                    <a:pt x="214842" y="137054"/>
+                    <a:pt x="87312" y="135467"/>
+                    <a:pt x="44450" y="155575"/>
+                  </a:cubicBezTo>
+                  <a:cubicBezTo>
+                    <a:pt x="1588" y="175683"/>
+                    <a:pt x="794" y="203729"/>
+                    <a:pt x="0" y="231775"/>
+                  </a:cubicBezTo>
+                </a:path>
+              </a:pathLst>
+            </a:custGeom>
+            <a:noFill/>
+            <a:ln w="12700">
+              <a:solidFill>
+                <a:schemeClr val="tx1">
+                  <a:lumMod val="65000"/>
+                  <a:lumOff val="35000"/>
+                </a:schemeClr>
+              </a:solidFill>
+              <a:tailEnd type="triangle" w="sm" len="sm"/>
+            </a:ln>
+          </p:spPr>
+          <p:style>
+            <a:lnRef idx="2">
+              <a:schemeClr val="accent1">
+                <a:shade val="15000"/>
+              </a:schemeClr>
+            </a:lnRef>
+            <a:fillRef idx="1">
+              <a:schemeClr val="accent1"/>
+            </a:fillRef>
+            <a:effectRef idx="0">
+              <a:schemeClr val="accent1"/>
+            </a:effectRef>
+            <a:fontRef idx="minor">
+              <a:schemeClr val="lt1"/>
+            </a:fontRef>
+          </p:style>
+          <p:txBody>
+            <a:bodyPr rtlCol="0" anchor="ctr"/>
+            <a:lstStyle/>
+            <a:p>
+              <a:pPr algn="ctr"/>
+              <a:endParaRPr lang="en-US"/>
+            </a:p>
+          </p:txBody>
+        </p:sp>
+      </p:grpSp>
+      <p:grpSp>
+        <p:nvGrpSpPr>
+          <p:cNvPr id="41" name="Group 40">
+            <a:extLst>
+              <a:ext uri="{FF2B5EF4-FFF2-40B4-BE49-F238E27FC236}">
+                <a16:creationId xmlns:a16="http://schemas.microsoft.com/office/drawing/2014/main" id="{690DDBF5-9F58-6944-5172-0ED4D211FAA9}"/>
+              </a:ext>
+            </a:extLst>
+          </p:cNvPr>
+          <p:cNvGrpSpPr/>
+          <p:nvPr/>
+        </p:nvGrpSpPr>
+        <p:grpSpPr>
+          <a:xfrm>
+            <a:off x="2966969" y="1449613"/>
+            <a:ext cx="555144" cy="88587"/>
+            <a:chOff x="2977110" y="1449613"/>
+            <a:chExt cx="555144" cy="88587"/>
+          </a:xfrm>
+        </p:grpSpPr>
         <p:grpSp>
           <p:nvGrpSpPr>
             <p:cNvPr id="104" name="Group 103">
@@ -5557,9 +7718,9 @@
           </p:nvGrpSpPr>
           <p:grpSpPr>
             <a:xfrm>
-              <a:off x="2968956" y="1441649"/>
+              <a:off x="2977110" y="1449613"/>
               <a:ext cx="149763" cy="88587"/>
-              <a:chOff x="5022545" y="3695255"/>
+              <a:chOff x="4867002" y="3700153"/>
               <a:chExt cx="198639" cy="117498"/>
             </a:xfrm>
           </p:grpSpPr>
@@ -5577,7 +7738,7 @@
             </p:nvSpPr>
             <p:spPr>
               <a:xfrm rot="1773357">
-                <a:off x="5022545" y="3695255"/>
+                <a:off x="4867002" y="3700153"/>
                 <a:ext cx="198639" cy="117498"/>
               </a:xfrm>
               <a:prstGeom prst="roundRect">
@@ -5636,7 +7797,7 @@
             </p:nvSpPr>
             <p:spPr>
               <a:xfrm rot="1773357">
-                <a:off x="5125505" y="3739164"/>
+                <a:off x="4969960" y="3744062"/>
                 <a:ext cx="67339" cy="67339"/>
               </a:xfrm>
               <a:prstGeom prst="ellipse">
@@ -5692,7 +7853,7 @@
           </p:nvGrpSpPr>
           <p:grpSpPr>
             <a:xfrm>
-              <a:off x="3257066" y="1441165"/>
+              <a:off x="3382491" y="1449613"/>
               <a:ext cx="149763" cy="88587"/>
               <a:chOff x="5022545" y="3695255"/>
               <a:chExt cx="198639" cy="117498"/>
@@ -5813,642 +7974,189 @@
             </p:txBody>
           </p:sp>
         </p:grpSp>
-        <p:cxnSp>
-          <p:nvCxnSpPr>
-            <p:cNvPr id="106" name="Straight Arrow Connector 105">
+        <p:grpSp>
+          <p:nvGrpSpPr>
+            <p:cNvPr id="39" name="Group 38">
               <a:extLst>
                 <a:ext uri="{FF2B5EF4-FFF2-40B4-BE49-F238E27FC236}">
-                  <a16:creationId xmlns:a16="http://schemas.microsoft.com/office/drawing/2014/main" id="{E1AD2EDF-E402-B02A-A01E-FD535AA11EDD}"/>
+                  <a16:creationId xmlns:a16="http://schemas.microsoft.com/office/drawing/2014/main" id="{780F8B49-7B33-93B0-1896-276EB5E9AA19}"/>
                 </a:ext>
               </a:extLst>
             </p:cNvPr>
-            <p:cNvCxnSpPr>
-              <a:cxnSpLocks/>
-            </p:cNvCxnSpPr>
+            <p:cNvGrpSpPr/>
             <p:nvPr/>
-          </p:nvCxnSpPr>
-          <p:spPr>
-            <a:xfrm flipV="1">
-              <a:off x="3244115" y="1049162"/>
-              <a:ext cx="194064" cy="59679"/>
+          </p:nvGrpSpPr>
+          <p:grpSpPr>
+            <a:xfrm>
+              <a:off x="3179800" y="1449613"/>
+              <a:ext cx="149763" cy="88587"/>
+              <a:chOff x="3054376" y="1446241"/>
+              <a:chExt cx="149763" cy="88587"/>
             </a:xfrm>
-            <a:prstGeom prst="straightConnector1">
-              <a:avLst/>
-            </a:prstGeom>
-            <a:ln w="12700">
+          </p:grpSpPr>
+          <p:sp>
+            <p:nvSpPr>
+              <p:cNvPr id="20" name="Rounded Rectangle 19">
+                <a:extLst>
+                  <a:ext uri="{FF2B5EF4-FFF2-40B4-BE49-F238E27FC236}">
+                    <a16:creationId xmlns:a16="http://schemas.microsoft.com/office/drawing/2014/main" id="{5CFC0F97-C92E-C4BB-51F9-368F627FBF04}"/>
+                  </a:ext>
+                </a:extLst>
+              </p:cNvPr>
+              <p:cNvSpPr/>
+              <p:nvPr/>
+            </p:nvSpPr>
+            <p:spPr>
+              <a:xfrm rot="1773357">
+                <a:off x="3054376" y="1446241"/>
+                <a:ext cx="149763" cy="88587"/>
+              </a:xfrm>
+              <a:prstGeom prst="roundRect">
+                <a:avLst>
+                  <a:gd name="adj" fmla="val 47948"/>
+                </a:avLst>
+              </a:prstGeom>
               <a:solidFill>
-                <a:schemeClr val="tx1">
-                  <a:lumMod val="65000"/>
-                  <a:lumOff val="35000"/>
+                <a:schemeClr val="bg1"/>
+              </a:solidFill>
+              <a:ln w="12700">
+                <a:solidFill>
+                  <a:schemeClr val="tx1">
+                    <a:lumMod val="65000"/>
+                    <a:lumOff val="35000"/>
+                  </a:schemeClr>
+                </a:solidFill>
+              </a:ln>
+            </p:spPr>
+            <p:style>
+              <a:lnRef idx="2">
+                <a:schemeClr val="accent1">
+                  <a:shade val="15000"/>
                 </a:schemeClr>
-              </a:solidFill>
-              <a:tailEnd type="triangle" w="sm" len="med"/>
-            </a:ln>
-          </p:spPr>
-          <p:style>
-            <a:lnRef idx="2">
-              <a:schemeClr val="accent1"/>
-            </a:lnRef>
-            <a:fillRef idx="0">
-              <a:schemeClr val="accent1"/>
-            </a:fillRef>
-            <a:effectRef idx="1">
-              <a:schemeClr val="accent1"/>
-            </a:effectRef>
-            <a:fontRef idx="minor">
-              <a:schemeClr val="tx1"/>
-            </a:fontRef>
-          </p:style>
-        </p:cxnSp>
-        <p:cxnSp>
-          <p:nvCxnSpPr>
-            <p:cNvPr id="107" name="Straight Arrow Connector 106">
-              <a:extLst>
-                <a:ext uri="{FF2B5EF4-FFF2-40B4-BE49-F238E27FC236}">
-                  <a16:creationId xmlns:a16="http://schemas.microsoft.com/office/drawing/2014/main" id="{1B49C48E-4018-CADE-9A28-DC92341B9F47}"/>
-                </a:ext>
-              </a:extLst>
-            </p:cNvPr>
-            <p:cNvCxnSpPr>
-              <a:cxnSpLocks/>
-            </p:cNvCxnSpPr>
-            <p:nvPr/>
-          </p:nvCxnSpPr>
-          <p:spPr>
-            <a:xfrm>
-              <a:off x="3252907" y="1140061"/>
-              <a:ext cx="168354" cy="90320"/>
-            </a:xfrm>
-            <a:prstGeom prst="straightConnector1">
-              <a:avLst/>
-            </a:prstGeom>
-            <a:ln w="12700">
-              <a:solidFill>
-                <a:schemeClr val="tx1">
-                  <a:lumMod val="65000"/>
-                  <a:lumOff val="35000"/>
+              </a:lnRef>
+              <a:fillRef idx="1">
+                <a:schemeClr val="accent1"/>
+              </a:fillRef>
+              <a:effectRef idx="0">
+                <a:schemeClr val="accent1"/>
+              </a:effectRef>
+              <a:fontRef idx="minor">
+                <a:schemeClr val="lt1"/>
+              </a:fontRef>
+            </p:style>
+            <p:txBody>
+              <a:bodyPr rtlCol="0" anchor="ctr"/>
+              <a:lstStyle/>
+              <a:p>
+                <a:pPr algn="ctr"/>
+                <a:endParaRPr lang="en-US" dirty="0"/>
+              </a:p>
+            </p:txBody>
+          </p:sp>
+          <p:sp>
+            <p:nvSpPr>
+              <p:cNvPr id="21" name="Oval 20">
+                <a:extLst>
+                  <a:ext uri="{FF2B5EF4-FFF2-40B4-BE49-F238E27FC236}">
+                    <a16:creationId xmlns:a16="http://schemas.microsoft.com/office/drawing/2014/main" id="{E4F80D82-1AB9-7BBC-FA0A-86AAB7041A07}"/>
+                  </a:ext>
+                </a:extLst>
+              </p:cNvPr>
+              <p:cNvSpPr/>
+              <p:nvPr/>
+            </p:nvSpPr>
+            <p:spPr>
+              <a:xfrm rot="1773357">
+                <a:off x="3131999" y="1479346"/>
+                <a:ext cx="50770" cy="50770"/>
+              </a:xfrm>
+              <a:prstGeom prst="ellipse">
+                <a:avLst/>
+              </a:prstGeom>
+              <a:noFill/>
+              <a:ln w="12700">
+                <a:solidFill>
+                  <a:schemeClr val="tx1">
+                    <a:lumMod val="75000"/>
+                    <a:lumOff val="25000"/>
+                  </a:schemeClr>
+                </a:solidFill>
+              </a:ln>
+            </p:spPr>
+            <p:style>
+              <a:lnRef idx="2">
+                <a:schemeClr val="accent1">
+                  <a:shade val="15000"/>
                 </a:schemeClr>
-              </a:solidFill>
-              <a:tailEnd type="triangle" w="sm" len="med"/>
-            </a:ln>
-          </p:spPr>
-          <p:style>
-            <a:lnRef idx="2">
-              <a:schemeClr val="accent1"/>
-            </a:lnRef>
-            <a:fillRef idx="0">
-              <a:schemeClr val="accent1"/>
-            </a:fillRef>
-            <a:effectRef idx="1">
-              <a:schemeClr val="accent1"/>
-            </a:effectRef>
-            <a:fontRef idx="minor">
-              <a:schemeClr val="tx1"/>
-            </a:fontRef>
-          </p:style>
-        </p:cxnSp>
-        <p:sp>
-          <p:nvSpPr>
-            <p:cNvPr id="108" name="Left Brace 107">
-              <a:extLst>
-                <a:ext uri="{FF2B5EF4-FFF2-40B4-BE49-F238E27FC236}">
-                  <a16:creationId xmlns:a16="http://schemas.microsoft.com/office/drawing/2014/main" id="{BDCC2E6A-28D9-AE9B-F1C2-3470E440A9A7}"/>
-                </a:ext>
-              </a:extLst>
-            </p:cNvPr>
-            <p:cNvSpPr/>
-            <p:nvPr/>
-          </p:nvSpPr>
-          <p:spPr>
-            <a:xfrm rot="5400000">
-              <a:off x="3091344" y="1190667"/>
-              <a:ext cx="193098" cy="245553"/>
-            </a:xfrm>
-            <a:prstGeom prst="leftBrace">
-              <a:avLst>
-                <a:gd name="adj1" fmla="val 8333"/>
-                <a:gd name="adj2" fmla="val 49999"/>
-              </a:avLst>
-            </a:prstGeom>
-            <a:ln w="12700">
-              <a:solidFill>
-                <a:schemeClr val="tx1">
-                  <a:lumMod val="65000"/>
-                  <a:lumOff val="35000"/>
-                </a:schemeClr>
-              </a:solidFill>
-              <a:headEnd type="triangle" w="sm" len="med"/>
-              <a:tailEnd type="triangle" w="sm" len="med"/>
-            </a:ln>
-          </p:spPr>
-          <p:style>
-            <a:lnRef idx="2">
-              <a:schemeClr val="accent1"/>
-            </a:lnRef>
-            <a:fillRef idx="0">
-              <a:schemeClr val="accent1"/>
-            </a:fillRef>
-            <a:effectRef idx="1">
-              <a:schemeClr val="accent1"/>
-            </a:effectRef>
-            <a:fontRef idx="minor">
-              <a:schemeClr val="tx1"/>
-            </a:fontRef>
-          </p:style>
-          <p:txBody>
-            <a:bodyPr rtlCol="0" anchor="ctr"/>
-            <a:lstStyle/>
-            <a:p>
-              <a:pPr algn="ctr"/>
-              <a:endParaRPr lang="en-US"/>
-            </a:p>
-          </p:txBody>
-        </p:sp>
-        <p:sp>
-          <p:nvSpPr>
-            <p:cNvPr id="3" name="Oval 2">
-              <a:extLst>
-                <a:ext uri="{FF2B5EF4-FFF2-40B4-BE49-F238E27FC236}">
-                  <a16:creationId xmlns:a16="http://schemas.microsoft.com/office/drawing/2014/main" id="{10CDDE6A-7714-F3A8-82C8-46048D04155B}"/>
-                </a:ext>
-              </a:extLst>
-            </p:cNvPr>
-            <p:cNvSpPr/>
-            <p:nvPr/>
-          </p:nvSpPr>
-          <p:spPr>
-            <a:xfrm rot="1773357">
-              <a:off x="3465618" y="1033723"/>
-              <a:ext cx="50770" cy="50770"/>
-            </a:xfrm>
-            <a:prstGeom prst="ellipse">
-              <a:avLst/>
-            </a:prstGeom>
-            <a:noFill/>
-            <a:ln w="12700">
-              <a:solidFill>
-                <a:schemeClr val="tx1">
-                  <a:lumMod val="75000"/>
-                  <a:lumOff val="25000"/>
-                </a:schemeClr>
-              </a:solidFill>
-            </a:ln>
-          </p:spPr>
-          <p:style>
-            <a:lnRef idx="2">
-              <a:schemeClr val="accent1">
-                <a:shade val="15000"/>
-              </a:schemeClr>
-            </a:lnRef>
-            <a:fillRef idx="1">
-              <a:schemeClr val="accent1"/>
-            </a:fillRef>
-            <a:effectRef idx="0">
-              <a:schemeClr val="accent1"/>
-            </a:effectRef>
-            <a:fontRef idx="minor">
-              <a:schemeClr val="lt1"/>
-            </a:fontRef>
-          </p:style>
-          <p:txBody>
-            <a:bodyPr rtlCol="0" anchor="ctr"/>
-            <a:lstStyle/>
-            <a:p>
-              <a:pPr algn="ctr"/>
-              <a:endParaRPr lang="en-US"/>
-            </a:p>
-          </p:txBody>
-        </p:sp>
-        <p:sp>
-          <p:nvSpPr>
-            <p:cNvPr id="4" name="Oval 3">
-              <a:extLst>
-                <a:ext uri="{FF2B5EF4-FFF2-40B4-BE49-F238E27FC236}">
-                  <a16:creationId xmlns:a16="http://schemas.microsoft.com/office/drawing/2014/main" id="{21366A09-64A1-7DCF-C141-E4BBFD27BDEF}"/>
-                </a:ext>
-              </a:extLst>
-            </p:cNvPr>
-            <p:cNvSpPr/>
-            <p:nvPr/>
-          </p:nvSpPr>
-          <p:spPr>
-            <a:xfrm rot="1773357">
-              <a:off x="3462129" y="1230442"/>
-              <a:ext cx="50770" cy="50770"/>
-            </a:xfrm>
-            <a:prstGeom prst="ellipse">
-              <a:avLst/>
-            </a:prstGeom>
-            <a:noFill/>
-            <a:ln w="12700">
-              <a:solidFill>
-                <a:schemeClr val="tx1">
-                  <a:lumMod val="75000"/>
-                  <a:lumOff val="25000"/>
-                </a:schemeClr>
-              </a:solidFill>
-            </a:ln>
-          </p:spPr>
-          <p:style>
-            <a:lnRef idx="2">
-              <a:schemeClr val="accent1">
-                <a:shade val="15000"/>
-              </a:schemeClr>
-            </a:lnRef>
-            <a:fillRef idx="1">
-              <a:schemeClr val="accent1"/>
-            </a:fillRef>
-            <a:effectRef idx="0">
-              <a:schemeClr val="accent1"/>
-            </a:effectRef>
-            <a:fontRef idx="minor">
-              <a:schemeClr val="lt1"/>
-            </a:fontRef>
-          </p:style>
-          <p:txBody>
-            <a:bodyPr rtlCol="0" anchor="ctr"/>
-            <a:lstStyle/>
-            <a:p>
-              <a:pPr algn="ctr"/>
-              <a:endParaRPr lang="en-US"/>
-            </a:p>
-          </p:txBody>
-        </p:sp>
+              </a:lnRef>
+              <a:fillRef idx="1">
+                <a:schemeClr val="accent1"/>
+              </a:fillRef>
+              <a:effectRef idx="0">
+                <a:schemeClr val="accent1"/>
+              </a:effectRef>
+              <a:fontRef idx="minor">
+                <a:schemeClr val="lt1"/>
+              </a:fontRef>
+            </p:style>
+            <p:txBody>
+              <a:bodyPr rtlCol="0" anchor="ctr"/>
+              <a:lstStyle/>
+              <a:p>
+                <a:pPr algn="ctr"/>
+                <a:endParaRPr lang="en-US"/>
+              </a:p>
+            </p:txBody>
+          </p:sp>
+        </p:grpSp>
       </p:grpSp>
-      <p:sp>
-        <p:nvSpPr>
-          <p:cNvPr id="8" name="Oval 7">
+      <p:cxnSp>
+        <p:nvCxnSpPr>
+          <p:cNvPr id="35" name="Straight Connector 34">
             <a:extLst>
               <a:ext uri="{FF2B5EF4-FFF2-40B4-BE49-F238E27FC236}">
-                <a16:creationId xmlns:a16="http://schemas.microsoft.com/office/drawing/2014/main" id="{9CF4C634-EF74-7B0C-55A9-070768AF8103}"/>
+                <a16:creationId xmlns:a16="http://schemas.microsoft.com/office/drawing/2014/main" id="{5FC76885-1B8B-4894-A981-A14E9A387353}"/>
               </a:ext>
             </a:extLst>
           </p:cNvPr>
-          <p:cNvSpPr/>
+          <p:cNvCxnSpPr>
+            <a:cxnSpLocks/>
+          </p:cNvCxnSpPr>
           <p:nvPr/>
-        </p:nvSpPr>
+        </p:nvCxnSpPr>
         <p:spPr>
-          <a:xfrm rot="1773357">
-            <a:off x="3423167" y="1780908"/>
-            <a:ext cx="50770" cy="50770"/>
+          <a:xfrm>
+            <a:off x="3330056" y="1930762"/>
+            <a:ext cx="169124" cy="0"/>
           </a:xfrm>
-          <a:prstGeom prst="ellipse">
+          <a:prstGeom prst="line">
             <a:avLst/>
           </a:prstGeom>
-          <a:noFill/>
           <a:ln w="12700">
             <a:solidFill>
-              <a:srgbClr val="FF8200"/>
+              <a:schemeClr val="tx1">
+                <a:lumMod val="65000"/>
+                <a:lumOff val="35000"/>
+              </a:schemeClr>
             </a:solidFill>
+            <a:tailEnd type="stealth" w="sm" len="med"/>
           </a:ln>
         </p:spPr>
         <p:style>
           <a:lnRef idx="2">
-            <a:schemeClr val="accent1">
-              <a:shade val="15000"/>
-            </a:schemeClr>
+            <a:schemeClr val="accent1"/>
           </a:lnRef>
-          <a:fillRef idx="1">
+          <a:fillRef idx="0">
             <a:schemeClr val="accent1"/>
           </a:fillRef>
-          <a:effectRef idx="0">
+          <a:effectRef idx="1">
             <a:schemeClr val="accent1"/>
           </a:effectRef>
           <a:fontRef idx="minor">
-            <a:schemeClr val="lt1"/>
+            <a:schemeClr val="tx1"/>
           </a:fontRef>
         </p:style>
-        <p:txBody>
-          <a:bodyPr rtlCol="0" anchor="ctr"/>
-          <a:lstStyle/>
-          <a:p>
-            <a:pPr algn="ctr"/>
-            <a:endParaRPr lang="en-US"/>
-          </a:p>
-        </p:txBody>
-      </p:sp>
-      <p:sp>
-        <p:nvSpPr>
-          <p:cNvPr id="9" name="Oval 8">
-            <a:extLst>
-              <a:ext uri="{FF2B5EF4-FFF2-40B4-BE49-F238E27FC236}">
-                <a16:creationId xmlns:a16="http://schemas.microsoft.com/office/drawing/2014/main" id="{E92867E9-87F0-1A0C-5744-3018ECAD65CC}"/>
-              </a:ext>
-            </a:extLst>
-          </p:cNvPr>
-          <p:cNvSpPr/>
-          <p:nvPr/>
-        </p:nvSpPr>
-        <p:spPr>
-          <a:xfrm rot="1773357">
-            <a:off x="3423165" y="1920750"/>
-            <a:ext cx="50770" cy="50770"/>
-          </a:xfrm>
-          <a:prstGeom prst="ellipse">
-            <a:avLst/>
-          </a:prstGeom>
-          <a:noFill/>
-          <a:ln w="12700">
-            <a:solidFill>
-              <a:srgbClr val="FF8200"/>
-            </a:solidFill>
-          </a:ln>
-        </p:spPr>
-        <p:style>
-          <a:lnRef idx="2">
-            <a:schemeClr val="accent1">
-              <a:shade val="15000"/>
-            </a:schemeClr>
-          </a:lnRef>
-          <a:fillRef idx="1">
-            <a:schemeClr val="accent1"/>
-          </a:fillRef>
-          <a:effectRef idx="0">
-            <a:schemeClr val="accent1"/>
-          </a:effectRef>
-          <a:fontRef idx="minor">
-            <a:schemeClr val="lt1"/>
-          </a:fontRef>
-        </p:style>
-        <p:txBody>
-          <a:bodyPr rtlCol="0" anchor="ctr"/>
-          <a:lstStyle/>
-          <a:p>
-            <a:pPr algn="ctr"/>
-            <a:endParaRPr lang="en-US"/>
-          </a:p>
-        </p:txBody>
-      </p:sp>
-      <p:sp>
-        <p:nvSpPr>
-          <p:cNvPr id="10" name="Oval 9">
-            <a:extLst>
-              <a:ext uri="{FF2B5EF4-FFF2-40B4-BE49-F238E27FC236}">
-                <a16:creationId xmlns:a16="http://schemas.microsoft.com/office/drawing/2014/main" id="{6D902674-4ED7-BD82-7003-2DA0074574D8}"/>
-              </a:ext>
-            </a:extLst>
-          </p:cNvPr>
-          <p:cNvSpPr/>
-          <p:nvPr/>
-        </p:nvSpPr>
-        <p:spPr>
-          <a:xfrm rot="1773357">
-            <a:off x="3423165" y="2060197"/>
-            <a:ext cx="50770" cy="50770"/>
-          </a:xfrm>
-          <a:prstGeom prst="ellipse">
-            <a:avLst/>
-          </a:prstGeom>
-          <a:noFill/>
-          <a:ln w="12700">
-            <a:solidFill>
-              <a:srgbClr val="FF8200"/>
-            </a:solidFill>
-          </a:ln>
-        </p:spPr>
-        <p:style>
-          <a:lnRef idx="2">
-            <a:schemeClr val="accent1">
-              <a:shade val="15000"/>
-            </a:schemeClr>
-          </a:lnRef>
-          <a:fillRef idx="1">
-            <a:schemeClr val="accent1"/>
-          </a:fillRef>
-          <a:effectRef idx="0">
-            <a:schemeClr val="accent1"/>
-          </a:effectRef>
-          <a:fontRef idx="minor">
-            <a:schemeClr val="lt1"/>
-          </a:fontRef>
-        </p:style>
-        <p:txBody>
-          <a:bodyPr rtlCol="0" anchor="ctr"/>
-          <a:lstStyle/>
-          <a:p>
-            <a:pPr algn="ctr"/>
-            <a:endParaRPr lang="en-US"/>
-          </a:p>
-        </p:txBody>
-      </p:sp>
-      <p:sp>
-        <p:nvSpPr>
-          <p:cNvPr id="11" name="Oval 10">
-            <a:extLst>
-              <a:ext uri="{FF2B5EF4-FFF2-40B4-BE49-F238E27FC236}">
-                <a16:creationId xmlns:a16="http://schemas.microsoft.com/office/drawing/2014/main" id="{693FE10B-883A-1A2A-0781-70E0A6ADC4F4}"/>
-              </a:ext>
-            </a:extLst>
-          </p:cNvPr>
-          <p:cNvSpPr/>
-          <p:nvPr/>
-        </p:nvSpPr>
-        <p:spPr>
-          <a:xfrm rot="1773357">
-            <a:off x="3423164" y="2188067"/>
-            <a:ext cx="50770" cy="50770"/>
-          </a:xfrm>
-          <a:prstGeom prst="ellipse">
-            <a:avLst/>
-          </a:prstGeom>
-          <a:noFill/>
-          <a:ln w="12700">
-            <a:solidFill>
-              <a:srgbClr val="FF8200"/>
-            </a:solidFill>
-          </a:ln>
-        </p:spPr>
-        <p:style>
-          <a:lnRef idx="2">
-            <a:schemeClr val="accent1">
-              <a:shade val="15000"/>
-            </a:schemeClr>
-          </a:lnRef>
-          <a:fillRef idx="1">
-            <a:schemeClr val="accent1"/>
-          </a:fillRef>
-          <a:effectRef idx="0">
-            <a:schemeClr val="accent1"/>
-          </a:effectRef>
-          <a:fontRef idx="minor">
-            <a:schemeClr val="lt1"/>
-          </a:fontRef>
-        </p:style>
-        <p:txBody>
-          <a:bodyPr rtlCol="0" anchor="ctr"/>
-          <a:lstStyle/>
-          <a:p>
-            <a:pPr algn="ctr"/>
-            <a:endParaRPr lang="en-US"/>
-          </a:p>
-        </p:txBody>
-      </p:sp>
-      <p:sp>
-        <p:nvSpPr>
-          <p:cNvPr id="12" name="TextBox 11">
-            <a:extLst>
-              <a:ext uri="{FF2B5EF4-FFF2-40B4-BE49-F238E27FC236}">
-                <a16:creationId xmlns:a16="http://schemas.microsoft.com/office/drawing/2014/main" id="{6CD3BD28-048A-BFF5-95A6-2C2D0200C5C9}"/>
-              </a:ext>
-            </a:extLst>
-          </p:cNvPr>
-          <p:cNvSpPr txBox="1"/>
-          <p:nvPr/>
-        </p:nvSpPr>
-        <p:spPr>
-          <a:xfrm>
-            <a:off x="2308684" y="153191"/>
-            <a:ext cx="322524" cy="215444"/>
-          </a:xfrm>
-          <a:prstGeom prst="rect">
-            <a:avLst/>
-          </a:prstGeom>
-          <a:noFill/>
-        </p:spPr>
-        <p:txBody>
-          <a:bodyPr wrap="none" rtlCol="0">
-            <a:spAutoFit/>
-          </a:bodyPr>
-          <a:lstStyle/>
-          <a:p>
-            <a:pPr algn="ctr"/>
-            <a:r>
-              <a:rPr lang="en-US" sz="800" dirty="0">
-                <a:solidFill>
-                  <a:schemeClr val="bg2"/>
-                </a:solidFill>
-                <a:latin typeface="Helvetica" pitchFamily="2" charset="0"/>
-              </a:rPr>
-              <a:t>Q1</a:t>
-            </a:r>
-          </a:p>
-        </p:txBody>
-      </p:sp>
-      <p:sp>
-        <p:nvSpPr>
-          <p:cNvPr id="13" name="TextBox 12">
-            <a:extLst>
-              <a:ext uri="{FF2B5EF4-FFF2-40B4-BE49-F238E27FC236}">
-                <a16:creationId xmlns:a16="http://schemas.microsoft.com/office/drawing/2014/main" id="{8043869E-9DF3-BB09-A404-432CCD080306}"/>
-              </a:ext>
-            </a:extLst>
-          </p:cNvPr>
-          <p:cNvSpPr txBox="1"/>
-          <p:nvPr/>
-        </p:nvSpPr>
-        <p:spPr>
-          <a:xfrm>
-            <a:off x="329075" y="153191"/>
-            <a:ext cx="322524" cy="215444"/>
-          </a:xfrm>
-          <a:prstGeom prst="rect">
-            <a:avLst/>
-          </a:prstGeom>
-          <a:noFill/>
-        </p:spPr>
-        <p:txBody>
-          <a:bodyPr wrap="none" rtlCol="0">
-            <a:spAutoFit/>
-          </a:bodyPr>
-          <a:lstStyle/>
-          <a:p>
-            <a:pPr algn="ctr"/>
-            <a:r>
-              <a:rPr lang="en-US" sz="800" dirty="0">
-                <a:solidFill>
-                  <a:schemeClr val="bg2">
-                    <a:lumMod val="75000"/>
-                  </a:schemeClr>
-                </a:solidFill>
-                <a:latin typeface="Helvetica" pitchFamily="2" charset="0"/>
-              </a:rPr>
-              <a:t>Q2</a:t>
-            </a:r>
-          </a:p>
-        </p:txBody>
-      </p:sp>
-      <p:sp>
-        <p:nvSpPr>
-          <p:cNvPr id="14" name="TextBox 13">
-            <a:extLst>
-              <a:ext uri="{FF2B5EF4-FFF2-40B4-BE49-F238E27FC236}">
-                <a16:creationId xmlns:a16="http://schemas.microsoft.com/office/drawing/2014/main" id="{EBA98D3E-2314-D83B-A30C-955D9C4E3987}"/>
-              </a:ext>
-            </a:extLst>
-          </p:cNvPr>
-          <p:cNvSpPr txBox="1"/>
-          <p:nvPr/>
-        </p:nvSpPr>
-        <p:spPr>
-          <a:xfrm>
-            <a:off x="2308684" y="2162908"/>
-            <a:ext cx="322524" cy="215444"/>
-          </a:xfrm>
-          <a:prstGeom prst="rect">
-            <a:avLst/>
-          </a:prstGeom>
-          <a:noFill/>
-        </p:spPr>
-        <p:txBody>
-          <a:bodyPr wrap="none" rtlCol="0">
-            <a:spAutoFit/>
-          </a:bodyPr>
-          <a:lstStyle/>
-          <a:p>
-            <a:r>
-              <a:rPr lang="en-US" sz="800" dirty="0">
-                <a:solidFill>
-                  <a:schemeClr val="bg2"/>
-                </a:solidFill>
-                <a:latin typeface="Helvetica" pitchFamily="2" charset="0"/>
-              </a:rPr>
-              <a:t>Q4</a:t>
-            </a:r>
-          </a:p>
-        </p:txBody>
-      </p:sp>
-      <p:sp>
-        <p:nvSpPr>
-          <p:cNvPr id="15" name="TextBox 14">
-            <a:extLst>
-              <a:ext uri="{FF2B5EF4-FFF2-40B4-BE49-F238E27FC236}">
-                <a16:creationId xmlns:a16="http://schemas.microsoft.com/office/drawing/2014/main" id="{9C62D33F-DC1F-67E4-9D8E-D9C8EFF112BC}"/>
-              </a:ext>
-            </a:extLst>
-          </p:cNvPr>
-          <p:cNvSpPr txBox="1"/>
-          <p:nvPr/>
-        </p:nvSpPr>
-        <p:spPr>
-          <a:xfrm>
-            <a:off x="329075" y="2162908"/>
-            <a:ext cx="322524" cy="215444"/>
-          </a:xfrm>
-          <a:prstGeom prst="rect">
-            <a:avLst/>
-          </a:prstGeom>
-          <a:noFill/>
-        </p:spPr>
-        <p:txBody>
-          <a:bodyPr wrap="none" rtlCol="0">
-            <a:spAutoFit/>
-          </a:bodyPr>
-          <a:lstStyle/>
-          <a:p>
-            <a:r>
-              <a:rPr lang="en-US" sz="800" dirty="0">
-                <a:solidFill>
-                  <a:schemeClr val="bg2">
-                    <a:lumMod val="75000"/>
-                  </a:schemeClr>
-                </a:solidFill>
-                <a:latin typeface="Helvetica" pitchFamily="2" charset="0"/>
-              </a:rPr>
-              <a:t>Q3</a:t>
-            </a:r>
-          </a:p>
-        </p:txBody>
-      </p:sp>
+      </p:cxnSp>
     </p:spTree>
     <p:extLst>
       <p:ext uri="{BB962C8B-B14F-4D97-AF65-F5344CB8AC3E}">
@@ -6775,4 +8483,319 @@
     </a:ext>
   </a:extLst>
 </a:theme>
+</file>
+
+<file path=ppt/theme/theme2.xml><?xml version="1.0" encoding="utf-8"?>
+<a:theme xmlns:a="http://schemas.openxmlformats.org/drawingml/2006/main" name="Office Theme">
+  <a:themeElements>
+    <a:clrScheme name="Office">
+      <a:dk1>
+        <a:sysClr val="windowText" lastClr="000000"/>
+      </a:dk1>
+      <a:lt1>
+        <a:sysClr val="window" lastClr="FFFFFF"/>
+      </a:lt1>
+      <a:dk2>
+        <a:srgbClr val="0E2841"/>
+      </a:dk2>
+      <a:lt2>
+        <a:srgbClr val="E8E8E8"/>
+      </a:lt2>
+      <a:accent1>
+        <a:srgbClr val="156082"/>
+      </a:accent1>
+      <a:accent2>
+        <a:srgbClr val="E97132"/>
+      </a:accent2>
+      <a:accent3>
+        <a:srgbClr val="196B24"/>
+      </a:accent3>
+      <a:accent4>
+        <a:srgbClr val="0F9ED5"/>
+      </a:accent4>
+      <a:accent5>
+        <a:srgbClr val="A02B93"/>
+      </a:accent5>
+      <a:accent6>
+        <a:srgbClr val="4EA72E"/>
+      </a:accent6>
+      <a:hlink>
+        <a:srgbClr val="467886"/>
+      </a:hlink>
+      <a:folHlink>
+        <a:srgbClr val="96607D"/>
+      </a:folHlink>
+    </a:clrScheme>
+    <a:fontScheme name="Office">
+      <a:majorFont>
+        <a:latin typeface="Aptos Display" panose="02110004020202020204"/>
+        <a:ea typeface=""/>
+        <a:cs typeface=""/>
+        <a:font script="Jpan" typeface="游ゴシック Light"/>
+        <a:font script="Hang" typeface="맑은 고딕"/>
+        <a:font script="Hans" typeface="等线 Light"/>
+        <a:font script="Hant" typeface="新細明體"/>
+        <a:font script="Arab" typeface="Times New Roman"/>
+        <a:font script="Hebr" typeface="Times New Roman"/>
+        <a:font script="Thai" typeface="Angsana New"/>
+        <a:font script="Ethi" typeface="Nyala"/>
+        <a:font script="Beng" typeface="Vrinda"/>
+        <a:font script="Gujr" typeface="Shruti"/>
+        <a:font script="Khmr" typeface="MoolBoran"/>
+        <a:font script="Knda" typeface="Tunga"/>
+        <a:font script="Guru" typeface="Raavi"/>
+        <a:font script="Cans" typeface="Euphemia"/>
+        <a:font script="Cher" typeface="Plantagenet Cherokee"/>
+        <a:font script="Yiii" typeface="Microsoft Yi Baiti"/>
+        <a:font script="Tibt" typeface="Microsoft Himalaya"/>
+        <a:font script="Thaa" typeface="MV Boli"/>
+        <a:font script="Deva" typeface="Mangal"/>
+        <a:font script="Telu" typeface="Gautami"/>
+        <a:font script="Taml" typeface="Latha"/>
+        <a:font script="Syrc" typeface="Estrangelo Edessa"/>
+        <a:font script="Orya" typeface="Kalinga"/>
+        <a:font script="Mlym" typeface="Kartika"/>
+        <a:font script="Laoo" typeface="DokChampa"/>
+        <a:font script="Sinh" typeface="Iskoola Pota"/>
+        <a:font script="Mong" typeface="Mongolian Baiti"/>
+        <a:font script="Viet" typeface="Times New Roman"/>
+        <a:font script="Uigh" typeface="Microsoft Uighur"/>
+        <a:font script="Geor" typeface="Sylfaen"/>
+        <a:font script="Armn" typeface="Arial"/>
+        <a:font script="Bugi" typeface="Leelawadee UI"/>
+        <a:font script="Bopo" typeface="Microsoft JhengHei"/>
+        <a:font script="Java" typeface="Javanese Text"/>
+        <a:font script="Lisu" typeface="Segoe UI"/>
+        <a:font script="Mymr" typeface="Myanmar Text"/>
+        <a:font script="Nkoo" typeface="Ebrima"/>
+        <a:font script="Olck" typeface="Nirmala UI"/>
+        <a:font script="Osma" typeface="Ebrima"/>
+        <a:font script="Phag" typeface="Phagspa"/>
+        <a:font script="Syrn" typeface="Estrangelo Edessa"/>
+        <a:font script="Syrj" typeface="Estrangelo Edessa"/>
+        <a:font script="Syre" typeface="Estrangelo Edessa"/>
+        <a:font script="Sora" typeface="Nirmala UI"/>
+        <a:font script="Tale" typeface="Microsoft Tai Le"/>
+        <a:font script="Talu" typeface="Microsoft New Tai Lue"/>
+        <a:font script="Tfng" typeface="Ebrima"/>
+      </a:majorFont>
+      <a:minorFont>
+        <a:latin typeface="Aptos" panose="02110004020202020204"/>
+        <a:ea typeface=""/>
+        <a:cs typeface=""/>
+        <a:font script="Jpan" typeface="游ゴシック"/>
+        <a:font script="Hang" typeface="맑은 고딕"/>
+        <a:font script="Hans" typeface="等线"/>
+        <a:font script="Hant" typeface="新細明體"/>
+        <a:font script="Arab" typeface="Arial"/>
+        <a:font script="Hebr" typeface="Arial"/>
+        <a:font script="Thai" typeface="Cordia New"/>
+        <a:font script="Ethi" typeface="Nyala"/>
+        <a:font script="Beng" typeface="Vrinda"/>
+        <a:font script="Gujr" typeface="Shruti"/>
+        <a:font script="Khmr" typeface="DaunPenh"/>
+        <a:font script="Knda" typeface="Tunga"/>
+        <a:font script="Guru" typeface="Raavi"/>
+        <a:font script="Cans" typeface="Euphemia"/>
+        <a:font script="Cher" typeface="Plantagenet Cherokee"/>
+        <a:font script="Yiii" typeface="Microsoft Yi Baiti"/>
+        <a:font script="Tibt" typeface="Microsoft Himalaya"/>
+        <a:font script="Thaa" typeface="MV Boli"/>
+        <a:font script="Deva" typeface="Mangal"/>
+        <a:font script="Telu" typeface="Gautami"/>
+        <a:font script="Taml" typeface="Latha"/>
+        <a:font script="Syrc" typeface="Estrangelo Edessa"/>
+        <a:font script="Orya" typeface="Kalinga"/>
+        <a:font script="Mlym" typeface="Kartika"/>
+        <a:font script="Laoo" typeface="DokChampa"/>
+        <a:font script="Sinh" typeface="Iskoola Pota"/>
+        <a:font script="Mong" typeface="Mongolian Baiti"/>
+        <a:font script="Viet" typeface="Arial"/>
+        <a:font script="Uigh" typeface="Microsoft Uighur"/>
+        <a:font script="Geor" typeface="Sylfaen"/>
+        <a:font script="Armn" typeface="Arial"/>
+        <a:font script="Bugi" typeface="Leelawadee UI"/>
+        <a:font script="Bopo" typeface="Microsoft JhengHei"/>
+        <a:font script="Java" typeface="Javanese Text"/>
+        <a:font script="Lisu" typeface="Segoe UI"/>
+        <a:font script="Mymr" typeface="Myanmar Text"/>
+        <a:font script="Nkoo" typeface="Ebrima"/>
+        <a:font script="Olck" typeface="Nirmala UI"/>
+        <a:font script="Osma" typeface="Ebrima"/>
+        <a:font script="Phag" typeface="Phagspa"/>
+        <a:font script="Syrn" typeface="Estrangelo Edessa"/>
+        <a:font script="Syrj" typeface="Estrangelo Edessa"/>
+        <a:font script="Syre" typeface="Estrangelo Edessa"/>
+        <a:font script="Sora" typeface="Nirmala UI"/>
+        <a:font script="Tale" typeface="Microsoft Tai Le"/>
+        <a:font script="Talu" typeface="Microsoft New Tai Lue"/>
+        <a:font script="Tfng" typeface="Ebrima"/>
+      </a:minorFont>
+    </a:fontScheme>
+    <a:fmtScheme name="Office">
+      <a:fillStyleLst>
+        <a:solidFill>
+          <a:schemeClr val="phClr"/>
+        </a:solidFill>
+        <a:gradFill rotWithShape="1">
+          <a:gsLst>
+            <a:gs pos="0">
+              <a:schemeClr val="phClr">
+                <a:lumMod val="110000"/>
+                <a:satMod val="105000"/>
+                <a:tint val="67000"/>
+              </a:schemeClr>
+            </a:gs>
+            <a:gs pos="50000">
+              <a:schemeClr val="phClr">
+                <a:lumMod val="105000"/>
+                <a:satMod val="103000"/>
+                <a:tint val="73000"/>
+              </a:schemeClr>
+            </a:gs>
+            <a:gs pos="100000">
+              <a:schemeClr val="phClr">
+                <a:lumMod val="105000"/>
+                <a:satMod val="109000"/>
+                <a:tint val="81000"/>
+              </a:schemeClr>
+            </a:gs>
+          </a:gsLst>
+          <a:lin ang="5400000" scaled="0"/>
+        </a:gradFill>
+        <a:gradFill rotWithShape="1">
+          <a:gsLst>
+            <a:gs pos="0">
+              <a:schemeClr val="phClr">
+                <a:satMod val="103000"/>
+                <a:lumMod val="102000"/>
+                <a:tint val="94000"/>
+              </a:schemeClr>
+            </a:gs>
+            <a:gs pos="50000">
+              <a:schemeClr val="phClr">
+                <a:satMod val="110000"/>
+                <a:lumMod val="100000"/>
+                <a:shade val="100000"/>
+              </a:schemeClr>
+            </a:gs>
+            <a:gs pos="100000">
+              <a:schemeClr val="phClr">
+                <a:lumMod val="99000"/>
+                <a:satMod val="120000"/>
+                <a:shade val="78000"/>
+              </a:schemeClr>
+            </a:gs>
+          </a:gsLst>
+          <a:lin ang="5400000" scaled="0"/>
+        </a:gradFill>
+      </a:fillStyleLst>
+      <a:lnStyleLst>
+        <a:ln w="12700" cap="flat" cmpd="sng" algn="ctr">
+          <a:solidFill>
+            <a:schemeClr val="phClr"/>
+          </a:solidFill>
+          <a:prstDash val="solid"/>
+          <a:miter lim="800000"/>
+        </a:ln>
+        <a:ln w="19050" cap="flat" cmpd="sng" algn="ctr">
+          <a:solidFill>
+            <a:schemeClr val="phClr"/>
+          </a:solidFill>
+          <a:prstDash val="solid"/>
+          <a:miter lim="800000"/>
+        </a:ln>
+        <a:ln w="25400" cap="flat" cmpd="sng" algn="ctr">
+          <a:solidFill>
+            <a:schemeClr val="phClr"/>
+          </a:solidFill>
+          <a:prstDash val="solid"/>
+          <a:miter lim="800000"/>
+        </a:ln>
+      </a:lnStyleLst>
+      <a:effectStyleLst>
+        <a:effectStyle>
+          <a:effectLst/>
+        </a:effectStyle>
+        <a:effectStyle>
+          <a:effectLst/>
+        </a:effectStyle>
+        <a:effectStyle>
+          <a:effectLst>
+            <a:outerShdw blurRad="57150" dist="19050" dir="5400000" algn="ctr" rotWithShape="0">
+              <a:srgbClr val="000000">
+                <a:alpha val="63000"/>
+              </a:srgbClr>
+            </a:outerShdw>
+          </a:effectLst>
+        </a:effectStyle>
+      </a:effectStyleLst>
+      <a:bgFillStyleLst>
+        <a:solidFill>
+          <a:schemeClr val="phClr"/>
+        </a:solidFill>
+        <a:solidFill>
+          <a:schemeClr val="phClr">
+            <a:tint val="95000"/>
+            <a:satMod val="170000"/>
+          </a:schemeClr>
+        </a:solidFill>
+        <a:gradFill rotWithShape="1">
+          <a:gsLst>
+            <a:gs pos="0">
+              <a:schemeClr val="phClr">
+                <a:tint val="93000"/>
+                <a:satMod val="150000"/>
+                <a:shade val="98000"/>
+                <a:lumMod val="102000"/>
+              </a:schemeClr>
+            </a:gs>
+            <a:gs pos="50000">
+              <a:schemeClr val="phClr">
+                <a:tint val="98000"/>
+                <a:satMod val="130000"/>
+                <a:shade val="90000"/>
+                <a:lumMod val="103000"/>
+              </a:schemeClr>
+            </a:gs>
+            <a:gs pos="100000">
+              <a:schemeClr val="phClr">
+                <a:shade val="63000"/>
+                <a:satMod val="120000"/>
+              </a:schemeClr>
+            </a:gs>
+          </a:gsLst>
+          <a:lin ang="5400000" scaled="0"/>
+        </a:gradFill>
+      </a:bgFillStyleLst>
+    </a:fmtScheme>
+  </a:themeElements>
+  <a:objectDefaults>
+    <a:lnDef>
+      <a:spPr/>
+      <a:bodyPr/>
+      <a:lstStyle/>
+      <a:style>
+        <a:lnRef idx="2">
+          <a:schemeClr val="accent1"/>
+        </a:lnRef>
+        <a:fillRef idx="0">
+          <a:schemeClr val="accent1"/>
+        </a:fillRef>
+        <a:effectRef idx="1">
+          <a:schemeClr val="accent1"/>
+        </a:effectRef>
+        <a:fontRef idx="minor">
+          <a:schemeClr val="tx1"/>
+        </a:fontRef>
+      </a:style>
+    </a:lnDef>
+  </a:objectDefaults>
+  <a:extraClrSchemeLst/>
+  <a:extLst>
+    <a:ext uri="{05A4C25C-085E-4340-85A3-A5531E510DB2}">
+      <thm15:themeFamily xmlns:thm15="http://schemas.microsoft.com/office/thememl/2012/main" name="Office Theme" id="{2E142A2C-CD16-42D6-873A-C26D2A0506FA}" vid="{1BDDFF52-6CD6-40A5-AB3C-68EB2F1E4D0A}"/>
+    </a:ext>
+  </a:extLst>
+</a:theme>
 </file>